--- a/phase2/runs/khoa/MCP-TS-SDK-phase2.pptx
+++ b/phase2/runs/khoa/MCP-TS-SDK-phase2.pptx
@@ -2,43 +2,43 @@
 <file path=ppt/presentation.xml><?xml version="1.0" encoding="utf-8"?>
 <p:presentation xmlns:p="http://schemas.openxmlformats.org/presentationml/2006/main">
   <p:sldMasterIdLst>
-    <p:sldMasterId xmlns:r="http://schemas.openxmlformats.org/officeDocument/2006/relationships" id="2147483648" r:id="R0f4fff3bdda2498a"/>
+    <p:sldMasterId xmlns:r="http://schemas.openxmlformats.org/officeDocument/2006/relationships" id="2147483648" r:id="Ref8c47e2b3cf4d0d"/>
   </p:sldMasterIdLst>
   <p:notesMasterIdLst>
-    <p:notesMasterId xmlns:r="http://schemas.openxmlformats.org/officeDocument/2006/relationships" r:id="R4db4c8d52209454f"/>
+    <p:notesMasterId xmlns:r="http://schemas.openxmlformats.org/officeDocument/2006/relationships" r:id="Ra2b0ba9bc5344d01"/>
   </p:notesMasterIdLst>
   <p:sldIdLst>
-    <p:sldId xmlns:r="http://schemas.openxmlformats.org/officeDocument/2006/relationships" id="256" r:id="R027c4e36e10f4af6"/>
-    <p:sldId xmlns:r="http://schemas.openxmlformats.org/officeDocument/2006/relationships" id="257" r:id="R2b80560e75544458"/>
-    <p:sldId xmlns:r="http://schemas.openxmlformats.org/officeDocument/2006/relationships" id="258" r:id="Rd4534d46fc2440b6"/>
-    <p:sldId xmlns:r="http://schemas.openxmlformats.org/officeDocument/2006/relationships" id="259" r:id="R610a63c910514573"/>
-    <p:sldId xmlns:r="http://schemas.openxmlformats.org/officeDocument/2006/relationships" id="260" r:id="R628a539fff634f81"/>
-    <p:sldId xmlns:r="http://schemas.openxmlformats.org/officeDocument/2006/relationships" id="261" r:id="R887cda4374bf4f17"/>
-    <p:sldId xmlns:r="http://schemas.openxmlformats.org/officeDocument/2006/relationships" id="262" r:id="Rd1ce9ff3b4ad4fe9"/>
-    <p:sldId xmlns:r="http://schemas.openxmlformats.org/officeDocument/2006/relationships" id="263" r:id="R169f8f1b67184b6c"/>
-    <p:sldId xmlns:r="http://schemas.openxmlformats.org/officeDocument/2006/relationships" id="264" r:id="R23c16624f7f24b63"/>
-    <p:sldId xmlns:r="http://schemas.openxmlformats.org/officeDocument/2006/relationships" id="265" r:id="R3a0985a98e9d4089"/>
-    <p:sldId xmlns:r="http://schemas.openxmlformats.org/officeDocument/2006/relationships" id="266" r:id="Re934603ce55a404e"/>
-    <p:sldId xmlns:r="http://schemas.openxmlformats.org/officeDocument/2006/relationships" id="267" r:id="R7ce975b47d924c14"/>
-    <p:sldId xmlns:r="http://schemas.openxmlformats.org/officeDocument/2006/relationships" id="268" r:id="R2707968ee60e4ebb"/>
-    <p:sldId xmlns:r="http://schemas.openxmlformats.org/officeDocument/2006/relationships" id="269" r:id="R7412394cb4854ac3"/>
-    <p:sldId xmlns:r="http://schemas.openxmlformats.org/officeDocument/2006/relationships" id="270" r:id="Re347aee482234459"/>
-    <p:sldId xmlns:r="http://schemas.openxmlformats.org/officeDocument/2006/relationships" id="271" r:id="Ref7cb35d95c64df0"/>
-    <p:sldId xmlns:r="http://schemas.openxmlformats.org/officeDocument/2006/relationships" id="272" r:id="R07f0a50da4c24d38"/>
-    <p:sldId xmlns:r="http://schemas.openxmlformats.org/officeDocument/2006/relationships" id="273" r:id="Rd8958a1cc1224062"/>
-    <p:sldId xmlns:r="http://schemas.openxmlformats.org/officeDocument/2006/relationships" id="274" r:id="Rf6c2e3ac23cb48aa"/>
-    <p:sldId xmlns:r="http://schemas.openxmlformats.org/officeDocument/2006/relationships" id="275" r:id="R5d5be1b57958471a"/>
-    <p:sldId xmlns:r="http://schemas.openxmlformats.org/officeDocument/2006/relationships" id="276" r:id="Re6783d41e0d54b90"/>
-    <p:sldId xmlns:r="http://schemas.openxmlformats.org/officeDocument/2006/relationships" id="277" r:id="R61e13a21045649cb"/>
-    <p:sldId xmlns:r="http://schemas.openxmlformats.org/officeDocument/2006/relationships" id="278" r:id="R2e2252482b664fc9"/>
-    <p:sldId xmlns:r="http://schemas.openxmlformats.org/officeDocument/2006/relationships" id="279" r:id="R6777aac8d4f04fe8"/>
-    <p:sldId xmlns:r="http://schemas.openxmlformats.org/officeDocument/2006/relationships" id="280" r:id="Rca2664a158f44b6e"/>
-    <p:sldId xmlns:r="http://schemas.openxmlformats.org/officeDocument/2006/relationships" id="281" r:id="R5aa2f875aefb495e"/>
-    <p:sldId xmlns:r="http://schemas.openxmlformats.org/officeDocument/2006/relationships" id="282" r:id="R4c8ef74184064cfb"/>
-    <p:sldId xmlns:r="http://schemas.openxmlformats.org/officeDocument/2006/relationships" id="283" r:id="R2dc8621a12144919"/>
-    <p:sldId xmlns:r="http://schemas.openxmlformats.org/officeDocument/2006/relationships" id="284" r:id="Rbbfc64df03cd4e8e"/>
-    <p:sldId xmlns:r="http://schemas.openxmlformats.org/officeDocument/2006/relationships" id="285" r:id="R6590fc880ea34674"/>
-    <p:sldId xmlns:r="http://schemas.openxmlformats.org/officeDocument/2006/relationships" id="286" r:id="R68eb03502b004d4d"/>
+    <p:sldId xmlns:r="http://schemas.openxmlformats.org/officeDocument/2006/relationships" id="256" r:id="Rc2d7f9fba1154420"/>
+    <p:sldId xmlns:r="http://schemas.openxmlformats.org/officeDocument/2006/relationships" id="257" r:id="R635207f3f2fa4a97"/>
+    <p:sldId xmlns:r="http://schemas.openxmlformats.org/officeDocument/2006/relationships" id="258" r:id="R321cf5115a4d4278"/>
+    <p:sldId xmlns:r="http://schemas.openxmlformats.org/officeDocument/2006/relationships" id="259" r:id="R6d2122cb0ef24589"/>
+    <p:sldId xmlns:r="http://schemas.openxmlformats.org/officeDocument/2006/relationships" id="260" r:id="R986b118274c64cb4"/>
+    <p:sldId xmlns:r="http://schemas.openxmlformats.org/officeDocument/2006/relationships" id="261" r:id="Ra0172f072dd14acd"/>
+    <p:sldId xmlns:r="http://schemas.openxmlformats.org/officeDocument/2006/relationships" id="262" r:id="R9d6dde68e7bb4e6d"/>
+    <p:sldId xmlns:r="http://schemas.openxmlformats.org/officeDocument/2006/relationships" id="263" r:id="R2d103c08b6354b9b"/>
+    <p:sldId xmlns:r="http://schemas.openxmlformats.org/officeDocument/2006/relationships" id="264" r:id="R0c1c38e4965141a8"/>
+    <p:sldId xmlns:r="http://schemas.openxmlformats.org/officeDocument/2006/relationships" id="265" r:id="R124580f36aee4efc"/>
+    <p:sldId xmlns:r="http://schemas.openxmlformats.org/officeDocument/2006/relationships" id="266" r:id="Reea37fd989b64276"/>
+    <p:sldId xmlns:r="http://schemas.openxmlformats.org/officeDocument/2006/relationships" id="267" r:id="R6e869eba79f14479"/>
+    <p:sldId xmlns:r="http://schemas.openxmlformats.org/officeDocument/2006/relationships" id="268" r:id="R6050a724b402483c"/>
+    <p:sldId xmlns:r="http://schemas.openxmlformats.org/officeDocument/2006/relationships" id="269" r:id="R7eb4f93b3941463f"/>
+    <p:sldId xmlns:r="http://schemas.openxmlformats.org/officeDocument/2006/relationships" id="270" r:id="Rb3b1bfc8e9f84b0d"/>
+    <p:sldId xmlns:r="http://schemas.openxmlformats.org/officeDocument/2006/relationships" id="271" r:id="Re8ab1807a3414bd4"/>
+    <p:sldId xmlns:r="http://schemas.openxmlformats.org/officeDocument/2006/relationships" id="272" r:id="Rcde1ddc93ac24046"/>
+    <p:sldId xmlns:r="http://schemas.openxmlformats.org/officeDocument/2006/relationships" id="273" r:id="Rd30362053c8e4f5b"/>
+    <p:sldId xmlns:r="http://schemas.openxmlformats.org/officeDocument/2006/relationships" id="274" r:id="R22920ccb1e444279"/>
+    <p:sldId xmlns:r="http://schemas.openxmlformats.org/officeDocument/2006/relationships" id="275" r:id="R3d3f03fa71b349ee"/>
+    <p:sldId xmlns:r="http://schemas.openxmlformats.org/officeDocument/2006/relationships" id="276" r:id="R962f4d9ec20d4b83"/>
+    <p:sldId xmlns:r="http://schemas.openxmlformats.org/officeDocument/2006/relationships" id="277" r:id="Refa3fa368a414a5c"/>
+    <p:sldId xmlns:r="http://schemas.openxmlformats.org/officeDocument/2006/relationships" id="278" r:id="Ra8cb7d88d83a47f5"/>
+    <p:sldId xmlns:r="http://schemas.openxmlformats.org/officeDocument/2006/relationships" id="279" r:id="R2961c67db21c4d76"/>
+    <p:sldId xmlns:r="http://schemas.openxmlformats.org/officeDocument/2006/relationships" id="280" r:id="R1fb23277c1d242d7"/>
+    <p:sldId xmlns:r="http://schemas.openxmlformats.org/officeDocument/2006/relationships" id="281" r:id="Rc5e4871d5d4f4044"/>
+    <p:sldId xmlns:r="http://schemas.openxmlformats.org/officeDocument/2006/relationships" id="282" r:id="R80e62866e67f4adb"/>
+    <p:sldId xmlns:r="http://schemas.openxmlformats.org/officeDocument/2006/relationships" id="283" r:id="R8cdd8482cc064d19"/>
+    <p:sldId xmlns:r="http://schemas.openxmlformats.org/officeDocument/2006/relationships" id="284" r:id="R8384fd97717d4764"/>
+    <p:sldId xmlns:r="http://schemas.openxmlformats.org/officeDocument/2006/relationships" id="285" r:id="R4680711911de4120"/>
+    <p:sldId xmlns:r="http://schemas.openxmlformats.org/officeDocument/2006/relationships" id="286" r:id="R3694fb0e51004d9b"/>
   </p:sldIdLst>
   <p:sldSz cx="12192000" cy="6858000"/>
   <p:notesSz cx="6858000" cy="9144000"/>
@@ -487,7 +487,7 @@
           </a:p>
           <a:p xmlns:a="http://schemas.openxmlformats.org/drawingml/2006/main">
             <a:r>
-              <a:t>Data is synthetic. Finance results were measured from the PR 2 feature snapshot; its code was not merged into main.</a:t>
+              <a:t>Data is synthetic. Shared runs use main only. Finance examples are provisional PR2 snapshots and excluded from the shared CSV.</a:t>
             </a:r>
           </a:p>
         </p:txBody>
@@ -572,7 +572,7 @@
           </a:p>
           <a:p xmlns:a="http://schemas.openxmlformats.org/drawingml/2006/main">
             <a:r>
-              <a:t>Data is synthetic. Finance results were measured from the PR 2 feature snapshot; its code was not merged into main.</a:t>
+              <a:t>Data is synthetic. Shared runs use main only. Finance examples are provisional PR2 snapshots and excluded from the shared CSV.</a:t>
             </a:r>
           </a:p>
         </p:txBody>
@@ -657,7 +657,7 @@
           </a:p>
           <a:p xmlns:a="http://schemas.openxmlformats.org/drawingml/2006/main">
             <a:r>
-              <a:t>Data is synthetic. Finance results were measured from the PR 2 feature snapshot; its code was not merged into main.</a:t>
+              <a:t>Data is synthetic. Shared runs use main only. Finance examples are provisional PR2 snapshots and excluded from the shared CSV.</a:t>
             </a:r>
           </a:p>
         </p:txBody>
@@ -742,7 +742,7 @@
           </a:p>
           <a:p xmlns:a="http://schemas.openxmlformats.org/drawingml/2006/main">
             <a:r>
-              <a:t>Data is synthetic. Finance results were measured from the PR 2 feature snapshot; its code was not merged into main.</a:t>
+              <a:t>Data is synthetic. Shared runs use main only. Finance examples are provisional PR2 snapshots and excluded from the shared CSV.</a:t>
             </a:r>
           </a:p>
         </p:txBody>
@@ -812,7 +812,7 @@
           <a:lstStyle xmlns:a="http://schemas.openxmlformats.org/drawingml/2006/main"/>
           <a:p xmlns:a="http://schemas.openxmlformats.org/drawingml/2006/main">
             <a:r>
-              <a:t>Tien’s tuition tools show the amount due, the amount paid and the remaining balance. The balance is the amount due minus the amount paid. We test paid and unpaid payment examples. We also ask for the total outstanding balance of a class. These financial values come from the finance snapshot, and the complete results are in the new logs.</a:t>
+              <a:t>This is a provisional tuition example from the finance pull request. The server calculates the amount due, the amount paid and the remaining balance. A balance is the amount due minus the amount paid. These figures were measured on the older finance snapshot. We keep them for explaining the feature, but we must recalculate them after finance uses the shared data on main.</a:t>
             </a:r>
           </a:p>
           <a:p xmlns:a="http://schemas.openxmlformats.org/drawingml/2006/main">
@@ -822,12 +822,12 @@
           </a:p>
           <a:p xmlns:a="http://schemas.openxmlformats.org/drawingml/2006/main">
             <a:r>
-              <a:t>Sources: K16 to K19; finance snapshot Finance PR 2 snapshot 530d5da</a:t>
+              <a:t>Sources: finance-pending.csv K16–K19; provisional PR2 snapshot 530d5da</a:t>
             </a:r>
           </a:p>
           <a:p xmlns:a="http://schemas.openxmlformats.org/drawingml/2006/main">
             <a:r>
-              <a:t>Data is synthetic. Finance results were measured from the PR 2 feature snapshot; its code was not merged into main.</a:t>
+              <a:t>Data is synthetic. Shared runs use main only. Finance examples are provisional PR2 snapshots and excluded from the shared CSV.</a:t>
             </a:r>
           </a:p>
         </p:txBody>
@@ -897,7 +897,7 @@
           <a:lstStyle xmlns:a="http://schemas.openxmlformats.org/drawingml/2006/main"/>
           <a:p xmlns:a="http://schemas.openxmlformats.org/drawingml/2006/main">
             <a:r>
-              <a:t>Scholarship eligibility has several conditions. A high GPA alone is not enough. The finance server checks conduct, tuition and owed courses as well. The ranking tool then orders eligible candidates by GPA and conduct, with the student ID as a final tie-break. The model reports the server’s decision. It should not decide scholarship eligibility from a student’s name or from GPA alone.</a:t>
+              <a:t>The pending finance feature checks several conditions for a scholarship. A high GPA alone is not enough. The code also checks conduct, paid tuition and owed courses. We can explain these rules now. However, the financial test expectations remain provisional until the feature uses the same student and conduct data as main.</a:t>
             </a:r>
           </a:p>
           <a:p xmlns:a="http://schemas.openxmlformats.org/drawingml/2006/main">
@@ -912,7 +912,7 @@
           </a:p>
           <a:p xmlns:a="http://schemas.openxmlformats.org/drawingml/2006/main">
             <a:r>
-              <a:t>Data is synthetic. Finance results were measured from the PR 2 feature snapshot; its code was not merged into main.</a:t>
+              <a:t>Data is synthetic. Shared runs use main only. Finance examples are provisional PR2 snapshots and excluded from the shared CSV.</a:t>
             </a:r>
           </a:p>
         </p:txBody>
@@ -982,7 +982,7 @@
           <a:lstStyle xmlns:a="http://schemas.openxmlformats.org/drawingml/2006/main"/>
           <a:p xmlns:a="http://schemas.openxmlformats.org/drawingml/2006/main">
             <a:r>
-              <a:t>This is a concrete ranking example from our finance snapshot. The question asks for scholarship S C H zero two in Information Technology. The Excel sheet checks the eligibility conditions for each student and calculates a rank. We compare the tool’s eligible count and first candidate with that independent reference. The result is a candidate list, not an automatic scholarship approval.</a:t>
+              <a:t>This ranking is an example from the older finance snapshot. Nine candidates qualify and student two two zero one zero one six ranks first. Those numbers are provisional. They do not describe the current shared dataset. After finance is rebased and merged, we will recalculate the candidate list from the common CSV files before restoring this test to the benchmark.</a:t>
             </a:r>
           </a:p>
           <a:p xmlns:a="http://schemas.openxmlformats.org/drawingml/2006/main">
@@ -992,12 +992,12 @@
           </a:p>
           <a:p xmlns:a="http://schemas.openxmlformats.org/drawingml/2006/main">
             <a:r>
-              <a:t>Sources: K21; Excel ScholarshipCheck sheet</a:t>
+              <a:t>Sources: finance-pending.csv K21; provisional PR2 snapshot 530d5da</a:t>
             </a:r>
           </a:p>
           <a:p xmlns:a="http://schemas.openxmlformats.org/drawingml/2006/main">
             <a:r>
-              <a:t>Data is synthetic. Finance results were measured from the PR 2 feature snapshot; its code was not merged into main.</a:t>
+              <a:t>Data is synthetic. Shared runs use main only. Finance examples are provisional PR2 snapshots and excluded from the shared CSV.</a:t>
             </a:r>
           </a:p>
         </p:txBody>
@@ -1067,7 +1067,7 @@
           <a:lstStyle xmlns:a="http://schemas.openxmlformats.org/drawingml/2006/main"/>
           <a:p xmlns:a="http://schemas.openxmlformats.org/drawingml/2006/main">
             <a:r>
-              <a:t>Teacher pay uses the teacher’s assigned sections and a payroll row. Weekly periods are converted to monthly periods with the configured number of weeks. The title selects the rate per period. The calculation then adds teaching pay, overtime and other bonuses, and subtracts deductions. We check a single teacher and the faculty payroll total. All payroll records are fictional test data.</a:t>
+              <a:t>The pending payroll feature uses assigned sections and a payroll row. It converts weekly teaching periods to monthly periods, selects the rate by teacher title, adds teaching pay and bonuses, then subtracts deductions. Teacher T zero zero one in the old finance snapshot is a different record from T zero zero one on main. We therefore keep this payroll example separate and provisional. All payroll data is fictional.</a:t>
             </a:r>
           </a:p>
           <a:p xmlns:a="http://schemas.openxmlformats.org/drawingml/2006/main">
@@ -1082,7 +1082,7 @@
           </a:p>
           <a:p xmlns:a="http://schemas.openxmlformats.org/drawingml/2006/main">
             <a:r>
-              <a:t>Data is synthetic. Finance results were measured from the PR 2 feature snapshot; its code was not merged into main.</a:t>
+              <a:t>Data is synthetic. Shared runs use main only. Finance examples are provisional PR2 snapshots and excluded from the shared CSV.</a:t>
             </a:r>
           </a:p>
         </p:txBody>
@@ -1162,12 +1162,12 @@
           </a:p>
           <a:p xmlns:a="http://schemas.openxmlformats.org/drawingml/2006/main">
             <a:r>
-              <a:t>Sources: TASKS.md; finance tools.ts; Tiến F1 experiment in PR2</a:t>
+              <a:t>Sources: Pending finance PR2 least-privilege and elicitation experiments</a:t>
             </a:r>
           </a:p>
           <a:p xmlns:a="http://schemas.openxmlformats.org/drawingml/2006/main">
             <a:r>
-              <a:t>Data is synthetic. Finance results were measured from the PR 2 feature snapshot; its code was not merged into main.</a:t>
+              <a:t>Data is synthetic. Shared runs use main only. Finance examples are provisional PR2 snapshots and excluded from the shared CSV.</a:t>
             </a:r>
           </a:p>
         </p:txBody>
@@ -1237,7 +1237,7 @@
           <a:lstStyle xmlns:a="http://schemas.openxmlformats.org/drawingml/2006/main"/>
           <a:p xmlns:a="http://schemas.openxmlformats.org/drawingml/2006/main">
             <a:r>
-              <a:t>Khoa’s new test set contains twenty-four natural English questions. Fifteen cover academic tools and advising. Nine cover finance, including all six read-only finance tools. The cases include valid inputs, empty results, invalid IDs and exact boundaries. The answer key has fifty-five checked metrics. The shared benchmark can use these questions and expected values when the team combines the final features.</a:t>
+              <a:t>The shared test file now contains fifteen natural English questions, all using main. It covers teacher tools, attendance, conduct, risk and advising. The nine finance questions are in a separate provisional file. The workbook contains twenty-nine source-linked metrics for the shared cases and twenty-six provisional finance metrics. Only the fifteen shared cases should be copied into the current team benchmark.</a:t>
             </a:r>
           </a:p>
           <a:p xmlns:a="http://schemas.openxmlformats.org/drawingml/2006/main">
@@ -1247,12 +1247,12 @@
           </a:p>
           <a:p xmlns:a="http://schemas.openxmlformats.org/drawingml/2006/main">
             <a:r>
-              <a:t>Sources: test-cases.csv; test-reference.xlsx</a:t>
+              <a:t>Sources: phase2/test-cases.csv; finance-pending.csv; workbook scope columns</a:t>
             </a:r>
           </a:p>
           <a:p xmlns:a="http://schemas.openxmlformats.org/drawingml/2006/main">
             <a:r>
-              <a:t>Data is synthetic. Finance results were measured from the PR 2 feature snapshot; its code was not merged into main.</a:t>
+              <a:t>Data is synthetic. Shared runs use main only. Finance examples are provisional PR2 snapshots and excluded from the shared CSV.</a:t>
             </a:r>
           </a:p>
         </p:txBody>
@@ -1322,7 +1322,7 @@
           <a:lstStyle xmlns:a="http://schemas.openxmlformats.org/drawingml/2006/main"/>
           <a:p xmlns:a="http://schemas.openxmlformats.org/drawingml/2006/main">
             <a:r>
-              <a:t>The workbook is designed so we can check the answers ourselves. First, find the question ID on the Answers sheet. Then follow the formula to the source rows and rule values. Check the intermediate numbers, such as absences, credits or teaching periods. Finally, compare the result with the tool output. The formulas were also cross-checked independently from the CSV files.</a:t>
+              <a:t>First, check the scope column in the workbook. Main rows belong to the shared benchmark. Provisional rows belong to the pending finance snapshot. Next, read the arithmetic on the Manual sheet and follow the source-linked formulas on Answers. We checked the exact absence boundary and the risk reasons against the raw CSV files. Finally, compare the result and its explanation with the log.</a:t>
             </a:r>
           </a:p>
           <a:p xmlns:a="http://schemas.openxmlformats.org/drawingml/2006/main">
@@ -1337,7 +1337,7 @@
           </a:p>
           <a:p xmlns:a="http://schemas.openxmlformats.org/drawingml/2006/main">
             <a:r>
-              <a:t>Data is synthetic. Finance results were measured from the PR 2 feature snapshot; its code was not merged into main.</a:t>
+              <a:t>Data is synthetic. Shared runs use main only. Finance examples are provisional PR2 snapshots and excluded from the shared CSV.</a:t>
             </a:r>
           </a:p>
         </p:txBody>
@@ -1422,7 +1422,7 @@
           </a:p>
           <a:p xmlns:a="http://schemas.openxmlformats.org/drawingml/2006/main">
             <a:r>
-              <a:t>Data is synthetic. Finance results were measured from the PR 2 feature snapshot; its code was not merged into main.</a:t>
+              <a:t>Data is synthetic. Shared runs use main only. Finance examples are provisional PR2 snapshots and excluded from the shared CSV.</a:t>
             </a:r>
           </a:p>
         </p:txBody>
@@ -1492,7 +1492,7 @@
           <a:lstStyle xmlns:a="http://schemas.openxmlformats.org/drawingml/2006/main"/>
           <a:p xmlns:a="http://schemas.openxmlformats.org/drawingml/2006/main">
             <a:r>
-              <a:t>We keep the main model settings fixed for Khoa’s model run. We use Gemini Flash Lite with temperature zero point two and a maximum of eight tool rounds. Each question starts a fresh conversation. Model fallback is disabled, so the model recorded in the log is the model we intended to test. We pace requests to respect the free-tier request limit.</a:t>
+              <a:t>The current main-only Gemini run uses Flash Lite with temperature zero point two and a maximum of eight tool rounds. Each question starts a fresh conversation. Fallback is disabled. The configuration enables academic and utility only. The committed runner reads the fifteen questions directly from the shared CSV and records the configuration and source hashes.</a:t>
             </a:r>
           </a:p>
           <a:p xmlns:a="http://schemas.openxmlformats.org/drawingml/2006/main">
@@ -1502,12 +1502,12 @@
           </a:p>
           <a:p xmlns:a="http://schemas.openxmlformats.org/drawingml/2006/main">
             <a:r>
-              <a:t>Sources: configs/host-stdio.json; gemini-stdio.jsonl metadata</a:t>
+              <a:t>Sources: Current configs/host-stdio.json; current gemini-stdio.jsonl metadata</a:t>
             </a:r>
           </a:p>
           <a:p xmlns:a="http://schemas.openxmlformats.org/drawingml/2006/main">
             <a:r>
-              <a:t>Data is synthetic. Finance results were measured from the PR 2 feature snapshot; its code was not merged into main.</a:t>
+              <a:t>Data is synthetic. Shared runs use main only. Finance examples are provisional PR2 snapshots and excluded from the shared CSV.</a:t>
             </a:r>
           </a:p>
         </p:txBody>
@@ -1577,7 +1577,7 @@
           <a:lstStyle xmlns:a="http://schemas.openxmlformats.org/drawingml/2006/main"/>
           <a:p xmlns:a="http://schemas.openxmlformats.org/drawingml/2006/main">
             <a:r>
-              <a:t>These are results from the new twenty-four-question test set. The direct MCP tests check tool outputs without a language model. The Gemini run also checks the selected tools and the required arguments. These checks cover exact values, but they do not replace reading the final answers. An advising summary can contain the right numbers and still leave out a useful explanation.</a:t>
+              <a:t>These new runs use only the fifteen shared cases on main. We ran the committed script through direct MCP over standard input and output, direct MCP over HTTP, and Gemini. The table shows the measured results from those logs. The earlier twenty-four-case run is saved separately as historical evidence because it mixed two snapshots. It is not the shared benchmark result.</a:t>
             </a:r>
           </a:p>
           <a:p xmlns:a="http://schemas.openxmlformats.org/drawingml/2006/main">
@@ -1587,12 +1587,12 @@
           </a:p>
           <a:p xmlns:a="http://schemas.openxmlformats.org/drawingml/2006/main">
             <a:r>
-              <a:t>Sources: check-stdio.jsonl; check-http.jsonl; gemini-stdio.jsonl</a:t>
+              <a:t>Sources: Current check-stdio.jsonl, check-http.jsonl, gemini-stdio.jsonl; committed run-khoa-cases.ts</a:t>
             </a:r>
           </a:p>
           <a:p xmlns:a="http://schemas.openxmlformats.org/drawingml/2006/main">
             <a:r>
-              <a:t>Data is synthetic. Finance results were measured from the PR 2 feature snapshot; its code was not merged into main.</a:t>
+              <a:t>Data is synthetic. Shared runs use main only. Finance examples are provisional PR2 snapshots and excluded from the shared CSV.</a:t>
             </a:r>
           </a:p>
         </p:txBody>
@@ -1662,7 +1662,7 @@
           <a:lstStyle xmlns:a="http://schemas.openxmlformats.org/drawingml/2006/main"/>
           <a:p xmlns:a="http://schemas.openxmlformats.org/drawingml/2006/main">
             <a:r>
-              <a:t>We record both time and token use. Direct MCP time measures the local tool path. Gemini question time also includes model requests and any retry wait inside the question. The pacing gap between questions is outside this measurement. These are single runs on this machine, so we should report the numbers as observations rather than claim that one transport is always faster.</a:t>
+              <a:t>These times and token totals come from the new main-only run. Direct MCP time measures the local tool path. Gemini time also includes model requests and any retries inside a question. The pacing gap between questions is outside the per-question measurement. One run is a small sample, so we report these observations without claiming that one transport is always faster.</a:t>
             </a:r>
           </a:p>
           <a:p xmlns:a="http://schemas.openxmlformats.org/drawingml/2006/main">
@@ -1672,12 +1672,12 @@
           </a:p>
           <a:p xmlns:a="http://schemas.openxmlformats.org/drawingml/2006/main">
             <a:r>
-              <a:t>Sources: comparison.csv; provider usage in gemini-stdio.jsonl</a:t>
+              <a:t>Sources: Current comparison.csv and Gemini provider usage</a:t>
             </a:r>
           </a:p>
           <a:p xmlns:a="http://schemas.openxmlformats.org/drawingml/2006/main">
             <a:r>
-              <a:t>Data is synthetic. Finance results were measured from the PR 2 feature snapshot; its code was not merged into main.</a:t>
+              <a:t>Data is synthetic. Shared runs use main only. Finance examples are provisional PR2 snapshots and excluded from the shared CSV.</a:t>
             </a:r>
           </a:p>
         </p:txBody>
@@ -1762,7 +1762,7 @@
           </a:p>
           <a:p xmlns:a="http://schemas.openxmlformats.org/drawingml/2006/main">
             <a:r>
-              <a:t>Data is synthetic. Finance results were measured from the PR 2 feature snapshot; its code was not merged into main.</a:t>
+              <a:t>Data is synthetic. Shared runs use main only. Finance examples are provisional PR2 snapshots and excluded from the shared CSV.</a:t>
             </a:r>
           </a:p>
         </p:txBody>
@@ -1847,7 +1847,7 @@
           </a:p>
           <a:p xmlns:a="http://schemas.openxmlformats.org/drawingml/2006/main">
             <a:r>
-              <a:t>Data is synthetic. Finance results were measured from the PR 2 feature snapshot; its code was not merged into main.</a:t>
+              <a:t>Data is synthetic. Shared runs use main only. Finance examples are provisional PR2 snapshots and excluded from the shared CSV.</a:t>
             </a:r>
           </a:p>
         </p:txBody>
@@ -1932,7 +1932,7 @@
           </a:p>
           <a:p xmlns:a="http://schemas.openxmlformats.org/drawingml/2006/main">
             <a:r>
-              <a:t>Data is synthetic. Finance results were measured from the PR 2 feature snapshot; its code was not merged into main.</a:t>
+              <a:t>Data is synthetic. Shared runs use main only. Finance examples are provisional PR2 snapshots and excluded from the shared CSV.</a:t>
             </a:r>
           </a:p>
         </p:txBody>
@@ -2002,7 +2002,7 @@
           <a:lstStyle xmlns:a="http://schemas.openxmlformats.org/drawingml/2006/main"/>
           <a:p xmlns:a="http://schemas.openxmlformats.org/drawingml/2006/main">
             <a:r>
-              <a:t>The earlier model comparison used eleven cases, with two runs per model, on another machine. All three measured models passed those turns. The local instruct model had a lower median model time, while the thinking model took much longer. We keep these historical results separate from Khoa’s new twenty-four-case run. They are useful context, not a new Qwen measurement on this machine.</a:t>
+              <a:t>The earlier model comparison used eleven cases, with two runs per model, on another machine. All three measured models passed those turns. The instruct model was faster than the thinking model in that test. These are historical results. They are separate from the new fifteen-case Gemini run on main and do not provide a new direct Qwen comparison on this machine.</a:t>
             </a:r>
           </a:p>
           <a:p xmlns:a="http://schemas.openxmlformats.org/drawingml/2006/main">
@@ -2017,7 +2017,7 @@
           </a:p>
           <a:p xmlns:a="http://schemas.openxmlformats.org/drawingml/2006/main">
             <a:r>
-              <a:t>Data is synthetic. Finance results were measured from the PR 2 feature snapshot; its code was not merged into main.</a:t>
+              <a:t>Data is synthetic. Shared runs use main only. Finance examples are provisional PR2 snapshots and excluded from the shared CSV.</a:t>
             </a:r>
           </a:p>
         </p:txBody>
@@ -2087,7 +2087,7 @@
           <a:lstStyle xmlns:a="http://schemas.openxmlformats.org/drawingml/2006/main"/>
           <a:p xmlns:a="http://schemas.openxmlformats.org/drawingml/2006/main">
             <a:r>
-              <a:t>Tool schemas use part of the model’s context window. Tien measured an earlier twenty-tool setup on Qwen. It used about two thousand nine hundred and eighty-one tokens for tools, system text and the template, leaving room in an eight-thousand-one-hundred-and-ninety-two-token context. Our combined setup has twenty-seven tools, so we should measure it again instead of treating the old number as its exact budget.</a:t>
+              <a:t>The current academic and utility configuration exposes twenty tools. The historical configuration with provisional finance exposed twenty-seven. Tien also measured an earlier tool set on Qwen, using about two thousand nine hundred and eighty-one prompt tokens in an eight-thousand-one-hundred-and-ninety-two-token context. A matching tool count does not prove a matching token budget. We should measure the actual final tool schemas after finance merges.</a:t>
             </a:r>
           </a:p>
           <a:p xmlns:a="http://schemas.openxmlformats.org/drawingml/2006/main">
@@ -2097,12 +2097,12 @@
           </a:p>
           <a:p xmlns:a="http://schemas.openxmlformats.org/drawingml/2006/main">
             <a:r>
-              <a:t>Sources: Khoa capabilities; Tiến F2 in finance PR2</a:t>
+              <a:t>Sources: Current and historical capabilities; finance PR2 F2 experiment</a:t>
             </a:r>
           </a:p>
           <a:p xmlns:a="http://schemas.openxmlformats.org/drawingml/2006/main">
             <a:r>
-              <a:t>Data is synthetic. Finance results were measured from the PR 2 feature snapshot; its code was not merged into main.</a:t>
+              <a:t>Data is synthetic. Shared runs use main only. Finance examples are provisional PR2 snapshots and excluded from the shared CSV.</a:t>
             </a:r>
           </a:p>
         </p:txBody>
@@ -2172,7 +2172,7 @@
           <a:lstStyle xmlns:a="http://schemas.openxmlformats.org/drawingml/2006/main"/>
           <a:p xmlns:a="http://schemas.openxmlformats.org/drawingml/2006/main">
             <a:r>
-              <a:t>Several improvements came from actual problems. A grade update now keeps a score that the user did not ask to change. The host prompt asks the model to use the language of the latest question. Benchmarks disable fallback so results are attributed correctly. In Khoa’s test pack, independent Excel expectations help us detect a calculation error that a tool-derived answer key could otherwise repeat.</a:t>
+              <a:t>Several improvements follow observed problems. A grade update keeps omitted scores unchanged. The host follows the language of the question. Benchmarks disable fallback. In the new Khoa run, we clarified that a risk result reports the maximum section absence rate, while the attendance summary reports the aggregate rate for its scope. The earlier wording mistake and the corrected answer are kept in separate logs for comparison.</a:t>
             </a:r>
           </a:p>
           <a:p xmlns:a="http://schemas.openxmlformats.org/drawingml/2006/main">
@@ -2187,7 +2187,7 @@
           </a:p>
           <a:p xmlns:a="http://schemas.openxmlformats.org/drawingml/2006/main">
             <a:r>
-              <a:t>Data is synthetic. Finance results were measured from the PR 2 feature snapshot; its code was not merged into main.</a:t>
+              <a:t>Data is synthetic. Shared runs use main only. Finance examples are provisional PR2 snapshots and excluded from the shared CSV.</a:t>
             </a:r>
           </a:p>
         </p:txBody>
@@ -2257,7 +2257,7 @@
           <a:lstStyle xmlns:a="http://schemas.openxmlformats.org/drawingml/2006/main"/>
           <a:p xmlns:a="http://schemas.openxmlformats.org/drawingml/2006/main">
             <a:r>
-              <a:t>Our results have clear limits. Finance is tested from its feature snapshot because the final merge is still pending. Its records must not be mixed with a different teacher or conduct snapshot. One run per configuration is also a small sample. The next useful step is to repeat the complete set after the final merge and review the final advising explanations, not only their numbers.</a:t>
+              <a:t>The main limitation is the pending finance integration. We have moved those nine questions out of the shared CSV. After finance is rebased and merged, we must replace the provisional teacher, section and conduct inputs with the shared data, recalculate the financial answers and run the tests again. The historical logs stay unchanged as evidence of what was measured before the review.</a:t>
             </a:r>
           </a:p>
           <a:p xmlns:a="http://schemas.openxmlformats.org/drawingml/2006/main">
@@ -2272,7 +2272,7 @@
           </a:p>
           <a:p xmlns:a="http://schemas.openxmlformats.org/drawingml/2006/main">
             <a:r>
-              <a:t>Data is synthetic. Finance results were measured from the PR 2 feature snapshot; its code was not merged into main.</a:t>
+              <a:t>Data is synthetic. Shared runs use main only. Finance examples are provisional PR2 snapshots and excluded from the shared CSV.</a:t>
             </a:r>
           </a:p>
         </p:txBody>
@@ -2357,7 +2357,7 @@
           </a:p>
           <a:p xmlns:a="http://schemas.openxmlformats.org/drawingml/2006/main">
             <a:r>
-              <a:t>Data is synthetic. Finance results were measured from the PR 2 feature snapshot; its code was not merged into main.</a:t>
+              <a:t>Data is synthetic. Shared runs use main only. Finance examples are provisional PR2 snapshots and excluded from the shared CSV.</a:t>
             </a:r>
           </a:p>
         </p:txBody>
@@ -2427,7 +2427,7 @@
           <a:lstStyle xmlns:a="http://schemas.openxmlformats.org/drawingml/2006/main"/>
           <a:p xmlns:a="http://schemas.openxmlformats.org/drawingml/2006/main">
             <a:r>
-              <a:t>For a short live demonstration, we can start with a teacher workload question. Next, we compare the two attendance boundary cases. Then we ask about scholarship eligibility and ranking. At the end, we open a log and show the actual tool arguments and returned result. This order is easy to follow and connects the feature, the answer key and the measured evidence.</a:t>
+              <a:t>The live demonstration uses the current shared dataset. Start with the workload of teacher T zero zero one. Then compare the two attendance boundary cases. Next, ask for the risk reasons in class IT zero one. Finally, open the current log and show the actual tool call and result. Finance examples can be explained from the slides, but they are provisional and are not part of this live main-only demonstration.</a:t>
             </a:r>
           </a:p>
           <a:p xmlns:a="http://schemas.openxmlformats.org/drawingml/2006/main">
@@ -2437,12 +2437,12 @@
           </a:p>
           <a:p xmlns:a="http://schemas.openxmlformats.org/drawingml/2006/main">
             <a:r>
-              <a:t>Sources: K04; K07; K08; K20; K21</a:t>
+              <a:t>Sources: Shared cases K04, K07, K08, K12 and current logs</a:t>
             </a:r>
           </a:p>
           <a:p xmlns:a="http://schemas.openxmlformats.org/drawingml/2006/main">
             <a:r>
-              <a:t>Data is synthetic. Finance results were measured from the PR 2 feature snapshot; its code was not merged into main.</a:t>
+              <a:t>Data is synthetic. Shared runs use main only. Finance examples are provisional PR2 snapshots and excluded from the shared CSV.</a:t>
             </a:r>
           </a:p>
         </p:txBody>
@@ -2527,7 +2527,7 @@
           </a:p>
           <a:p xmlns:a="http://schemas.openxmlformats.org/drawingml/2006/main">
             <a:r>
-              <a:t>Data is synthetic. Finance results were measured from the PR 2 feature snapshot; its code was not merged into main.</a:t>
+              <a:t>Data is synthetic. Shared runs use main only. Finance examples are provisional PR2 snapshots and excluded from the shared CSV.</a:t>
             </a:r>
           </a:p>
         </p:txBody>
@@ -2597,7 +2597,7 @@
           <a:lstStyle xmlns:a="http://schemas.openxmlformats.org/drawingml/2006/main"/>
           <a:p xmlns:a="http://schemas.openxmlformats.org/drawingml/2006/main">
             <a:r>
-              <a:t>Our measured setup has three servers and twenty-seven tools. Academic handles university records and the new student support features. Utility provides small shared functions, such as time and report saving. Finance handles money-related records. Keeping finance separate lets the host enable it only when it is needed. These tool counts come from the actual capability list in our log.</a:t>
+              <a:t>The current shared test set uses academic and utility on main. Together they expose twenty tools. Finance is a separate pending feature with seven tools. Its sample data is different, so we keep its questions and examples provisional until it is rebased and merged. The main benchmark does not enable finance.</a:t>
             </a:r>
           </a:p>
           <a:p xmlns:a="http://schemas.openxmlformats.org/drawingml/2006/main">
@@ -2607,12 +2607,12 @@
           </a:p>
           <a:p xmlns:a="http://schemas.openxmlformats.org/drawingml/2006/main">
             <a:r>
-              <a:t>Sources: Khoa check-stdio.jsonl, capabilities</a:t>
+              <a:t>Sources: Current check-stdio.jsonl capabilities; finance PR2 feature snapshot</a:t>
             </a:r>
           </a:p>
           <a:p xmlns:a="http://schemas.openxmlformats.org/drawingml/2006/main">
             <a:r>
-              <a:t>Data is synthetic. Finance results were measured from the PR 2 feature snapshot; its code was not merged into main.</a:t>
+              <a:t>Data is synthetic. Shared runs use main only. Finance examples are provisional PR2 snapshots and excluded from the shared CSV.</a:t>
             </a:r>
           </a:p>
         </p:txBody>
@@ -2682,7 +2682,7 @@
           <a:lstStyle xmlns:a="http://schemas.openxmlformats.org/drawingml/2006/main"/>
           <a:p xmlns:a="http://schemas.openxmlformats.org/drawingml/2006/main">
             <a:r>
-              <a:t>The academic sample has forty valid students, twenty teachers and forty-one sections. It also has two hundred and sixty-one valid grade rows, attendance records and conduct scores. Finance was tested from Tien’s feature branch because it is not merged into main yet. Its teacher and conduct records differ, so each financial calculation uses that branch’s complete matching snapshot.</a:t>
+              <a:t>The academic sample on main has forty valid students, twenty teachers and forty-one sections. It also has two hundred and sixty-one valid grade rows, attendance records and conduct scores. Finance is still in a separate pull request. Its teacher and conduct records differ. We exclude those financial expectations from the shared test file and label them provisional in the workbook.</a:t>
             </a:r>
           </a:p>
           <a:p xmlns:a="http://schemas.openxmlformats.org/drawingml/2006/main">
@@ -2697,7 +2697,7 @@
           </a:p>
           <a:p xmlns:a="http://schemas.openxmlformats.org/drawingml/2006/main">
             <a:r>
-              <a:t>Data is synthetic. Finance results were measured from the PR 2 feature snapshot; its code was not merged into main.</a:t>
+              <a:t>Data is synthetic. Shared runs use main only. Finance examples are provisional PR2 snapshots and excluded from the shared CSV.</a:t>
             </a:r>
           </a:p>
         </p:txBody>
@@ -2782,7 +2782,7 @@
           </a:p>
           <a:p xmlns:a="http://schemas.openxmlformats.org/drawingml/2006/main">
             <a:r>
-              <a:t>Data is synthetic. Finance results were measured from the PR 2 feature snapshot; its code was not merged into main.</a:t>
+              <a:t>Data is synthetic. Shared runs use main only. Finance examples are provisional PR2 snapshots and excluded from the shared CSV.</a:t>
             </a:r>
           </a:p>
         </p:txBody>
@@ -2867,7 +2867,7 @@
           </a:p>
           <a:p xmlns:a="http://schemas.openxmlformats.org/drawingml/2006/main">
             <a:r>
-              <a:t>Data is synthetic. Finance results were measured from the PR 2 feature snapshot; its code was not merged into main.</a:t>
+              <a:t>Data is synthetic. Shared runs use main only. Finance examples are provisional PR2 snapshots and excluded from the shared CSV.</a:t>
             </a:r>
           </a:p>
         </p:txBody>
@@ -2952,7 +2952,7 @@
           </a:p>
           <a:p xmlns:a="http://schemas.openxmlformats.org/drawingml/2006/main">
             <a:r>
-              <a:t>Data is synthetic. Finance results were measured from the PR 2 feature snapshot; its code was not merged into main.</a:t>
+              <a:t>Data is synthetic. Shared runs use main only. Finance examples are provisional PR2 snapshots and excluded from the shared CSV.</a:t>
             </a:r>
           </a:p>
         </p:txBody>
@@ -3037,7 +3037,7 @@
           </a:p>
           <a:p xmlns:a="http://schemas.openxmlformats.org/drawingml/2006/main">
             <a:r>
-              <a:t>Data is synthetic. Finance results were measured from the PR 2 feature snapshot; its code was not merged into main.</a:t>
+              <a:t>Data is synthetic. Shared runs use main only. Finance examples are provisional PR2 snapshots and excluded from the shared CSV.</a:t>
             </a:r>
           </a:p>
         </p:txBody>
@@ -3084,7 +3084,7 @@
           <p:cNvPr id="3" name="Title">
             <a:extLst xmlns:a="http://schemas.openxmlformats.org/drawingml/2006/main">
               <a:ext uri="{FF2B5EF4-FFF2-40B4-BE49-F238E27FC236}">
-                <a16:creationId xmlns:a16="http://schemas.microsoft.com/office/drawing/2014/main" id="{EF0BA3BF-08C4-4DEE-B0DF-3D718AD31DD2}"/>
+                <a16:creationId xmlns:a16="http://schemas.microsoft.com/office/drawing/2014/main" id="{7A44D4C0-2A4A-4646-8DD8-8C996A9189ED}"/>
               </a:ext>
             </a:extLst>
           </p:cNvPr>
@@ -3313,7 +3313,7 @@
           <p:cNvPr id="2" name="Subtitle">
             <a:extLst xmlns:a="http://schemas.openxmlformats.org/drawingml/2006/main">
               <a:ext uri="{FF2B5EF4-FFF2-40B4-BE49-F238E27FC236}">
-                <a16:creationId xmlns:a16="http://schemas.microsoft.com/office/drawing/2014/main" id="{35960B49-3759-4158-87C0-04F6C31D0569}"/>
+                <a16:creationId xmlns:a16="http://schemas.microsoft.com/office/drawing/2014/main" id="{FAAB383D-B967-4229-BF78-078C3E06F25A}"/>
               </a:ext>
             </a:extLst>
           </p:cNvPr>
@@ -3559,7 +3559,7 @@
           <p:cNvPr id="2" name="Section title">
             <a:extLst xmlns:a="http://schemas.openxmlformats.org/drawingml/2006/main">
               <a:ext uri="{FF2B5EF4-FFF2-40B4-BE49-F238E27FC236}">
-                <a16:creationId xmlns:a16="http://schemas.microsoft.com/office/drawing/2014/main" id="{DE1B2A7A-CB28-4985-8394-6E77E956B6A9}"/>
+                <a16:creationId xmlns:a16="http://schemas.microsoft.com/office/drawing/2014/main" id="{8BAC513E-5487-4240-A353-4AE2798D383A}"/>
               </a:ext>
             </a:extLst>
           </p:cNvPr>
@@ -3805,7 +3805,7 @@
           <p:cNvPr id="3" name="Title">
             <a:extLst xmlns:a="http://schemas.openxmlformats.org/drawingml/2006/main">
               <a:ext uri="{FF2B5EF4-FFF2-40B4-BE49-F238E27FC236}">
-                <a16:creationId xmlns:a16="http://schemas.microsoft.com/office/drawing/2014/main" id="{9C7E1C1B-9636-4E43-95D9-29DD77F1F0C4}"/>
+                <a16:creationId xmlns:a16="http://schemas.microsoft.com/office/drawing/2014/main" id="{4FEA200B-2A0A-447C-87B1-9BFD067BCF8B}"/>
               </a:ext>
             </a:extLst>
           </p:cNvPr>
@@ -4034,7 +4034,7 @@
           <p:cNvPr id="2" name="Body">
             <a:extLst xmlns:a="http://schemas.openxmlformats.org/drawingml/2006/main">
               <a:ext uri="{FF2B5EF4-FFF2-40B4-BE49-F238E27FC236}">
-                <a16:creationId xmlns:a16="http://schemas.microsoft.com/office/drawing/2014/main" id="{F647998F-170F-4BCA-BD0A-AA313AEEBC6E}"/>
+                <a16:creationId xmlns:a16="http://schemas.microsoft.com/office/drawing/2014/main" id="{FE041B9C-2E37-4A89-9B6C-2348D8461BF1}"/>
               </a:ext>
             </a:extLst>
           </p:cNvPr>
@@ -4280,7 +4280,7 @@
           <p:cNvPr id="4" name="Title">
             <a:extLst xmlns:a="http://schemas.openxmlformats.org/drawingml/2006/main">
               <a:ext uri="{FF2B5EF4-FFF2-40B4-BE49-F238E27FC236}">
-                <a16:creationId xmlns:a16="http://schemas.microsoft.com/office/drawing/2014/main" id="{42D1C15E-9E50-4472-B98F-58CA1F79C35D}"/>
+                <a16:creationId xmlns:a16="http://schemas.microsoft.com/office/drawing/2014/main" id="{72CD6AAB-39D6-4D18-9A1E-16A443EFAD04}"/>
               </a:ext>
             </a:extLst>
           </p:cNvPr>
@@ -4509,7 +4509,7 @@
           <p:cNvPr id="2" name="Left column">
             <a:extLst xmlns:a="http://schemas.openxmlformats.org/drawingml/2006/main">
               <a:ext uri="{FF2B5EF4-FFF2-40B4-BE49-F238E27FC236}">
-                <a16:creationId xmlns:a16="http://schemas.microsoft.com/office/drawing/2014/main" id="{83BA62ED-32F8-48BC-999E-41097B693495}"/>
+                <a16:creationId xmlns:a16="http://schemas.microsoft.com/office/drawing/2014/main" id="{1C8E1E8A-7FAA-4672-8999-BDA74B1BFCE7}"/>
               </a:ext>
             </a:extLst>
           </p:cNvPr>
@@ -4738,7 +4738,7 @@
           <p:cNvPr id="3" name="Right column">
             <a:extLst xmlns:a="http://schemas.openxmlformats.org/drawingml/2006/main">
               <a:ext uri="{FF2B5EF4-FFF2-40B4-BE49-F238E27FC236}">
-                <a16:creationId xmlns:a16="http://schemas.microsoft.com/office/drawing/2014/main" id="{79E0F10F-0F01-4A8F-8734-57BC378EE878}"/>
+                <a16:creationId xmlns:a16="http://schemas.microsoft.com/office/drawing/2014/main" id="{5F1992B6-B23F-4999-8A8B-4A2535F13829}"/>
               </a:ext>
             </a:extLst>
           </p:cNvPr>
@@ -4984,7 +4984,7 @@
           <p:cNvPr id="3" name="Title">
             <a:extLst xmlns:a="http://schemas.openxmlformats.org/drawingml/2006/main">
               <a:ext uri="{FF2B5EF4-FFF2-40B4-BE49-F238E27FC236}">
-                <a16:creationId xmlns:a16="http://schemas.microsoft.com/office/drawing/2014/main" id="{56CBD94F-DD34-4359-9D86-18F4B7ADD986}"/>
+                <a16:creationId xmlns:a16="http://schemas.microsoft.com/office/drawing/2014/main" id="{A2C9EBE3-090A-40F6-A781-F1135080439C}"/>
               </a:ext>
             </a:extLst>
           </p:cNvPr>
@@ -5213,7 +5213,7 @@
           <p:cNvPr id="2" name="Left column">
             <a:extLst xmlns:a="http://schemas.openxmlformats.org/drawingml/2006/main">
               <a:ext uri="{FF2B5EF4-FFF2-40B4-BE49-F238E27FC236}">
-                <a16:creationId xmlns:a16="http://schemas.microsoft.com/office/drawing/2014/main" id="{4AA28337-A95A-4ED3-ABC7-56489E14A15E}"/>
+                <a16:creationId xmlns:a16="http://schemas.microsoft.com/office/drawing/2014/main" id="{185D4006-BCD4-4603-A4F6-7B20DBA3ADD5}"/>
               </a:ext>
             </a:extLst>
           </p:cNvPr>
@@ -5480,12 +5480,12 @@
   </p:cSld>
   <p:clrMap bg1="lt1" tx1="dk1" bg2="lt2" tx2="dk2" accent1="accent1" accent2="accent2" accent3="accent3" accent4="accent4" accent5="accent5" accent6="accent6" hlink="hlink" folHlink="folHlink"/>
   <p:sldLayoutIdLst>
-    <p:sldLayoutId xmlns:r="http://schemas.openxmlformats.org/officeDocument/2006/relationships" id="2147483649" r:id="R1d8e6f1ce8bf4415"/>
-    <p:sldLayoutId xmlns:r="http://schemas.openxmlformats.org/officeDocument/2006/relationships" id="2147483650" r:id="R38a9576e5a31410d"/>
-    <p:sldLayoutId xmlns:r="http://schemas.openxmlformats.org/officeDocument/2006/relationships" id="2147483651" r:id="Rfc1ff7ed9b0442a7"/>
-    <p:sldLayoutId xmlns:r="http://schemas.openxmlformats.org/officeDocument/2006/relationships" id="2147483652" r:id="R48045e29440b4d85"/>
-    <p:sldLayoutId xmlns:r="http://schemas.openxmlformats.org/officeDocument/2006/relationships" id="2147483653" r:id="R1471688f509a4b44"/>
-    <p:sldLayoutId xmlns:r="http://schemas.openxmlformats.org/officeDocument/2006/relationships" id="2147483654" r:id="R53cd8e95a8ff4eb6"/>
+    <p:sldLayoutId xmlns:r="http://schemas.openxmlformats.org/officeDocument/2006/relationships" id="2147483649" r:id="R78b588a67a694b88"/>
+    <p:sldLayoutId xmlns:r="http://schemas.openxmlformats.org/officeDocument/2006/relationships" id="2147483650" r:id="Rf67d9b5940054440"/>
+    <p:sldLayoutId xmlns:r="http://schemas.openxmlformats.org/officeDocument/2006/relationships" id="2147483651" r:id="Re878cd4d9a194d72"/>
+    <p:sldLayoutId xmlns:r="http://schemas.openxmlformats.org/officeDocument/2006/relationships" id="2147483652" r:id="R61bc8fd6931f4343"/>
+    <p:sldLayoutId xmlns:r="http://schemas.openxmlformats.org/officeDocument/2006/relationships" id="2147483653" r:id="Rb2aacf96d33444d1"/>
+    <p:sldLayoutId xmlns:r="http://schemas.openxmlformats.org/officeDocument/2006/relationships" id="2147483654" r:id="R2252901a3e794ce9"/>
   </p:sldLayoutIdLst>
   <p:txStyles>
     <p:titleStyle>
@@ -6036,7 +6036,7 @@
           <p:cNvPr id="5" name="">
             <a:extLst xmlns:a="http://schemas.openxmlformats.org/drawingml/2006/main">
               <a:ext uri="{FF2B5EF4-FFF2-40B4-BE49-F238E27FC236}">
-                <a16:creationId xmlns:a16="http://schemas.microsoft.com/office/drawing/2014/main" id="{1A9E773E-74B3-43A8-B802-F2BB26C92708}"/>
+                <a16:creationId xmlns:a16="http://schemas.microsoft.com/office/drawing/2014/main" id="{046ED7DB-83DF-442A-9DBA-84BEF1ADF74A}"/>
               </a:ext>
             </a:extLst>
           </p:cNvPr>
@@ -6215,7 +6215,7 @@
           <p:cNvPr id="2" name="">
             <a:extLst xmlns:a="http://schemas.openxmlformats.org/drawingml/2006/main">
               <a:ext uri="{FF2B5EF4-FFF2-40B4-BE49-F238E27FC236}">
-                <a16:creationId xmlns:a16="http://schemas.microsoft.com/office/drawing/2014/main" id="{31E0E971-2C7C-4C98-8297-2FFA081143FE}"/>
+                <a16:creationId xmlns:a16="http://schemas.microsoft.com/office/drawing/2014/main" id="{7037B42B-4AA9-4826-ADF0-916E3D312276}"/>
               </a:ext>
             </a:extLst>
           </p:cNvPr>
@@ -6245,7 +6245,7 @@
           <p:cNvPr id="3" name="">
             <a:extLst xmlns:a="http://schemas.openxmlformats.org/drawingml/2006/main">
               <a:ext uri="{FF2B5EF4-FFF2-40B4-BE49-F238E27FC236}">
-                <a16:creationId xmlns:a16="http://schemas.microsoft.com/office/drawing/2014/main" id="{9FE5553C-8C96-4321-B41C-B8A402BD6386}"/>
+                <a16:creationId xmlns:a16="http://schemas.microsoft.com/office/drawing/2014/main" id="{1114F378-9371-4AD1-88B6-1AE5903C8368}"/>
               </a:ext>
             </a:extLst>
           </p:cNvPr>
@@ -6391,7 +6391,7 @@
                 <a:ea typeface="Arial"/>
                 <a:cs typeface="Arial"/>
               </a:rPr>
-              <a:t>New features and test results</a:t>
+              <a:t>Academic results and provisional finance features</a:t>
             </a:r>
           </a:p>
         </p:txBody>
@@ -6401,7 +6401,7 @@
           <p:cNvPr id="4" name="">
             <a:extLst xmlns:a="http://schemas.openxmlformats.org/drawingml/2006/main">
               <a:ext uri="{FF2B5EF4-FFF2-40B4-BE49-F238E27FC236}">
-                <a16:creationId xmlns:a16="http://schemas.microsoft.com/office/drawing/2014/main" id="{150940E1-847F-4954-8681-65238C206BDA}"/>
+                <a16:creationId xmlns:a16="http://schemas.microsoft.com/office/drawing/2014/main" id="{BC773F79-3728-427A-A48D-31F1BA0BB87C}"/>
               </a:ext>
             </a:extLst>
           </p:cNvPr>
@@ -6555,7 +6555,7 @@
     </p:spTree>
     <p:extLst>
       <p:ext uri="{BB962C8B-B14F-4D97-AF65-F5344CB8AC3E}">
-        <p14:creationId xmlns:p14="http://schemas.microsoft.com/office/powerpoint/2010/main" val="941065957"/>
+        <p14:creationId xmlns:p14="http://schemas.microsoft.com/office/powerpoint/2010/main" val="1003486576"/>
       </p:ext>
     </p:extLst>
   </p:cSld>
@@ -6586,7 +6586,7 @@
           <p:cNvPr id="5" name="">
             <a:extLst xmlns:a="http://schemas.openxmlformats.org/drawingml/2006/main">
               <a:ext uri="{FF2B5EF4-FFF2-40B4-BE49-F238E27FC236}">
-                <a16:creationId xmlns:a16="http://schemas.microsoft.com/office/drawing/2014/main" id="{EEB4C313-48CF-45BD-BE7F-3273D023E359}"/>
+                <a16:creationId xmlns:a16="http://schemas.microsoft.com/office/drawing/2014/main" id="{5F060E60-6E71-49D4-A715-BBD6765C4468}"/>
               </a:ext>
             </a:extLst>
           </p:cNvPr>
@@ -6742,7 +6742,7 @@
           <p:cNvPr id="2" name="">
             <a:extLst xmlns:a="http://schemas.openxmlformats.org/drawingml/2006/main">
               <a:ext uri="{FF2B5EF4-FFF2-40B4-BE49-F238E27FC236}">
-                <a16:creationId xmlns:a16="http://schemas.microsoft.com/office/drawing/2014/main" id="{2A792ADB-AAD6-455C-8403-D55FF19D13F5}"/>
+                <a16:creationId xmlns:a16="http://schemas.microsoft.com/office/drawing/2014/main" id="{2CF73F87-2985-4B5C-AAD7-B9114B8E7C2B}"/>
               </a:ext>
             </a:extLst>
           </p:cNvPr>
@@ -6772,7 +6772,7 @@
           <p:cNvPr id="3" name="">
             <a:extLst xmlns:a="http://schemas.openxmlformats.org/drawingml/2006/main">
               <a:ext uri="{FF2B5EF4-FFF2-40B4-BE49-F238E27FC236}">
-                <a16:creationId xmlns:a16="http://schemas.microsoft.com/office/drawing/2014/main" id="{0D79259D-C446-41C9-8284-C3F2AFDC659A}"/>
+                <a16:creationId xmlns:a16="http://schemas.microsoft.com/office/drawing/2014/main" id="{1163F85C-2BB5-4662-87C3-A2CFC1BB6FBB}"/>
               </a:ext>
             </a:extLst>
           </p:cNvPr>
@@ -7100,7 +7100,7 @@
           <p:cNvPr id="4" name="">
             <a:extLst xmlns:a="http://schemas.openxmlformats.org/drawingml/2006/main">
               <a:ext uri="{FF2B5EF4-FFF2-40B4-BE49-F238E27FC236}">
-                <a16:creationId xmlns:a16="http://schemas.microsoft.com/office/drawing/2014/main" id="{D477D382-9E8B-412F-9D11-0159AF232053}"/>
+                <a16:creationId xmlns:a16="http://schemas.microsoft.com/office/drawing/2014/main" id="{8C23348A-11BF-45FE-ABBF-90B9F488CB1F}"/>
               </a:ext>
             </a:extLst>
           </p:cNvPr>
@@ -7254,7 +7254,7 @@
     </p:spTree>
     <p:extLst>
       <p:ext uri="{BB962C8B-B14F-4D97-AF65-F5344CB8AC3E}">
-        <p14:creationId xmlns:p14="http://schemas.microsoft.com/office/powerpoint/2010/main" val="5718654"/>
+        <p14:creationId xmlns:p14="http://schemas.microsoft.com/office/powerpoint/2010/main" val="446430917"/>
       </p:ext>
     </p:extLst>
   </p:cSld>
@@ -7285,7 +7285,7 @@
           <p:cNvPr id="12" name="">
             <a:extLst xmlns:a="http://schemas.openxmlformats.org/drawingml/2006/main">
               <a:ext uri="{FF2B5EF4-FFF2-40B4-BE49-F238E27FC236}">
-                <a16:creationId xmlns:a16="http://schemas.microsoft.com/office/drawing/2014/main" id="{BEA89740-3AC0-4CA8-9E87-F4EBE5939016}"/>
+                <a16:creationId xmlns:a16="http://schemas.microsoft.com/office/drawing/2014/main" id="{FFCD7988-BC55-496B-84F2-2B3445246C4D}"/>
               </a:ext>
             </a:extLst>
           </p:cNvPr>
@@ -7441,7 +7441,7 @@
           <p:cNvPr id="2" name="">
             <a:extLst xmlns:a="http://schemas.openxmlformats.org/drawingml/2006/main">
               <a:ext uri="{FF2B5EF4-FFF2-40B4-BE49-F238E27FC236}">
-                <a16:creationId xmlns:a16="http://schemas.microsoft.com/office/drawing/2014/main" id="{1234B256-B7D6-48B7-B220-39C64D851065}"/>
+                <a16:creationId xmlns:a16="http://schemas.microsoft.com/office/drawing/2014/main" id="{463AAF94-6275-4662-8814-E4DA356FDF95}"/>
               </a:ext>
             </a:extLst>
           </p:cNvPr>
@@ -7471,7 +7471,7 @@
           <p:cNvPr id="3" name="">
             <a:extLst xmlns:a="http://schemas.openxmlformats.org/drawingml/2006/main">
               <a:ext uri="{FF2B5EF4-FFF2-40B4-BE49-F238E27FC236}">
-                <a16:creationId xmlns:a16="http://schemas.microsoft.com/office/drawing/2014/main" id="{93E34A5A-7BD9-4201-AC52-56F3C95BD659}"/>
+                <a16:creationId xmlns:a16="http://schemas.microsoft.com/office/drawing/2014/main" id="{E83229B3-F4C7-4553-B44E-8A89D80651B9}"/>
               </a:ext>
             </a:extLst>
           </p:cNvPr>
@@ -7627,7 +7627,7 @@
           <p:cNvPr id="4" name="">
             <a:extLst xmlns:a="http://schemas.openxmlformats.org/drawingml/2006/main">
               <a:ext uri="{FF2B5EF4-FFF2-40B4-BE49-F238E27FC236}">
-                <a16:creationId xmlns:a16="http://schemas.microsoft.com/office/drawing/2014/main" id="{CA1E3BAC-A172-4EA5-B9BB-D7E90A427093}"/>
+                <a16:creationId xmlns:a16="http://schemas.microsoft.com/office/drawing/2014/main" id="{208EF81D-2D83-4D65-84C3-DD2890F55A66}"/>
               </a:ext>
             </a:extLst>
           </p:cNvPr>
@@ -7783,7 +7783,7 @@
           <p:cNvPr id="5" name="">
             <a:extLst xmlns:a="http://schemas.openxmlformats.org/drawingml/2006/main">
               <a:ext uri="{FF2B5EF4-FFF2-40B4-BE49-F238E27FC236}">
-                <a16:creationId xmlns:a16="http://schemas.microsoft.com/office/drawing/2014/main" id="{8D319603-81DE-4AA7-A5C8-3F3A053D986A}"/>
+                <a16:creationId xmlns:a16="http://schemas.microsoft.com/office/drawing/2014/main" id="{B9409555-8907-41E0-A62A-DA9772DC5B24}"/>
               </a:ext>
             </a:extLst>
           </p:cNvPr>
@@ -7939,7 +7939,7 @@
           <p:cNvPr id="6" name="">
             <a:extLst xmlns:a="http://schemas.openxmlformats.org/drawingml/2006/main">
               <a:ext uri="{FF2B5EF4-FFF2-40B4-BE49-F238E27FC236}">
-                <a16:creationId xmlns:a16="http://schemas.microsoft.com/office/drawing/2014/main" id="{4BB03E80-FD0F-4573-AC00-D9A7256E4E54}"/>
+                <a16:creationId xmlns:a16="http://schemas.microsoft.com/office/drawing/2014/main" id="{3B2B67D0-E12B-4F3F-A941-EDEB13C87CC2}"/>
               </a:ext>
             </a:extLst>
           </p:cNvPr>
@@ -8095,7 +8095,7 @@
           <p:cNvPr id="7" name="">
             <a:extLst xmlns:a="http://schemas.openxmlformats.org/drawingml/2006/main">
               <a:ext uri="{FF2B5EF4-FFF2-40B4-BE49-F238E27FC236}">
-                <a16:creationId xmlns:a16="http://schemas.microsoft.com/office/drawing/2014/main" id="{7236B44F-B3A2-465F-9D5A-D38963E6482B}"/>
+                <a16:creationId xmlns:a16="http://schemas.microsoft.com/office/drawing/2014/main" id="{D6469CDF-ECEC-4DAF-830B-973007FAC698}"/>
               </a:ext>
             </a:extLst>
           </p:cNvPr>
@@ -8251,7 +8251,7 @@
           <p:cNvPr id="8" name="">
             <a:extLst xmlns:a="http://schemas.openxmlformats.org/drawingml/2006/main">
               <a:ext uri="{FF2B5EF4-FFF2-40B4-BE49-F238E27FC236}">
-                <a16:creationId xmlns:a16="http://schemas.microsoft.com/office/drawing/2014/main" id="{89454F7D-9B80-462E-A9A5-3B7A33D4DC2A}"/>
+                <a16:creationId xmlns:a16="http://schemas.microsoft.com/office/drawing/2014/main" id="{FD4BDC00-B667-427A-8CDB-48BDA82566D1}"/>
               </a:ext>
             </a:extLst>
           </p:cNvPr>
@@ -8407,7 +8407,7 @@
           <p:cNvPr id="9" name="">
             <a:extLst xmlns:a="http://schemas.openxmlformats.org/drawingml/2006/main">
               <a:ext uri="{FF2B5EF4-FFF2-40B4-BE49-F238E27FC236}">
-                <a16:creationId xmlns:a16="http://schemas.microsoft.com/office/drawing/2014/main" id="{6F4343B6-A529-495D-A9E8-02F9936F14F6}"/>
+                <a16:creationId xmlns:a16="http://schemas.microsoft.com/office/drawing/2014/main" id="{855ED560-387C-400E-8B15-F23E569A4A6A}"/>
               </a:ext>
             </a:extLst>
           </p:cNvPr>
@@ -8563,7 +8563,7 @@
           <p:cNvPr id="10" name="">
             <a:extLst xmlns:a="http://schemas.openxmlformats.org/drawingml/2006/main">
               <a:ext uri="{FF2B5EF4-FFF2-40B4-BE49-F238E27FC236}">
-                <a16:creationId xmlns:a16="http://schemas.microsoft.com/office/drawing/2014/main" id="{AC363A4F-A910-471B-8897-1F243FBD60A2}"/>
+                <a16:creationId xmlns:a16="http://schemas.microsoft.com/office/drawing/2014/main" id="{C6F2D327-7A7E-4016-B907-53299902F03D}"/>
               </a:ext>
             </a:extLst>
           </p:cNvPr>
@@ -8719,7 +8719,7 @@
           <p:cNvPr id="11" name="">
             <a:extLst xmlns:a="http://schemas.openxmlformats.org/drawingml/2006/main">
               <a:ext uri="{FF2B5EF4-FFF2-40B4-BE49-F238E27FC236}">
-                <a16:creationId xmlns:a16="http://schemas.microsoft.com/office/drawing/2014/main" id="{E3EE2D73-5FA3-458C-99E5-9763819AB1F5}"/>
+                <a16:creationId xmlns:a16="http://schemas.microsoft.com/office/drawing/2014/main" id="{BCE83B8F-777E-40BF-8DE5-95E5171925DD}"/>
               </a:ext>
             </a:extLst>
           </p:cNvPr>
@@ -8873,7 +8873,7 @@
     </p:spTree>
     <p:extLst>
       <p:ext uri="{BB962C8B-B14F-4D97-AF65-F5344CB8AC3E}">
-        <p14:creationId xmlns:p14="http://schemas.microsoft.com/office/powerpoint/2010/main" val="2040738772"/>
+        <p14:creationId xmlns:p14="http://schemas.microsoft.com/office/powerpoint/2010/main" val="1507599513"/>
       </p:ext>
     </p:extLst>
   </p:cSld>
@@ -8904,7 +8904,7 @@
           <p:cNvPr id="12" name="">
             <a:extLst xmlns:a="http://schemas.openxmlformats.org/drawingml/2006/main">
               <a:ext uri="{FF2B5EF4-FFF2-40B4-BE49-F238E27FC236}">
-                <a16:creationId xmlns:a16="http://schemas.microsoft.com/office/drawing/2014/main" id="{B3127B24-8904-4905-910F-3448CAEBEDDA}"/>
+                <a16:creationId xmlns:a16="http://schemas.microsoft.com/office/drawing/2014/main" id="{F41FE9D8-A800-435C-B7B8-B593F95B3B0F}"/>
               </a:ext>
             </a:extLst>
           </p:cNvPr>
@@ -9060,7 +9060,7 @@
           <p:cNvPr id="2" name="">
             <a:extLst xmlns:a="http://schemas.openxmlformats.org/drawingml/2006/main">
               <a:ext uri="{FF2B5EF4-FFF2-40B4-BE49-F238E27FC236}">
-                <a16:creationId xmlns:a16="http://schemas.microsoft.com/office/drawing/2014/main" id="{88FED4FF-38F2-4AF7-B4FD-07F4E1C5389E}"/>
+                <a16:creationId xmlns:a16="http://schemas.microsoft.com/office/drawing/2014/main" id="{F57904F6-5D68-4D2F-8FDB-5D814E514D96}"/>
               </a:ext>
             </a:extLst>
           </p:cNvPr>
@@ -9090,7 +9090,7 @@
           <p:cNvPr id="3" name="">
             <a:extLst xmlns:a="http://schemas.openxmlformats.org/drawingml/2006/main">
               <a:ext uri="{FF2B5EF4-FFF2-40B4-BE49-F238E27FC236}">
-                <a16:creationId xmlns:a16="http://schemas.microsoft.com/office/drawing/2014/main" id="{80D8A1DA-4DF3-4AF3-AEA1-4C439EAD5090}"/>
+                <a16:creationId xmlns:a16="http://schemas.microsoft.com/office/drawing/2014/main" id="{9E91CD63-DFEB-4D65-A314-62BB7C41F859}"/>
               </a:ext>
             </a:extLst>
           </p:cNvPr>
@@ -9246,7 +9246,7 @@
           <p:cNvPr id="4" name="">
             <a:extLst xmlns:a="http://schemas.openxmlformats.org/drawingml/2006/main">
               <a:ext uri="{FF2B5EF4-FFF2-40B4-BE49-F238E27FC236}">
-                <a16:creationId xmlns:a16="http://schemas.microsoft.com/office/drawing/2014/main" id="{3653E6DA-1FCB-48A9-9633-80E7651370C8}"/>
+                <a16:creationId xmlns:a16="http://schemas.microsoft.com/office/drawing/2014/main" id="{25A93CA7-6F07-407C-92D0-715FFC6D4C3B}"/>
               </a:ext>
             </a:extLst>
           </p:cNvPr>
@@ -9402,7 +9402,7 @@
           <p:cNvPr id="5" name="">
             <a:extLst xmlns:a="http://schemas.openxmlformats.org/drawingml/2006/main">
               <a:ext uri="{FF2B5EF4-FFF2-40B4-BE49-F238E27FC236}">
-                <a16:creationId xmlns:a16="http://schemas.microsoft.com/office/drawing/2014/main" id="{FAEAFFED-A9BB-4FA3-87C9-EAEA79A058D5}"/>
+                <a16:creationId xmlns:a16="http://schemas.microsoft.com/office/drawing/2014/main" id="{49E2075B-31D3-4FD2-ADD7-59ED79140077}"/>
               </a:ext>
             </a:extLst>
           </p:cNvPr>
@@ -9558,7 +9558,7 @@
           <p:cNvPr id="6" name="">
             <a:extLst xmlns:a="http://schemas.openxmlformats.org/drawingml/2006/main">
               <a:ext uri="{FF2B5EF4-FFF2-40B4-BE49-F238E27FC236}">
-                <a16:creationId xmlns:a16="http://schemas.microsoft.com/office/drawing/2014/main" id="{BD14DC47-4118-47F8-91E8-1930EA3A4881}"/>
+                <a16:creationId xmlns:a16="http://schemas.microsoft.com/office/drawing/2014/main" id="{B1BED537-5511-49B0-B23C-817363F01602}"/>
               </a:ext>
             </a:extLst>
           </p:cNvPr>
@@ -9714,7 +9714,7 @@
           <p:cNvPr id="7" name="">
             <a:extLst xmlns:a="http://schemas.openxmlformats.org/drawingml/2006/main">
               <a:ext uri="{FF2B5EF4-FFF2-40B4-BE49-F238E27FC236}">
-                <a16:creationId xmlns:a16="http://schemas.microsoft.com/office/drawing/2014/main" id="{DCEF443B-EA66-4F8D-A442-20C32F7B6272}"/>
+                <a16:creationId xmlns:a16="http://schemas.microsoft.com/office/drawing/2014/main" id="{3D33805E-7975-4648-82E2-6EE649F9FF5A}"/>
               </a:ext>
             </a:extLst>
           </p:cNvPr>
@@ -9870,7 +9870,7 @@
           <p:cNvPr id="8" name="">
             <a:extLst xmlns:a="http://schemas.openxmlformats.org/drawingml/2006/main">
               <a:ext uri="{FF2B5EF4-FFF2-40B4-BE49-F238E27FC236}">
-                <a16:creationId xmlns:a16="http://schemas.microsoft.com/office/drawing/2014/main" id="{5753DCBF-AD85-4BFB-B154-A56C5BD51A78}"/>
+                <a16:creationId xmlns:a16="http://schemas.microsoft.com/office/drawing/2014/main" id="{A817E36A-B953-41F8-BAE8-D0A88DC0E988}"/>
               </a:ext>
             </a:extLst>
           </p:cNvPr>
@@ -10026,7 +10026,7 @@
           <p:cNvPr id="9" name="">
             <a:extLst xmlns:a="http://schemas.openxmlformats.org/drawingml/2006/main">
               <a:ext uri="{FF2B5EF4-FFF2-40B4-BE49-F238E27FC236}">
-                <a16:creationId xmlns:a16="http://schemas.microsoft.com/office/drawing/2014/main" id="{D4AF995F-7B01-480E-AE01-8A1D46FBF0B6}"/>
+                <a16:creationId xmlns:a16="http://schemas.microsoft.com/office/drawing/2014/main" id="{E41276E3-001F-444B-BCF8-4B75B3D00105}"/>
               </a:ext>
             </a:extLst>
           </p:cNvPr>
@@ -10182,7 +10182,7 @@
           <p:cNvPr id="10" name="">
             <a:extLst xmlns:a="http://schemas.openxmlformats.org/drawingml/2006/main">
               <a:ext uri="{FF2B5EF4-FFF2-40B4-BE49-F238E27FC236}">
-                <a16:creationId xmlns:a16="http://schemas.microsoft.com/office/drawing/2014/main" id="{F8C366F8-1836-4261-9609-B5D143E16065}"/>
+                <a16:creationId xmlns:a16="http://schemas.microsoft.com/office/drawing/2014/main" id="{A451F9EE-D73C-4790-9B9A-952B4EF70B96}"/>
               </a:ext>
             </a:extLst>
           </p:cNvPr>
@@ -10338,7 +10338,7 @@
           <p:cNvPr id="11" name="">
             <a:extLst xmlns:a="http://schemas.openxmlformats.org/drawingml/2006/main">
               <a:ext uri="{FF2B5EF4-FFF2-40B4-BE49-F238E27FC236}">
-                <a16:creationId xmlns:a16="http://schemas.microsoft.com/office/drawing/2014/main" id="{2B9FD456-601F-420D-857C-ED8129045E5F}"/>
+                <a16:creationId xmlns:a16="http://schemas.microsoft.com/office/drawing/2014/main" id="{B9928C6C-330E-448D-80CE-76292E469116}"/>
               </a:ext>
             </a:extLst>
           </p:cNvPr>
@@ -10492,7 +10492,7 @@
     </p:spTree>
     <p:extLst>
       <p:ext uri="{BB962C8B-B14F-4D97-AF65-F5344CB8AC3E}">
-        <p14:creationId xmlns:p14="http://schemas.microsoft.com/office/powerpoint/2010/main" val="178922982"/>
+        <p14:creationId xmlns:p14="http://schemas.microsoft.com/office/powerpoint/2010/main" val="1985263465"/>
       </p:ext>
     </p:extLst>
   </p:cSld>
@@ -10523,7 +10523,7 @@
           <p:cNvPr id="5" name="">
             <a:extLst xmlns:a="http://schemas.openxmlformats.org/drawingml/2006/main">
               <a:ext uri="{FF2B5EF4-FFF2-40B4-BE49-F238E27FC236}">
-                <a16:creationId xmlns:a16="http://schemas.microsoft.com/office/drawing/2014/main" id="{0E66E880-C436-4B45-A62F-60F01109D580}"/>
+                <a16:creationId xmlns:a16="http://schemas.microsoft.com/office/drawing/2014/main" id="{2A0D3625-2644-4DB6-B338-5E4DFA22B8D3}"/>
               </a:ext>
             </a:extLst>
           </p:cNvPr>
@@ -10669,7 +10669,7 @@
                 <a:ea typeface="Arial"/>
                 <a:cs typeface="Arial"/>
               </a:rPr>
-              <a:t>Finance begins with tuition</a:t>
+              <a:t>Provisional tuition example from finance PR2</a:t>
             </a:r>
           </a:p>
         </p:txBody>
@@ -10679,7 +10679,7 @@
           <p:cNvPr id="2" name="">
             <a:extLst xmlns:a="http://schemas.openxmlformats.org/drawingml/2006/main">
               <a:ext uri="{FF2B5EF4-FFF2-40B4-BE49-F238E27FC236}">
-                <a16:creationId xmlns:a16="http://schemas.microsoft.com/office/drawing/2014/main" id="{4E16E3E9-0D1E-49EB-A52E-BA734948039B}"/>
+                <a16:creationId xmlns:a16="http://schemas.microsoft.com/office/drawing/2014/main" id="{4C026CF1-0380-4C4F-8AA0-3C9A0AE50AAA}"/>
               </a:ext>
             </a:extLst>
           </p:cNvPr>
@@ -10709,7 +10709,7 @@
           <p:cNvPr id="3" name="">
             <a:extLst xmlns:a="http://schemas.openxmlformats.org/drawingml/2006/main">
               <a:ext uri="{FF2B5EF4-FFF2-40B4-BE49-F238E27FC236}">
-                <a16:creationId xmlns:a16="http://schemas.microsoft.com/office/drawing/2014/main" id="{1DA31C6B-2A4C-46CA-9621-6A5CBA4E7F66}"/>
+                <a16:creationId xmlns:a16="http://schemas.microsoft.com/office/drawing/2014/main" id="{3BFA3B33-F4C4-41AF-B891-714D8A5F9D4C}"/>
               </a:ext>
             </a:extLst>
           </p:cNvPr>
@@ -10743,7 +10743,7 @@
                           <a:ea typeface="Arial"/>
                           <a:cs typeface="Arial"/>
                         </a:rPr>
-                        <a:t>Example in 2024-1</a:t>
+                        <a:t>Provisional PR2 example, 2024-1</a:t>
                       </a:r>
                     </a:p>
                   </a:txBody>
@@ -10767,7 +10767,7 @@
                           <a:ea typeface="Arial"/>
                           <a:cs typeface="Arial"/>
                         </a:rPr>
-                        <a:t>Expected value</a:t>
+                        <a:t>Snapshot value</a:t>
                       </a:r>
                     </a:p>
                   </a:txBody>
@@ -10987,7 +10987,7 @@
           <p:cNvPr id="4" name="">
             <a:extLst xmlns:a="http://schemas.openxmlformats.org/drawingml/2006/main">
               <a:ext uri="{FF2B5EF4-FFF2-40B4-BE49-F238E27FC236}">
-                <a16:creationId xmlns:a16="http://schemas.microsoft.com/office/drawing/2014/main" id="{3E7CDD57-BF7D-4210-A8E1-8A2407932F9B}"/>
+                <a16:creationId xmlns:a16="http://schemas.microsoft.com/office/drawing/2014/main" id="{AE5142EA-AA70-4AF4-9D9F-94523C4121FF}"/>
               </a:ext>
             </a:extLst>
           </p:cNvPr>
@@ -11141,7 +11141,7 @@
     </p:spTree>
     <p:extLst>
       <p:ext uri="{BB962C8B-B14F-4D97-AF65-F5344CB8AC3E}">
-        <p14:creationId xmlns:p14="http://schemas.microsoft.com/office/powerpoint/2010/main" val="1378230849"/>
+        <p14:creationId xmlns:p14="http://schemas.microsoft.com/office/powerpoint/2010/main" val="836498492"/>
       </p:ext>
     </p:extLst>
   </p:cSld>
@@ -11172,7 +11172,7 @@
           <p:cNvPr id="12" name="">
             <a:extLst xmlns:a="http://schemas.openxmlformats.org/drawingml/2006/main">
               <a:ext uri="{FF2B5EF4-FFF2-40B4-BE49-F238E27FC236}">
-                <a16:creationId xmlns:a16="http://schemas.microsoft.com/office/drawing/2014/main" id="{5A47A3BE-0424-48B7-8848-B10C7E4820A7}"/>
+                <a16:creationId xmlns:a16="http://schemas.microsoft.com/office/drawing/2014/main" id="{AB22A523-DC1E-42D7-82A9-232AFDA654E3}"/>
               </a:ext>
             </a:extLst>
           </p:cNvPr>
@@ -11318,7 +11318,7 @@
                 <a:ea typeface="Arial"/>
                 <a:cs typeface="Arial"/>
               </a:rPr>
-              <a:t>Scholarship decisions are calculated in code</a:t>
+              <a:t>Scholarship rules in the pending finance feature</a:t>
             </a:r>
           </a:p>
         </p:txBody>
@@ -11328,7 +11328,7 @@
           <p:cNvPr id="2" name="">
             <a:extLst xmlns:a="http://schemas.openxmlformats.org/drawingml/2006/main">
               <a:ext uri="{FF2B5EF4-FFF2-40B4-BE49-F238E27FC236}">
-                <a16:creationId xmlns:a16="http://schemas.microsoft.com/office/drawing/2014/main" id="{DA50EC14-4648-4B76-A4DB-D21303894BF7}"/>
+                <a16:creationId xmlns:a16="http://schemas.microsoft.com/office/drawing/2014/main" id="{0C815B21-FA69-40A7-A6B1-5BAF5AC21644}"/>
               </a:ext>
             </a:extLst>
           </p:cNvPr>
@@ -11358,7 +11358,7 @@
           <p:cNvPr id="3" name="">
             <a:extLst xmlns:a="http://schemas.openxmlformats.org/drawingml/2006/main">
               <a:ext uri="{FF2B5EF4-FFF2-40B4-BE49-F238E27FC236}">
-                <a16:creationId xmlns:a16="http://schemas.microsoft.com/office/drawing/2014/main" id="{33CE93D7-EBC1-4161-9524-F9AB69FA667D}"/>
+                <a16:creationId xmlns:a16="http://schemas.microsoft.com/office/drawing/2014/main" id="{CF1C1BB9-6B6D-4869-8B23-5EDA6906F4BD}"/>
               </a:ext>
             </a:extLst>
           </p:cNvPr>
@@ -11514,7 +11514,7 @@
           <p:cNvPr id="4" name="">
             <a:extLst xmlns:a="http://schemas.openxmlformats.org/drawingml/2006/main">
               <a:ext uri="{FF2B5EF4-FFF2-40B4-BE49-F238E27FC236}">
-                <a16:creationId xmlns:a16="http://schemas.microsoft.com/office/drawing/2014/main" id="{AD17DA82-F138-4A97-AE2D-F1172A85ADFD}"/>
+                <a16:creationId xmlns:a16="http://schemas.microsoft.com/office/drawing/2014/main" id="{DF56002B-535B-40BC-A869-AB8179D89807}"/>
               </a:ext>
             </a:extLst>
           </p:cNvPr>
@@ -11670,7 +11670,7 @@
           <p:cNvPr id="5" name="">
             <a:extLst xmlns:a="http://schemas.openxmlformats.org/drawingml/2006/main">
               <a:ext uri="{FF2B5EF4-FFF2-40B4-BE49-F238E27FC236}">
-                <a16:creationId xmlns:a16="http://schemas.microsoft.com/office/drawing/2014/main" id="{2A8CE38C-F6EA-423A-862B-04DC033F99D3}"/>
+                <a16:creationId xmlns:a16="http://schemas.microsoft.com/office/drawing/2014/main" id="{FBA9F279-F5EC-4A0B-9D75-74DD3ADE3B77}"/>
               </a:ext>
             </a:extLst>
           </p:cNvPr>
@@ -11826,7 +11826,7 @@
           <p:cNvPr id="6" name="">
             <a:extLst xmlns:a="http://schemas.openxmlformats.org/drawingml/2006/main">
               <a:ext uri="{FF2B5EF4-FFF2-40B4-BE49-F238E27FC236}">
-                <a16:creationId xmlns:a16="http://schemas.microsoft.com/office/drawing/2014/main" id="{35F4C08A-1B03-4FE9-B0CD-2ECAD58B10D6}"/>
+                <a16:creationId xmlns:a16="http://schemas.microsoft.com/office/drawing/2014/main" id="{79E5A31D-9610-4C25-B62D-6077D7168559}"/>
               </a:ext>
             </a:extLst>
           </p:cNvPr>
@@ -11982,7 +11982,7 @@
           <p:cNvPr id="7" name="">
             <a:extLst xmlns:a="http://schemas.openxmlformats.org/drawingml/2006/main">
               <a:ext uri="{FF2B5EF4-FFF2-40B4-BE49-F238E27FC236}">
-                <a16:creationId xmlns:a16="http://schemas.microsoft.com/office/drawing/2014/main" id="{A146E38E-ABAA-4CAD-AD01-E9CB1F5DDA47}"/>
+                <a16:creationId xmlns:a16="http://schemas.microsoft.com/office/drawing/2014/main" id="{0C7157D8-C470-4E08-9BA4-F29F1E2D178B}"/>
               </a:ext>
             </a:extLst>
           </p:cNvPr>
@@ -12138,7 +12138,7 @@
           <p:cNvPr id="8" name="">
             <a:extLst xmlns:a="http://schemas.openxmlformats.org/drawingml/2006/main">
               <a:ext uri="{FF2B5EF4-FFF2-40B4-BE49-F238E27FC236}">
-                <a16:creationId xmlns:a16="http://schemas.microsoft.com/office/drawing/2014/main" id="{E09583AC-3B15-4323-A7AB-4DC91E086DF6}"/>
+                <a16:creationId xmlns:a16="http://schemas.microsoft.com/office/drawing/2014/main" id="{6EBC3EFA-702C-4C8C-B936-00A7FE47C689}"/>
               </a:ext>
             </a:extLst>
           </p:cNvPr>
@@ -12294,7 +12294,7 @@
           <p:cNvPr id="9" name="">
             <a:extLst xmlns:a="http://schemas.openxmlformats.org/drawingml/2006/main">
               <a:ext uri="{FF2B5EF4-FFF2-40B4-BE49-F238E27FC236}">
-                <a16:creationId xmlns:a16="http://schemas.microsoft.com/office/drawing/2014/main" id="{94C9D294-0336-4400-8001-51350AC9BDEF}"/>
+                <a16:creationId xmlns:a16="http://schemas.microsoft.com/office/drawing/2014/main" id="{E46A74EC-25CF-4573-B69C-F797D3A49547}"/>
               </a:ext>
             </a:extLst>
           </p:cNvPr>
@@ -12450,7 +12450,7 @@
           <p:cNvPr id="10" name="">
             <a:extLst xmlns:a="http://schemas.openxmlformats.org/drawingml/2006/main">
               <a:ext uri="{FF2B5EF4-FFF2-40B4-BE49-F238E27FC236}">
-                <a16:creationId xmlns:a16="http://schemas.microsoft.com/office/drawing/2014/main" id="{99905DB0-1231-4799-9B31-DE90F86C4129}"/>
+                <a16:creationId xmlns:a16="http://schemas.microsoft.com/office/drawing/2014/main" id="{3145D1CC-326F-4101-A41E-2009340083A1}"/>
               </a:ext>
             </a:extLst>
           </p:cNvPr>
@@ -12606,7 +12606,7 @@
           <p:cNvPr id="11" name="">
             <a:extLst xmlns:a="http://schemas.openxmlformats.org/drawingml/2006/main">
               <a:ext uri="{FF2B5EF4-FFF2-40B4-BE49-F238E27FC236}">
-                <a16:creationId xmlns:a16="http://schemas.microsoft.com/office/drawing/2014/main" id="{D4622A6D-B3CF-4F9F-A59D-CF6084BCCA8E}"/>
+                <a16:creationId xmlns:a16="http://schemas.microsoft.com/office/drawing/2014/main" id="{FD2B477D-8B11-4C9E-AD71-8CFD216F698C}"/>
               </a:ext>
             </a:extLst>
           </p:cNvPr>
@@ -12760,7 +12760,7 @@
     </p:spTree>
     <p:extLst>
       <p:ext uri="{BB962C8B-B14F-4D97-AF65-F5344CB8AC3E}">
-        <p14:creationId xmlns:p14="http://schemas.microsoft.com/office/powerpoint/2010/main" val="1731925886"/>
+        <p14:creationId xmlns:p14="http://schemas.microsoft.com/office/powerpoint/2010/main" val="686851550"/>
       </p:ext>
     </p:extLst>
   </p:cSld>
@@ -12791,7 +12791,7 @@
           <p:cNvPr id="5" name="">
             <a:extLst xmlns:a="http://schemas.openxmlformats.org/drawingml/2006/main">
               <a:ext uri="{FF2B5EF4-FFF2-40B4-BE49-F238E27FC236}">
-                <a16:creationId xmlns:a16="http://schemas.microsoft.com/office/drawing/2014/main" id="{2C1103BB-DAD0-4B01-BF78-1BEC134A0C1D}"/>
+                <a16:creationId xmlns:a16="http://schemas.microsoft.com/office/drawing/2014/main" id="{A6E2B291-EC70-41AA-9DA1-70870AD7A424}"/>
               </a:ext>
             </a:extLst>
           </p:cNvPr>
@@ -12937,7 +12937,7 @@
                 <a:ea typeface="Arial"/>
                 <a:cs typeface="Arial"/>
               </a:rPr>
-              <a:t>The scholarship ranking has a checked result</a:t>
+              <a:t>Provisional scholarship ranking from finance PR2</a:t>
             </a:r>
           </a:p>
         </p:txBody>
@@ -12947,7 +12947,7 @@
           <p:cNvPr id="2" name="">
             <a:extLst xmlns:a="http://schemas.openxmlformats.org/drawingml/2006/main">
               <a:ext uri="{FF2B5EF4-FFF2-40B4-BE49-F238E27FC236}">
-                <a16:creationId xmlns:a16="http://schemas.microsoft.com/office/drawing/2014/main" id="{EA7F5B1D-EA62-4AA1-9BAD-52BF7CC3D82C}"/>
+                <a16:creationId xmlns:a16="http://schemas.microsoft.com/office/drawing/2014/main" id="{2C4C641A-66CF-4F21-8A3C-5D709FF79155}"/>
               </a:ext>
             </a:extLst>
           </p:cNvPr>
@@ -12977,7 +12977,7 @@
           <p:cNvPr id="3" name="">
             <a:extLst xmlns:a="http://schemas.openxmlformats.org/drawingml/2006/main">
               <a:ext uri="{FF2B5EF4-FFF2-40B4-BE49-F238E27FC236}">
-                <a16:creationId xmlns:a16="http://schemas.microsoft.com/office/drawing/2014/main" id="{3A516D46-0A41-4966-853A-F3F1B9AE77CD}"/>
+                <a16:creationId xmlns:a16="http://schemas.microsoft.com/office/drawing/2014/main" id="{BF827D76-942D-489C-9636-4DEA6E7E24A5}"/>
               </a:ext>
             </a:extLst>
           </p:cNvPr>
@@ -13011,7 +13011,7 @@
                           <a:ea typeface="Arial"/>
                           <a:cs typeface="Arial"/>
                         </a:rPr>
-                        <a:t>SCH02 in Information Technology</a:t>
+                        <a:t>SCH02 in IT, provisional PR2 data</a:t>
                       </a:r>
                     </a:p>
                   </a:txBody>
@@ -13035,7 +13035,7 @@
                           <a:ea typeface="Arial"/>
                           <a:cs typeface="Arial"/>
                         </a:rPr>
-                        <a:t>2024-1 result</a:t>
+                        <a:t>Snapshot value</a:t>
                       </a:r>
                     </a:p>
                   </a:txBody>
@@ -13205,7 +13205,7 @@
           <p:cNvPr id="4" name="">
             <a:extLst xmlns:a="http://schemas.openxmlformats.org/drawingml/2006/main">
               <a:ext uri="{FF2B5EF4-FFF2-40B4-BE49-F238E27FC236}">
-                <a16:creationId xmlns:a16="http://schemas.microsoft.com/office/drawing/2014/main" id="{151D04CD-23F7-4406-8858-D4B9E86D6540}"/>
+                <a16:creationId xmlns:a16="http://schemas.microsoft.com/office/drawing/2014/main" id="{47F936C0-9415-4230-98AA-39341DB648A9}"/>
               </a:ext>
             </a:extLst>
           </p:cNvPr>
@@ -13359,7 +13359,7 @@
     </p:spTree>
     <p:extLst>
       <p:ext uri="{BB962C8B-B14F-4D97-AF65-F5344CB8AC3E}">
-        <p14:creationId xmlns:p14="http://schemas.microsoft.com/office/powerpoint/2010/main" val="1708119712"/>
+        <p14:creationId xmlns:p14="http://schemas.microsoft.com/office/powerpoint/2010/main" val="1807886308"/>
       </p:ext>
     </p:extLst>
   </p:cSld>
@@ -13390,7 +13390,7 @@
           <p:cNvPr id="12" name="">
             <a:extLst xmlns:a="http://schemas.openxmlformats.org/drawingml/2006/main">
               <a:ext uri="{FF2B5EF4-FFF2-40B4-BE49-F238E27FC236}">
-                <a16:creationId xmlns:a16="http://schemas.microsoft.com/office/drawing/2014/main" id="{D601F095-8AB2-4AB2-B756-1157A8B64EBF}"/>
+                <a16:creationId xmlns:a16="http://schemas.microsoft.com/office/drawing/2014/main" id="{EC3D2246-2827-4227-AEA6-497F996176EF}"/>
               </a:ext>
             </a:extLst>
           </p:cNvPr>
@@ -13536,7 +13536,7 @@
                 <a:ea typeface="Arial"/>
                 <a:cs typeface="Arial"/>
               </a:rPr>
-              <a:t>Teacher pay has visible calculation steps</a:t>
+              <a:t>Provisional teacher pay calculation</a:t>
             </a:r>
           </a:p>
         </p:txBody>
@@ -13546,7 +13546,7 @@
           <p:cNvPr id="2" name="">
             <a:extLst xmlns:a="http://schemas.openxmlformats.org/drawingml/2006/main">
               <a:ext uri="{FF2B5EF4-FFF2-40B4-BE49-F238E27FC236}">
-                <a16:creationId xmlns:a16="http://schemas.microsoft.com/office/drawing/2014/main" id="{0F94FB0B-5A66-477A-9CA9-79087572ED65}"/>
+                <a16:creationId xmlns:a16="http://schemas.microsoft.com/office/drawing/2014/main" id="{13EAE3A5-2377-4F12-AC26-9CCC7DF2E0CA}"/>
               </a:ext>
             </a:extLst>
           </p:cNvPr>
@@ -13576,7 +13576,7 @@
           <p:cNvPr id="3" name="">
             <a:extLst xmlns:a="http://schemas.openxmlformats.org/drawingml/2006/main">
               <a:ext uri="{FF2B5EF4-FFF2-40B4-BE49-F238E27FC236}">
-                <a16:creationId xmlns:a16="http://schemas.microsoft.com/office/drawing/2014/main" id="{288FCE00-2AF3-4DEC-A030-AE5E14464DCC}"/>
+                <a16:creationId xmlns:a16="http://schemas.microsoft.com/office/drawing/2014/main" id="{A6539A87-175E-4262-B653-6CEB20C97907}"/>
               </a:ext>
             </a:extLst>
           </p:cNvPr>
@@ -13732,7 +13732,7 @@
           <p:cNvPr id="4" name="">
             <a:extLst xmlns:a="http://schemas.openxmlformats.org/drawingml/2006/main">
               <a:ext uri="{FF2B5EF4-FFF2-40B4-BE49-F238E27FC236}">
-                <a16:creationId xmlns:a16="http://schemas.microsoft.com/office/drawing/2014/main" id="{EF7CB7F3-F928-49D2-9F2E-47614316743E}"/>
+                <a16:creationId xmlns:a16="http://schemas.microsoft.com/office/drawing/2014/main" id="{E095E548-009E-4E9B-B70A-AD546E93D125}"/>
               </a:ext>
             </a:extLst>
           </p:cNvPr>
@@ -13888,7 +13888,7 @@
           <p:cNvPr id="5" name="">
             <a:extLst xmlns:a="http://schemas.openxmlformats.org/drawingml/2006/main">
               <a:ext uri="{FF2B5EF4-FFF2-40B4-BE49-F238E27FC236}">
-                <a16:creationId xmlns:a16="http://schemas.microsoft.com/office/drawing/2014/main" id="{2B99E924-573B-44FA-9327-767147794139}"/>
+                <a16:creationId xmlns:a16="http://schemas.microsoft.com/office/drawing/2014/main" id="{80255249-0D5D-474C-A544-39751831E69D}"/>
               </a:ext>
             </a:extLst>
           </p:cNvPr>
@@ -14044,7 +14044,7 @@
           <p:cNvPr id="6" name="">
             <a:extLst xmlns:a="http://schemas.openxmlformats.org/drawingml/2006/main">
               <a:ext uri="{FF2B5EF4-FFF2-40B4-BE49-F238E27FC236}">
-                <a16:creationId xmlns:a16="http://schemas.microsoft.com/office/drawing/2014/main" id="{F4996CA4-9E89-4E8F-ADC0-993200C40461}"/>
+                <a16:creationId xmlns:a16="http://schemas.microsoft.com/office/drawing/2014/main" id="{218FB152-28C3-4360-84AB-FE0CA8C362E3}"/>
               </a:ext>
             </a:extLst>
           </p:cNvPr>
@@ -14200,7 +14200,7 @@
           <p:cNvPr id="7" name="">
             <a:extLst xmlns:a="http://schemas.openxmlformats.org/drawingml/2006/main">
               <a:ext uri="{FF2B5EF4-FFF2-40B4-BE49-F238E27FC236}">
-                <a16:creationId xmlns:a16="http://schemas.microsoft.com/office/drawing/2014/main" id="{798A224F-C0C7-4DE8-9EAA-60B9B22E316F}"/>
+                <a16:creationId xmlns:a16="http://schemas.microsoft.com/office/drawing/2014/main" id="{BD02943C-1738-4CD6-9298-69E2765F490A}"/>
               </a:ext>
             </a:extLst>
           </p:cNvPr>
@@ -14356,7 +14356,7 @@
           <p:cNvPr id="8" name="">
             <a:extLst xmlns:a="http://schemas.openxmlformats.org/drawingml/2006/main">
               <a:ext uri="{FF2B5EF4-FFF2-40B4-BE49-F238E27FC236}">
-                <a16:creationId xmlns:a16="http://schemas.microsoft.com/office/drawing/2014/main" id="{2FF784D1-B9E5-41F1-AEE6-873EB7124EE7}"/>
+                <a16:creationId xmlns:a16="http://schemas.microsoft.com/office/drawing/2014/main" id="{1467B6A1-1A45-4F22-AD9B-675B289C758A}"/>
               </a:ext>
             </a:extLst>
           </p:cNvPr>
@@ -14512,7 +14512,7 @@
           <p:cNvPr id="9" name="">
             <a:extLst xmlns:a="http://schemas.openxmlformats.org/drawingml/2006/main">
               <a:ext uri="{FF2B5EF4-FFF2-40B4-BE49-F238E27FC236}">
-                <a16:creationId xmlns:a16="http://schemas.microsoft.com/office/drawing/2014/main" id="{AADEBA04-BA22-4551-A749-297D539654E4}"/>
+                <a16:creationId xmlns:a16="http://schemas.microsoft.com/office/drawing/2014/main" id="{E8509A00-B107-4BC6-81F2-57E2EC6D7D2E}"/>
               </a:ext>
             </a:extLst>
           </p:cNvPr>
@@ -14668,7 +14668,7 @@
           <p:cNvPr id="10" name="">
             <a:extLst xmlns:a="http://schemas.openxmlformats.org/drawingml/2006/main">
               <a:ext uri="{FF2B5EF4-FFF2-40B4-BE49-F238E27FC236}">
-                <a16:creationId xmlns:a16="http://schemas.microsoft.com/office/drawing/2014/main" id="{42A4F62B-F9EF-4F3C-9E04-A775752A91EE}"/>
+                <a16:creationId xmlns:a16="http://schemas.microsoft.com/office/drawing/2014/main" id="{3F91C86D-7B0F-47F7-B382-5659D1468FA3}"/>
               </a:ext>
             </a:extLst>
           </p:cNvPr>
@@ -14824,7 +14824,7 @@
           <p:cNvPr id="11" name="">
             <a:extLst xmlns:a="http://schemas.openxmlformats.org/drawingml/2006/main">
               <a:ext uri="{FF2B5EF4-FFF2-40B4-BE49-F238E27FC236}">
-                <a16:creationId xmlns:a16="http://schemas.microsoft.com/office/drawing/2014/main" id="{40917792-1DAB-4B91-8EFE-ADD9E1BF586B}"/>
+                <a16:creationId xmlns:a16="http://schemas.microsoft.com/office/drawing/2014/main" id="{32A3A713-54C8-4B79-A283-7B9179E51E64}"/>
               </a:ext>
             </a:extLst>
           </p:cNvPr>
@@ -14978,7 +14978,7 @@
     </p:spTree>
     <p:extLst>
       <p:ext uri="{BB962C8B-B14F-4D97-AF65-F5344CB8AC3E}">
-        <p14:creationId xmlns:p14="http://schemas.microsoft.com/office/powerpoint/2010/main" val="1892040214"/>
+        <p14:creationId xmlns:p14="http://schemas.microsoft.com/office/powerpoint/2010/main" val="1517051070"/>
       </p:ext>
     </p:extLst>
   </p:cSld>
@@ -15009,7 +15009,7 @@
           <p:cNvPr id="12" name="">
             <a:extLst xmlns:a="http://schemas.openxmlformats.org/drawingml/2006/main">
               <a:ext uri="{FF2B5EF4-FFF2-40B4-BE49-F238E27FC236}">
-                <a16:creationId xmlns:a16="http://schemas.microsoft.com/office/drawing/2014/main" id="{B70FF7D9-961D-4F19-845A-B926F45F869C}"/>
+                <a16:creationId xmlns:a16="http://schemas.microsoft.com/office/drawing/2014/main" id="{A3706C77-B7BD-4BD4-9048-E1DDA9466338}"/>
               </a:ext>
             </a:extLst>
           </p:cNvPr>
@@ -15155,7 +15155,7 @@
                 <a:ea typeface="Arial"/>
                 <a:cs typeface="Arial"/>
               </a:rPr>
-              <a:t>Sensitive actions need confirmation</a:t>
+              <a:t>Access and confirmation in the finance feature</a:t>
             </a:r>
           </a:p>
         </p:txBody>
@@ -15165,7 +15165,7 @@
           <p:cNvPr id="2" name="">
             <a:extLst xmlns:a="http://schemas.openxmlformats.org/drawingml/2006/main">
               <a:ext uri="{FF2B5EF4-FFF2-40B4-BE49-F238E27FC236}">
-                <a16:creationId xmlns:a16="http://schemas.microsoft.com/office/drawing/2014/main" id="{0B5E2545-FBA9-4BD3-B99D-233CAF86AB59}"/>
+                <a16:creationId xmlns:a16="http://schemas.microsoft.com/office/drawing/2014/main" id="{A173A70D-1EB4-454F-9461-29BAB2551EB6}"/>
               </a:ext>
             </a:extLst>
           </p:cNvPr>
@@ -15195,7 +15195,7 @@
           <p:cNvPr id="3" name="">
             <a:extLst xmlns:a="http://schemas.openxmlformats.org/drawingml/2006/main">
               <a:ext uri="{FF2B5EF4-FFF2-40B4-BE49-F238E27FC236}">
-                <a16:creationId xmlns:a16="http://schemas.microsoft.com/office/drawing/2014/main" id="{557521D2-0216-46DC-92D9-11C577CA3D06}"/>
+                <a16:creationId xmlns:a16="http://schemas.microsoft.com/office/drawing/2014/main" id="{0389FE75-619A-4B97-870B-1DD6D9AF0972}"/>
               </a:ext>
             </a:extLst>
           </p:cNvPr>
@@ -15351,7 +15351,7 @@
           <p:cNvPr id="4" name="">
             <a:extLst xmlns:a="http://schemas.openxmlformats.org/drawingml/2006/main">
               <a:ext uri="{FF2B5EF4-FFF2-40B4-BE49-F238E27FC236}">
-                <a16:creationId xmlns:a16="http://schemas.microsoft.com/office/drawing/2014/main" id="{D4412EE0-48B8-4563-957C-53469B7F6640}"/>
+                <a16:creationId xmlns:a16="http://schemas.microsoft.com/office/drawing/2014/main" id="{951DD937-2ED1-4BB1-8302-08CCA45D9F72}"/>
               </a:ext>
             </a:extLst>
           </p:cNvPr>
@@ -15507,7 +15507,7 @@
           <p:cNvPr id="5" name="">
             <a:extLst xmlns:a="http://schemas.openxmlformats.org/drawingml/2006/main">
               <a:ext uri="{FF2B5EF4-FFF2-40B4-BE49-F238E27FC236}">
-                <a16:creationId xmlns:a16="http://schemas.microsoft.com/office/drawing/2014/main" id="{0DB87197-9697-46ED-A316-57E934A87035}"/>
+                <a16:creationId xmlns:a16="http://schemas.microsoft.com/office/drawing/2014/main" id="{91A6C704-71B4-426C-90EB-8943E4E42B98}"/>
               </a:ext>
             </a:extLst>
           </p:cNvPr>
@@ -15663,7 +15663,7 @@
           <p:cNvPr id="6" name="">
             <a:extLst xmlns:a="http://schemas.openxmlformats.org/drawingml/2006/main">
               <a:ext uri="{FF2B5EF4-FFF2-40B4-BE49-F238E27FC236}">
-                <a16:creationId xmlns:a16="http://schemas.microsoft.com/office/drawing/2014/main" id="{DD70A4EF-A1C9-4DBE-9B47-EF78AB5BF1C7}"/>
+                <a16:creationId xmlns:a16="http://schemas.microsoft.com/office/drawing/2014/main" id="{BB740B9B-2204-4F26-8B73-8DD10AFE87BB}"/>
               </a:ext>
             </a:extLst>
           </p:cNvPr>
@@ -15819,7 +15819,7 @@
           <p:cNvPr id="7" name="">
             <a:extLst xmlns:a="http://schemas.openxmlformats.org/drawingml/2006/main">
               <a:ext uri="{FF2B5EF4-FFF2-40B4-BE49-F238E27FC236}">
-                <a16:creationId xmlns:a16="http://schemas.microsoft.com/office/drawing/2014/main" id="{EC9F84AD-275E-4B76-96A4-4504F642126D}"/>
+                <a16:creationId xmlns:a16="http://schemas.microsoft.com/office/drawing/2014/main" id="{48CFEB78-CC21-424E-8DD8-A6ADF6F93906}"/>
               </a:ext>
             </a:extLst>
           </p:cNvPr>
@@ -15975,7 +15975,7 @@
           <p:cNvPr id="8" name="">
             <a:extLst xmlns:a="http://schemas.openxmlformats.org/drawingml/2006/main">
               <a:ext uri="{FF2B5EF4-FFF2-40B4-BE49-F238E27FC236}">
-                <a16:creationId xmlns:a16="http://schemas.microsoft.com/office/drawing/2014/main" id="{C348FC07-3F3D-45BD-B17E-711132E95658}"/>
+                <a16:creationId xmlns:a16="http://schemas.microsoft.com/office/drawing/2014/main" id="{4133E6EA-8147-4FC7-8975-525AD1A4FA38}"/>
               </a:ext>
             </a:extLst>
           </p:cNvPr>
@@ -16131,7 +16131,7 @@
           <p:cNvPr id="9" name="">
             <a:extLst xmlns:a="http://schemas.openxmlformats.org/drawingml/2006/main">
               <a:ext uri="{FF2B5EF4-FFF2-40B4-BE49-F238E27FC236}">
-                <a16:creationId xmlns:a16="http://schemas.microsoft.com/office/drawing/2014/main" id="{DBB668BF-80CF-47F3-A115-CB838E182ED3}"/>
+                <a16:creationId xmlns:a16="http://schemas.microsoft.com/office/drawing/2014/main" id="{3AB1F197-CC81-419F-89AC-4D58C81E05D1}"/>
               </a:ext>
             </a:extLst>
           </p:cNvPr>
@@ -16287,7 +16287,7 @@
           <p:cNvPr id="10" name="">
             <a:extLst xmlns:a="http://schemas.openxmlformats.org/drawingml/2006/main">
               <a:ext uri="{FF2B5EF4-FFF2-40B4-BE49-F238E27FC236}">
-                <a16:creationId xmlns:a16="http://schemas.microsoft.com/office/drawing/2014/main" id="{537E39C6-EC47-42A5-81FA-5F733C35BE22}"/>
+                <a16:creationId xmlns:a16="http://schemas.microsoft.com/office/drawing/2014/main" id="{73C6F9AB-499A-4F4C-90B2-602C965B73EA}"/>
               </a:ext>
             </a:extLst>
           </p:cNvPr>
@@ -16443,7 +16443,7 @@
           <p:cNvPr id="11" name="">
             <a:extLst xmlns:a="http://schemas.openxmlformats.org/drawingml/2006/main">
               <a:ext uri="{FF2B5EF4-FFF2-40B4-BE49-F238E27FC236}">
-                <a16:creationId xmlns:a16="http://schemas.microsoft.com/office/drawing/2014/main" id="{3D969DB9-781A-4280-9227-3960AB4FB3B1}"/>
+                <a16:creationId xmlns:a16="http://schemas.microsoft.com/office/drawing/2014/main" id="{5B17925E-FB75-45C6-8AF4-BC4404608131}"/>
               </a:ext>
             </a:extLst>
           </p:cNvPr>
@@ -16597,7 +16597,7 @@
     </p:spTree>
     <p:extLst>
       <p:ext uri="{BB962C8B-B14F-4D97-AF65-F5344CB8AC3E}">
-        <p14:creationId xmlns:p14="http://schemas.microsoft.com/office/powerpoint/2010/main" val="1589417347"/>
+        <p14:creationId xmlns:p14="http://schemas.microsoft.com/office/powerpoint/2010/main" val="463996328"/>
       </p:ext>
     </p:extLst>
   </p:cSld>
@@ -16628,7 +16628,7 @@
           <p:cNvPr id="5" name="">
             <a:extLst xmlns:a="http://schemas.openxmlformats.org/drawingml/2006/main">
               <a:ext uri="{FF2B5EF4-FFF2-40B4-BE49-F238E27FC236}">
-                <a16:creationId xmlns:a16="http://schemas.microsoft.com/office/drawing/2014/main" id="{5CBB8FE5-CD44-4167-8389-18749F634F3C}"/>
+                <a16:creationId xmlns:a16="http://schemas.microsoft.com/office/drawing/2014/main" id="{60A862F2-F00C-434B-81B8-18A3A5201B9E}"/>
               </a:ext>
             </a:extLst>
           </p:cNvPr>
@@ -16774,7 +16774,7 @@
                 <a:ea typeface="Arial"/>
                 <a:cs typeface="Arial"/>
               </a:rPr>
-              <a:t>Our test set covers the new features</a:t>
+              <a:t>Shared test cases and provisional finance cases</a:t>
             </a:r>
           </a:p>
         </p:txBody>
@@ -16784,7 +16784,7 @@
           <p:cNvPr id="2" name="">
             <a:extLst xmlns:a="http://schemas.openxmlformats.org/drawingml/2006/main">
               <a:ext uri="{FF2B5EF4-FFF2-40B4-BE49-F238E27FC236}">
-                <a16:creationId xmlns:a16="http://schemas.microsoft.com/office/drawing/2014/main" id="{8425CB54-21AE-4F62-B26F-5E52BBB1EE76}"/>
+                <a16:creationId xmlns:a16="http://schemas.microsoft.com/office/drawing/2014/main" id="{CE5CA846-30EB-47A6-84B7-BABE7FFF9111}"/>
               </a:ext>
             </a:extLst>
           </p:cNvPr>
@@ -16814,7 +16814,7 @@
           <p:cNvPr id="3" name="">
             <a:extLst xmlns:a="http://schemas.openxmlformats.org/drawingml/2006/main">
               <a:ext uri="{FF2B5EF4-FFF2-40B4-BE49-F238E27FC236}">
-                <a16:creationId xmlns:a16="http://schemas.microsoft.com/office/drawing/2014/main" id="{A883C1E1-D05E-4F5C-A14B-E0EEBDB99704}"/>
+                <a16:creationId xmlns:a16="http://schemas.microsoft.com/office/drawing/2014/main" id="{3C017037-9BBD-49CC-9130-AEEA2EE547BD}"/>
               </a:ext>
             </a:extLst>
           </p:cNvPr>
@@ -16848,7 +16848,7 @@
                           <a:ea typeface="Arial"/>
                           <a:cs typeface="Arial"/>
                         </a:rPr>
-                        <a:t>Group</a:t>
+                        <a:t>Set</a:t>
                       </a:r>
                     </a:p>
                   </a:txBody>
@@ -16872,7 +16872,7 @@
                           <a:ea typeface="Arial"/>
                           <a:cs typeface="Arial"/>
                         </a:rPr>
-                        <a:t>Questions</a:t>
+                        <a:t>Questions / metrics</a:t>
                       </a:r>
                     </a:p>
                   </a:txBody>
@@ -16898,7 +16898,7 @@
                           <a:ea typeface="Arial"/>
                           <a:cs typeface="Arial"/>
                         </a:rPr>
-                        <a:t>Academic and advising</a:t>
+                        <a:t>Shared CSV, K01–K15 on main</a:t>
                       </a:r>
                     </a:p>
                   </a:txBody>
@@ -16922,7 +16922,7 @@
                           <a:ea typeface="Arial"/>
                           <a:cs typeface="Arial"/>
                         </a:rPr>
-                        <a:t>15</a:t>
+                        <a:t>15 questions</a:t>
                       </a:r>
                     </a:p>
                   </a:txBody>
@@ -16948,7 +16948,7 @@
                           <a:ea typeface="Arial"/>
                           <a:cs typeface="Arial"/>
                         </a:rPr>
-                        <a:t>Finance</a:t>
+                        <a:t>Finance pending, K16–K24</a:t>
                       </a:r>
                     </a:p>
                   </a:txBody>
@@ -16972,7 +16972,7 @@
                           <a:ea typeface="Arial"/>
                           <a:cs typeface="Arial"/>
                         </a:rPr>
-                        <a:t>9</a:t>
+                        <a:t>9 provisional questions</a:t>
                       </a:r>
                     </a:p>
                   </a:txBody>
@@ -16998,7 +16998,7 @@
                           <a:ea typeface="Arial"/>
                           <a:cs typeface="Arial"/>
                         </a:rPr>
-                        <a:t>Total natural English questions</a:t>
+                        <a:t>Excel checks for shared cases</a:t>
                       </a:r>
                     </a:p>
                   </a:txBody>
@@ -17022,7 +17022,7 @@
                           <a:ea typeface="Arial"/>
                           <a:cs typeface="Arial"/>
                         </a:rPr>
-                        <a:t>24</a:t>
+                        <a:t>29 source-linked metrics</a:t>
                       </a:r>
                     </a:p>
                   </a:txBody>
@@ -17048,7 +17048,7 @@
                           <a:ea typeface="Arial"/>
                           <a:cs typeface="Arial"/>
                         </a:rPr>
-                        <a:t>Independent Excel answer metrics</a:t>
+                        <a:t>Excel finance expectations</a:t>
                       </a:r>
                     </a:p>
                   </a:txBody>
@@ -17072,7 +17072,7 @@
                           <a:ea typeface="Arial"/>
                           <a:cs typeface="Arial"/>
                         </a:rPr>
-                        <a:t>55</a:t>
+                        <a:t>26 provisional metrics</a:t>
                       </a:r>
                     </a:p>
                   </a:txBody>
@@ -17092,7 +17092,7 @@
           <p:cNvPr id="4" name="">
             <a:extLst xmlns:a="http://schemas.openxmlformats.org/drawingml/2006/main">
               <a:ext uri="{FF2B5EF4-FFF2-40B4-BE49-F238E27FC236}">
-                <a16:creationId xmlns:a16="http://schemas.microsoft.com/office/drawing/2014/main" id="{93734AB3-5771-48CB-AC8A-5398A31227BB}"/>
+                <a16:creationId xmlns:a16="http://schemas.microsoft.com/office/drawing/2014/main" id="{2EF5A237-DB94-4357-8F12-141CBFAF481C}"/>
               </a:ext>
             </a:extLst>
           </p:cNvPr>
@@ -17246,7 +17246,7 @@
     </p:spTree>
     <p:extLst>
       <p:ext uri="{BB962C8B-B14F-4D97-AF65-F5344CB8AC3E}">
-        <p14:creationId xmlns:p14="http://schemas.microsoft.com/office/powerpoint/2010/main" val="651046417"/>
+        <p14:creationId xmlns:p14="http://schemas.microsoft.com/office/powerpoint/2010/main" val="510088127"/>
       </p:ext>
     </p:extLst>
   </p:cSld>
@@ -17277,7 +17277,7 @@
           <p:cNvPr id="12" name="">
             <a:extLst xmlns:a="http://schemas.openxmlformats.org/drawingml/2006/main">
               <a:ext uri="{FF2B5EF4-FFF2-40B4-BE49-F238E27FC236}">
-                <a16:creationId xmlns:a16="http://schemas.microsoft.com/office/drawing/2014/main" id="{8DD85D4E-110A-4E68-99A4-9F76AB2AAC78}"/>
+                <a16:creationId xmlns:a16="http://schemas.microsoft.com/office/drawing/2014/main" id="{0CBE0609-C399-475F-8963-A2C5FB396F3A}"/>
               </a:ext>
             </a:extLst>
           </p:cNvPr>
@@ -17433,7 +17433,7 @@
           <p:cNvPr id="2" name="">
             <a:extLst xmlns:a="http://schemas.openxmlformats.org/drawingml/2006/main">
               <a:ext uri="{FF2B5EF4-FFF2-40B4-BE49-F238E27FC236}">
-                <a16:creationId xmlns:a16="http://schemas.microsoft.com/office/drawing/2014/main" id="{AFD2B7FE-01F9-4434-97CE-E380E4BA7372}"/>
+                <a16:creationId xmlns:a16="http://schemas.microsoft.com/office/drawing/2014/main" id="{6E65051F-B861-490D-8786-960A7093FE1C}"/>
               </a:ext>
             </a:extLst>
           </p:cNvPr>
@@ -17463,7 +17463,7 @@
           <p:cNvPr id="3" name="">
             <a:extLst xmlns:a="http://schemas.openxmlformats.org/drawingml/2006/main">
               <a:ext uri="{FF2B5EF4-FFF2-40B4-BE49-F238E27FC236}">
-                <a16:creationId xmlns:a16="http://schemas.microsoft.com/office/drawing/2014/main" id="{B4913030-0BD4-490A-A3F3-412D913E0380}"/>
+                <a16:creationId xmlns:a16="http://schemas.microsoft.com/office/drawing/2014/main" id="{4CFAC497-5B7B-461E-8037-A7A752609F97}"/>
               </a:ext>
             </a:extLst>
           </p:cNvPr>
@@ -17619,7 +17619,7 @@
           <p:cNvPr id="4" name="">
             <a:extLst xmlns:a="http://schemas.openxmlformats.org/drawingml/2006/main">
               <a:ext uri="{FF2B5EF4-FFF2-40B4-BE49-F238E27FC236}">
-                <a16:creationId xmlns:a16="http://schemas.microsoft.com/office/drawing/2014/main" id="{3569028C-A50D-4D16-887B-14AAE4648FAF}"/>
+                <a16:creationId xmlns:a16="http://schemas.microsoft.com/office/drawing/2014/main" id="{33E8680E-E636-4A45-A638-1B036AD1006C}"/>
               </a:ext>
             </a:extLst>
           </p:cNvPr>
@@ -17765,7 +17765,7 @@
                 <a:ea typeface="Arial"/>
                 <a:cs typeface="Arial"/>
               </a:rPr>
-              <a:t>Open Answers and find the test ID</a:t>
+              <a:t>Use the scope column: main or provisional</a:t>
             </a:r>
           </a:p>
         </p:txBody>
@@ -17775,7 +17775,7 @@
           <p:cNvPr id="5" name="">
             <a:extLst xmlns:a="http://schemas.openxmlformats.org/drawingml/2006/main">
               <a:ext uri="{FF2B5EF4-FFF2-40B4-BE49-F238E27FC236}">
-                <a16:creationId xmlns:a16="http://schemas.microsoft.com/office/drawing/2014/main" id="{36526D23-6183-41CE-B902-B55E00F02109}"/>
+                <a16:creationId xmlns:a16="http://schemas.microsoft.com/office/drawing/2014/main" id="{628801D4-1BC9-4CF2-97DC-A93BA61C81A7}"/>
               </a:ext>
             </a:extLst>
           </p:cNvPr>
@@ -17931,7 +17931,7 @@
           <p:cNvPr id="6" name="">
             <a:extLst xmlns:a="http://schemas.openxmlformats.org/drawingml/2006/main">
               <a:ext uri="{FF2B5EF4-FFF2-40B4-BE49-F238E27FC236}">
-                <a16:creationId xmlns:a16="http://schemas.microsoft.com/office/drawing/2014/main" id="{0CEC6C7C-DFA6-4A78-9299-FB5E859CB737}"/>
+                <a16:creationId xmlns:a16="http://schemas.microsoft.com/office/drawing/2014/main" id="{0FE2953F-EEA0-4B2D-B69B-684EA4A36192}"/>
               </a:ext>
             </a:extLst>
           </p:cNvPr>
@@ -18077,7 +18077,7 @@
                 <a:ea typeface="Arial"/>
                 <a:cs typeface="Arial"/>
               </a:rPr>
-              <a:t>Follow the formula to its source rows</a:t>
+              <a:t>Read the worked arithmetic on the Manual sheet</a:t>
             </a:r>
           </a:p>
         </p:txBody>
@@ -18087,7 +18087,7 @@
           <p:cNvPr id="7" name="">
             <a:extLst xmlns:a="http://schemas.openxmlformats.org/drawingml/2006/main">
               <a:ext uri="{FF2B5EF4-FFF2-40B4-BE49-F238E27FC236}">
-                <a16:creationId xmlns:a16="http://schemas.microsoft.com/office/drawing/2014/main" id="{EC0B4E38-155B-4822-824A-5A82581AB52A}"/>
+                <a16:creationId xmlns:a16="http://schemas.microsoft.com/office/drawing/2014/main" id="{4B7A80AE-4E48-4FCC-88F6-ADE728D44025}"/>
               </a:ext>
             </a:extLst>
           </p:cNvPr>
@@ -18243,7 +18243,7 @@
           <p:cNvPr id="8" name="">
             <a:extLst xmlns:a="http://schemas.openxmlformats.org/drawingml/2006/main">
               <a:ext uri="{FF2B5EF4-FFF2-40B4-BE49-F238E27FC236}">
-                <a16:creationId xmlns:a16="http://schemas.microsoft.com/office/drawing/2014/main" id="{E38DE1F5-B14E-482F-8E42-3581E9B688DE}"/>
+                <a16:creationId xmlns:a16="http://schemas.microsoft.com/office/drawing/2014/main" id="{8277130E-D83F-487E-AB57-1DDC253277C3}"/>
               </a:ext>
             </a:extLst>
           </p:cNvPr>
@@ -18389,7 +18389,7 @@
                 <a:ea typeface="Arial"/>
                 <a:cs typeface="Arial"/>
               </a:rPr>
-              <a:t>Check the rule threshold and intermediate totals</a:t>
+              <a:t>Trace each answer to CSV rows and rule thresholds</a:t>
             </a:r>
           </a:p>
         </p:txBody>
@@ -18399,7 +18399,7 @@
           <p:cNvPr id="9" name="">
             <a:extLst xmlns:a="http://schemas.openxmlformats.org/drawingml/2006/main">
               <a:ext uri="{FF2B5EF4-FFF2-40B4-BE49-F238E27FC236}">
-                <a16:creationId xmlns:a16="http://schemas.microsoft.com/office/drawing/2014/main" id="{814C4DAA-FEF6-465F-A1CC-5B0CE1DBEA4B}"/>
+                <a16:creationId xmlns:a16="http://schemas.microsoft.com/office/drawing/2014/main" id="{B869128B-15B0-487F-911B-3855E7DB86A2}"/>
               </a:ext>
             </a:extLst>
           </p:cNvPr>
@@ -18555,7 +18555,7 @@
           <p:cNvPr id="10" name="">
             <a:extLst xmlns:a="http://schemas.openxmlformats.org/drawingml/2006/main">
               <a:ext uri="{FF2B5EF4-FFF2-40B4-BE49-F238E27FC236}">
-                <a16:creationId xmlns:a16="http://schemas.microsoft.com/office/drawing/2014/main" id="{28BEFD45-6050-4E50-B012-BA19FF753045}"/>
+                <a16:creationId xmlns:a16="http://schemas.microsoft.com/office/drawing/2014/main" id="{B9C29758-2978-47C2-858E-E6B8CA0A7C8E}"/>
               </a:ext>
             </a:extLst>
           </p:cNvPr>
@@ -18701,7 +18701,7 @@
                 <a:ea typeface="Arial"/>
                 <a:cs typeface="Arial"/>
               </a:rPr>
-              <a:t>Compare the Excel result with the tool output</a:t>
+              <a:t>Compare the result and explanation with the recorded log</a:t>
             </a:r>
           </a:p>
         </p:txBody>
@@ -18711,7 +18711,7 @@
           <p:cNvPr id="11" name="">
             <a:extLst xmlns:a="http://schemas.openxmlformats.org/drawingml/2006/main">
               <a:ext uri="{FF2B5EF4-FFF2-40B4-BE49-F238E27FC236}">
-                <a16:creationId xmlns:a16="http://schemas.microsoft.com/office/drawing/2014/main" id="{30794E4D-CED7-44A9-B1BB-802610DBBA70}"/>
+                <a16:creationId xmlns:a16="http://schemas.microsoft.com/office/drawing/2014/main" id="{5B9BCF47-2B00-457B-A13E-F2E66B6A27E7}"/>
               </a:ext>
             </a:extLst>
           </p:cNvPr>
@@ -18865,7 +18865,7 @@
     </p:spTree>
     <p:extLst>
       <p:ext uri="{BB962C8B-B14F-4D97-AF65-F5344CB8AC3E}">
-        <p14:creationId xmlns:p14="http://schemas.microsoft.com/office/powerpoint/2010/main" val="102746364"/>
+        <p14:creationId xmlns:p14="http://schemas.microsoft.com/office/powerpoint/2010/main" val="1594121396"/>
       </p:ext>
     </p:extLst>
   </p:cSld>
@@ -18896,7 +18896,7 @@
           <p:cNvPr id="12" name="">
             <a:extLst xmlns:a="http://schemas.openxmlformats.org/drawingml/2006/main">
               <a:ext uri="{FF2B5EF4-FFF2-40B4-BE49-F238E27FC236}">
-                <a16:creationId xmlns:a16="http://schemas.microsoft.com/office/drawing/2014/main" id="{19CC9895-4718-4E43-B4CA-1619140BBB4B}"/>
+                <a16:creationId xmlns:a16="http://schemas.microsoft.com/office/drawing/2014/main" id="{B41227A4-2AA5-45FD-B9B9-6056C7FA5465}"/>
               </a:ext>
             </a:extLst>
           </p:cNvPr>
@@ -19052,7 +19052,7 @@
           <p:cNvPr id="2" name="">
             <a:extLst xmlns:a="http://schemas.openxmlformats.org/drawingml/2006/main">
               <a:ext uri="{FF2B5EF4-FFF2-40B4-BE49-F238E27FC236}">
-                <a16:creationId xmlns:a16="http://schemas.microsoft.com/office/drawing/2014/main" id="{5D09AB4E-B7F8-4AB3-97C3-ECDA08B0FE6E}"/>
+                <a16:creationId xmlns:a16="http://schemas.microsoft.com/office/drawing/2014/main" id="{6B177ACF-7FB3-4CEB-BDD8-F7DC942065FC}"/>
               </a:ext>
             </a:extLst>
           </p:cNvPr>
@@ -19082,7 +19082,7 @@
           <p:cNvPr id="3" name="">
             <a:extLst xmlns:a="http://schemas.openxmlformats.org/drawingml/2006/main">
               <a:ext uri="{FF2B5EF4-FFF2-40B4-BE49-F238E27FC236}">
-                <a16:creationId xmlns:a16="http://schemas.microsoft.com/office/drawing/2014/main" id="{C663F366-4D47-4A9C-9679-0E5889DF13C9}"/>
+                <a16:creationId xmlns:a16="http://schemas.microsoft.com/office/drawing/2014/main" id="{DC7D4E8B-FA9D-460A-B4FA-F63319819210}"/>
               </a:ext>
             </a:extLst>
           </p:cNvPr>
@@ -19238,7 +19238,7 @@
           <p:cNvPr id="4" name="">
             <a:extLst xmlns:a="http://schemas.openxmlformats.org/drawingml/2006/main">
               <a:ext uri="{FF2B5EF4-FFF2-40B4-BE49-F238E27FC236}">
-                <a16:creationId xmlns:a16="http://schemas.microsoft.com/office/drawing/2014/main" id="{E2B6D5F1-A00E-4E85-A665-B0C3185298C1}"/>
+                <a16:creationId xmlns:a16="http://schemas.microsoft.com/office/drawing/2014/main" id="{79A33BFB-219E-4304-AB52-06A4711510D4}"/>
               </a:ext>
             </a:extLst>
           </p:cNvPr>
@@ -19394,7 +19394,7 @@
           <p:cNvPr id="5" name="">
             <a:extLst xmlns:a="http://schemas.openxmlformats.org/drawingml/2006/main">
               <a:ext uri="{FF2B5EF4-FFF2-40B4-BE49-F238E27FC236}">
-                <a16:creationId xmlns:a16="http://schemas.microsoft.com/office/drawing/2014/main" id="{D21FC403-61AF-4CF5-93CB-98856E162537}"/>
+                <a16:creationId xmlns:a16="http://schemas.microsoft.com/office/drawing/2014/main" id="{3F92E2A4-4E05-4236-916B-E37BFB8716B4}"/>
               </a:ext>
             </a:extLst>
           </p:cNvPr>
@@ -19550,7 +19550,7 @@
           <p:cNvPr id="6" name="">
             <a:extLst xmlns:a="http://schemas.openxmlformats.org/drawingml/2006/main">
               <a:ext uri="{FF2B5EF4-FFF2-40B4-BE49-F238E27FC236}">
-                <a16:creationId xmlns:a16="http://schemas.microsoft.com/office/drawing/2014/main" id="{619EC7D5-F2AB-4E7E-86D9-9D22B38AD56E}"/>
+                <a16:creationId xmlns:a16="http://schemas.microsoft.com/office/drawing/2014/main" id="{BE119302-E535-45EF-B0ED-CA41547B59C0}"/>
               </a:ext>
             </a:extLst>
           </p:cNvPr>
@@ -19706,7 +19706,7 @@
           <p:cNvPr id="7" name="">
             <a:extLst xmlns:a="http://schemas.openxmlformats.org/drawingml/2006/main">
               <a:ext uri="{FF2B5EF4-FFF2-40B4-BE49-F238E27FC236}">
-                <a16:creationId xmlns:a16="http://schemas.microsoft.com/office/drawing/2014/main" id="{ECC04D1D-CC43-4B9D-AA20-CA2D38DAEE58}"/>
+                <a16:creationId xmlns:a16="http://schemas.microsoft.com/office/drawing/2014/main" id="{B52F1050-E9E3-4B4B-9F6F-298C7EE9C0B8}"/>
               </a:ext>
             </a:extLst>
           </p:cNvPr>
@@ -19862,7 +19862,7 @@
           <p:cNvPr id="8" name="">
             <a:extLst xmlns:a="http://schemas.openxmlformats.org/drawingml/2006/main">
               <a:ext uri="{FF2B5EF4-FFF2-40B4-BE49-F238E27FC236}">
-                <a16:creationId xmlns:a16="http://schemas.microsoft.com/office/drawing/2014/main" id="{958E83AB-84AF-4F9F-869B-0639867118AD}"/>
+                <a16:creationId xmlns:a16="http://schemas.microsoft.com/office/drawing/2014/main" id="{CFF47ECC-52B5-410F-A79A-41CDFF6ACE9F}"/>
               </a:ext>
             </a:extLst>
           </p:cNvPr>
@@ -20018,7 +20018,7 @@
           <p:cNvPr id="9" name="">
             <a:extLst xmlns:a="http://schemas.openxmlformats.org/drawingml/2006/main">
               <a:ext uri="{FF2B5EF4-FFF2-40B4-BE49-F238E27FC236}">
-                <a16:creationId xmlns:a16="http://schemas.microsoft.com/office/drawing/2014/main" id="{2DD65C8A-CC08-42DE-8AB0-F794C8263569}"/>
+                <a16:creationId xmlns:a16="http://schemas.microsoft.com/office/drawing/2014/main" id="{36E94425-4C28-4D69-8EC8-4BD0A993370B}"/>
               </a:ext>
             </a:extLst>
           </p:cNvPr>
@@ -20174,7 +20174,7 @@
           <p:cNvPr id="10" name="">
             <a:extLst xmlns:a="http://schemas.openxmlformats.org/drawingml/2006/main">
               <a:ext uri="{FF2B5EF4-FFF2-40B4-BE49-F238E27FC236}">
-                <a16:creationId xmlns:a16="http://schemas.microsoft.com/office/drawing/2014/main" id="{8B9E9320-4C04-4FA0-B8D5-88A1F29D0545}"/>
+                <a16:creationId xmlns:a16="http://schemas.microsoft.com/office/drawing/2014/main" id="{0BD47F92-CAF4-40AC-80B3-699EE27E0EFE}"/>
               </a:ext>
             </a:extLst>
           </p:cNvPr>
@@ -20330,7 +20330,7 @@
           <p:cNvPr id="11" name="">
             <a:extLst xmlns:a="http://schemas.openxmlformats.org/drawingml/2006/main">
               <a:ext uri="{FF2B5EF4-FFF2-40B4-BE49-F238E27FC236}">
-                <a16:creationId xmlns:a16="http://schemas.microsoft.com/office/drawing/2014/main" id="{CE8B310D-BACA-4709-B5F3-8E4FC9FDC698}"/>
+                <a16:creationId xmlns:a16="http://schemas.microsoft.com/office/drawing/2014/main" id="{4982FA86-D0B8-4821-955E-474085825988}"/>
               </a:ext>
             </a:extLst>
           </p:cNvPr>
@@ -20484,7 +20484,7 @@
     </p:spTree>
     <p:extLst>
       <p:ext uri="{BB962C8B-B14F-4D97-AF65-F5344CB8AC3E}">
-        <p14:creationId xmlns:p14="http://schemas.microsoft.com/office/powerpoint/2010/main" val="1038958272"/>
+        <p14:creationId xmlns:p14="http://schemas.microsoft.com/office/powerpoint/2010/main" val="1986373501"/>
       </p:ext>
     </p:extLst>
   </p:cSld>
@@ -20515,7 +20515,7 @@
           <p:cNvPr id="5" name="">
             <a:extLst xmlns:a="http://schemas.openxmlformats.org/drawingml/2006/main">
               <a:ext uri="{FF2B5EF4-FFF2-40B4-BE49-F238E27FC236}">
-                <a16:creationId xmlns:a16="http://schemas.microsoft.com/office/drawing/2014/main" id="{F5E68516-215C-40AE-87A7-5DC87CDD5640}"/>
+                <a16:creationId xmlns:a16="http://schemas.microsoft.com/office/drawing/2014/main" id="{3B53FA17-6502-4D0D-AD41-DE79D1062BD4}"/>
               </a:ext>
             </a:extLst>
           </p:cNvPr>
@@ -20671,7 +20671,7 @@
           <p:cNvPr id="2" name="">
             <a:extLst xmlns:a="http://schemas.openxmlformats.org/drawingml/2006/main">
               <a:ext uri="{FF2B5EF4-FFF2-40B4-BE49-F238E27FC236}">
-                <a16:creationId xmlns:a16="http://schemas.microsoft.com/office/drawing/2014/main" id="{6BFBB989-5A60-4C8C-8D58-4177A5D5754B}"/>
+                <a16:creationId xmlns:a16="http://schemas.microsoft.com/office/drawing/2014/main" id="{ECE7C0E8-70CF-441A-BE51-7DE7525061A5}"/>
               </a:ext>
             </a:extLst>
           </p:cNvPr>
@@ -20701,7 +20701,7 @@
           <p:cNvPr id="3" name="">
             <a:extLst xmlns:a="http://schemas.openxmlformats.org/drawingml/2006/main">
               <a:ext uri="{FF2B5EF4-FFF2-40B4-BE49-F238E27FC236}">
-                <a16:creationId xmlns:a16="http://schemas.microsoft.com/office/drawing/2014/main" id="{CA5F21A2-3CBE-4823-BAAA-41522F7FA822}"/>
+                <a16:creationId xmlns:a16="http://schemas.microsoft.com/office/drawing/2014/main" id="{241D7A95-4221-4DF7-8921-AAB15380D391}"/>
               </a:ext>
             </a:extLst>
           </p:cNvPr>
@@ -21029,7 +21029,7 @@
           <p:cNvPr id="4" name="">
             <a:extLst xmlns:a="http://schemas.openxmlformats.org/drawingml/2006/main">
               <a:ext uri="{FF2B5EF4-FFF2-40B4-BE49-F238E27FC236}">
-                <a16:creationId xmlns:a16="http://schemas.microsoft.com/office/drawing/2014/main" id="{CE7296A3-68E7-4F2E-AE9C-3FD6BD2F2173}"/>
+                <a16:creationId xmlns:a16="http://schemas.microsoft.com/office/drawing/2014/main" id="{E4A0CFFA-A254-4DE2-85FF-126F3417A08C}"/>
               </a:ext>
             </a:extLst>
           </p:cNvPr>
@@ -21183,7 +21183,7 @@
     </p:spTree>
     <p:extLst>
       <p:ext uri="{BB962C8B-B14F-4D97-AF65-F5344CB8AC3E}">
-        <p14:creationId xmlns:p14="http://schemas.microsoft.com/office/powerpoint/2010/main" val="207057752"/>
+        <p14:creationId xmlns:p14="http://schemas.microsoft.com/office/powerpoint/2010/main" val="1269640469"/>
       </p:ext>
     </p:extLst>
   </p:cSld>
@@ -21214,7 +21214,7 @@
           <p:cNvPr id="5" name="">
             <a:extLst xmlns:a="http://schemas.openxmlformats.org/drawingml/2006/main">
               <a:ext uri="{FF2B5EF4-FFF2-40B4-BE49-F238E27FC236}">
-                <a16:creationId xmlns:a16="http://schemas.microsoft.com/office/drawing/2014/main" id="{D5699CDB-45C7-4213-94C1-485042FF3EA7}"/>
+                <a16:creationId xmlns:a16="http://schemas.microsoft.com/office/drawing/2014/main" id="{D21F8134-E0D2-4385-81B4-33E0C2F3BA3A}"/>
               </a:ext>
             </a:extLst>
           </p:cNvPr>
@@ -21360,7 +21360,7 @@
                 <a:ea typeface="Arial"/>
                 <a:cs typeface="Arial"/>
               </a:rPr>
-              <a:t>Khoa results from the new test set</a:t>
+              <a:t>New results on the shared main dataset</a:t>
             </a:r>
           </a:p>
         </p:txBody>
@@ -21370,7 +21370,7 @@
           <p:cNvPr id="2" name="">
             <a:extLst xmlns:a="http://schemas.openxmlformats.org/drawingml/2006/main">
               <a:ext uri="{FF2B5EF4-FFF2-40B4-BE49-F238E27FC236}">
-                <a16:creationId xmlns:a16="http://schemas.microsoft.com/office/drawing/2014/main" id="{FC39F0B3-694D-4F6E-83EF-6683DEDEC716}"/>
+                <a16:creationId xmlns:a16="http://schemas.microsoft.com/office/drawing/2014/main" id="{196ED22B-C803-4315-95C9-99DEBF1CC597}"/>
               </a:ext>
             </a:extLst>
           </p:cNvPr>
@@ -21400,7 +21400,7 @@
           <p:cNvPr id="3" name="">
             <a:extLst xmlns:a="http://schemas.openxmlformats.org/drawingml/2006/main">
               <a:ext uri="{FF2B5EF4-FFF2-40B4-BE49-F238E27FC236}">
-                <a16:creationId xmlns:a16="http://schemas.microsoft.com/office/drawing/2014/main" id="{B701AACA-7351-4906-8FDF-E4011D93980B}"/>
+                <a16:creationId xmlns:a16="http://schemas.microsoft.com/office/drawing/2014/main" id="{DBBCC848-6649-4D49-8020-EC0BA4B5E1B9}"/>
               </a:ext>
             </a:extLst>
           </p:cNvPr>
@@ -21460,7 +21460,7 @@
                           <a:ea typeface="Arial"/>
                           <a:cs typeface="Arial"/>
                         </a:rPr>
-                        <a:t>Checked cases</a:t>
+                        <a:t>Cases</a:t>
                       </a:r>
                     </a:p>
                   </a:txBody>
@@ -21558,7 +21558,7 @@
                           <a:ea typeface="Arial"/>
                           <a:cs typeface="Arial"/>
                         </a:rPr>
-                        <a:t>24</a:t>
+                        <a:t>15</a:t>
                       </a:r>
                     </a:p>
                   </a:txBody>
@@ -21582,7 +21582,7 @@
                           <a:ea typeface="Arial"/>
                           <a:cs typeface="Arial"/>
                         </a:rPr>
-                        <a:t>24</a:t>
+                        <a:t>15</a:t>
                       </a:r>
                     </a:p>
                   </a:txBody>
@@ -21656,7 +21656,7 @@
                           <a:ea typeface="Arial"/>
                           <a:cs typeface="Arial"/>
                         </a:rPr>
-                        <a:t>24</a:t>
+                        <a:t>15</a:t>
                       </a:r>
                     </a:p>
                   </a:txBody>
@@ -21680,7 +21680,7 @@
                           <a:ea typeface="Arial"/>
                           <a:cs typeface="Arial"/>
                         </a:rPr>
-                        <a:t>24</a:t>
+                        <a:t>15</a:t>
                       </a:r>
                     </a:p>
                   </a:txBody>
@@ -21754,7 +21754,7 @@
                           <a:ea typeface="Arial"/>
                           <a:cs typeface="Arial"/>
                         </a:rPr>
-                        <a:t>24</a:t>
+                        <a:t>15</a:t>
                       </a:r>
                     </a:p>
                   </a:txBody>
@@ -21778,7 +21778,7 @@
                           <a:ea typeface="Arial"/>
                           <a:cs typeface="Arial"/>
                         </a:rPr>
-                        <a:t>24</a:t>
+                        <a:t>15</a:t>
                       </a:r>
                     </a:p>
                   </a:txBody>
@@ -21822,7 +21822,7 @@
           <p:cNvPr id="4" name="">
             <a:extLst xmlns:a="http://schemas.openxmlformats.org/drawingml/2006/main">
               <a:ext uri="{FF2B5EF4-FFF2-40B4-BE49-F238E27FC236}">
-                <a16:creationId xmlns:a16="http://schemas.microsoft.com/office/drawing/2014/main" id="{94789917-FFFD-4485-9DA0-99F866A5471C}"/>
+                <a16:creationId xmlns:a16="http://schemas.microsoft.com/office/drawing/2014/main" id="{8BFA27FD-2214-4A94-BEFB-B5888AC3B875}"/>
               </a:ext>
             </a:extLst>
           </p:cNvPr>
@@ -21976,7 +21976,7 @@
     </p:spTree>
     <p:extLst>
       <p:ext uri="{BB962C8B-B14F-4D97-AF65-F5344CB8AC3E}">
-        <p14:creationId xmlns:p14="http://schemas.microsoft.com/office/powerpoint/2010/main" val="1820359372"/>
+        <p14:creationId xmlns:p14="http://schemas.microsoft.com/office/powerpoint/2010/main" val="11144488"/>
       </p:ext>
     </p:extLst>
   </p:cSld>
@@ -22007,7 +22007,7 @@
           <p:cNvPr id="5" name="">
             <a:extLst xmlns:a="http://schemas.openxmlformats.org/drawingml/2006/main">
               <a:ext uri="{FF2B5EF4-FFF2-40B4-BE49-F238E27FC236}">
-                <a16:creationId xmlns:a16="http://schemas.microsoft.com/office/drawing/2014/main" id="{2C061883-13AE-48BB-A49F-0DF0F8FB08CC}"/>
+                <a16:creationId xmlns:a16="http://schemas.microsoft.com/office/drawing/2014/main" id="{8E8BB4E1-D367-41F7-889E-F4B68E4C7DFD}"/>
               </a:ext>
             </a:extLst>
           </p:cNvPr>
@@ -22163,7 +22163,7 @@
           <p:cNvPr id="2" name="">
             <a:extLst xmlns:a="http://schemas.openxmlformats.org/drawingml/2006/main">
               <a:ext uri="{FF2B5EF4-FFF2-40B4-BE49-F238E27FC236}">
-                <a16:creationId xmlns:a16="http://schemas.microsoft.com/office/drawing/2014/main" id="{73714368-BE2C-4196-A644-265375F203C4}"/>
+                <a16:creationId xmlns:a16="http://schemas.microsoft.com/office/drawing/2014/main" id="{ECC2BC4D-01B5-423F-8B41-6EDD175C38C6}"/>
               </a:ext>
             </a:extLst>
           </p:cNvPr>
@@ -22193,7 +22193,7 @@
           <p:cNvPr id="3" name="">
             <a:extLst xmlns:a="http://schemas.openxmlformats.org/drawingml/2006/main">
               <a:ext uri="{FF2B5EF4-FFF2-40B4-BE49-F238E27FC236}">
-                <a16:creationId xmlns:a16="http://schemas.microsoft.com/office/drawing/2014/main" id="{1D57659E-EF18-4882-BE27-5A7BC558F06D}"/>
+                <a16:creationId xmlns:a16="http://schemas.microsoft.com/office/drawing/2014/main" id="{A020E007-5384-4421-AFC5-21C8F98E31F9}"/>
               </a:ext>
             </a:extLst>
           </p:cNvPr>
@@ -22251,7 +22251,7 @@
                           <a:ea typeface="Arial"/>
                           <a:cs typeface="Arial"/>
                         </a:rPr>
-                        <a:t>New run result</a:t>
+                        <a:t>Shared 15-case run</a:t>
                       </a:r>
                     </a:p>
                   </a:txBody>
@@ -22351,7 +22351,7 @@
                           <a:ea typeface="Arial"/>
                           <a:cs typeface="Arial"/>
                         </a:rPr>
-                        <a:t>7.5 ms</a:t>
+                        <a:t>8 ms</a:t>
                       </a:r>
                     </a:p>
                   </a:txBody>
@@ -22401,7 +22401,7 @@
                           <a:ea typeface="Arial"/>
                           <a:cs typeface="Arial"/>
                         </a:rPr>
-                        <a:t>2.85 s</a:t>
+                        <a:t>2.19 s</a:t>
                       </a:r>
                     </a:p>
                   </a:txBody>
@@ -22451,7 +22451,7 @@
                           <a:ea typeface="Arial"/>
                           <a:cs typeface="Arial"/>
                         </a:rPr>
-                        <a:t>237,665 / 3,692</a:t>
+                        <a:t>111,391 / 2,458</a:t>
                       </a:r>
                     </a:p>
                   </a:txBody>
@@ -22471,7 +22471,7 @@
           <p:cNvPr id="4" name="">
             <a:extLst xmlns:a="http://schemas.openxmlformats.org/drawingml/2006/main">
               <a:ext uri="{FF2B5EF4-FFF2-40B4-BE49-F238E27FC236}">
-                <a16:creationId xmlns:a16="http://schemas.microsoft.com/office/drawing/2014/main" id="{27F33354-29D0-4677-B77A-D04172A816D8}"/>
+                <a16:creationId xmlns:a16="http://schemas.microsoft.com/office/drawing/2014/main" id="{7ABDC979-82EE-42FA-A548-199C54F5130F}"/>
               </a:ext>
             </a:extLst>
           </p:cNvPr>
@@ -22625,7 +22625,7 @@
     </p:spTree>
     <p:extLst>
       <p:ext uri="{BB962C8B-B14F-4D97-AF65-F5344CB8AC3E}">
-        <p14:creationId xmlns:p14="http://schemas.microsoft.com/office/powerpoint/2010/main" val="1937026598"/>
+        <p14:creationId xmlns:p14="http://schemas.microsoft.com/office/powerpoint/2010/main" val="996728800"/>
       </p:ext>
     </p:extLst>
   </p:cSld>
@@ -22656,7 +22656,7 @@
           <p:cNvPr id="5" name="">
             <a:extLst xmlns:a="http://schemas.openxmlformats.org/drawingml/2006/main">
               <a:ext uri="{FF2B5EF4-FFF2-40B4-BE49-F238E27FC236}">
-                <a16:creationId xmlns:a16="http://schemas.microsoft.com/office/drawing/2014/main" id="{91E38AC5-3074-4C31-ACD2-217A11F47680}"/>
+                <a16:creationId xmlns:a16="http://schemas.microsoft.com/office/drawing/2014/main" id="{DF8F014A-E505-4463-9E9E-DDCE68A175BF}"/>
               </a:ext>
             </a:extLst>
           </p:cNvPr>
@@ -22812,7 +22812,7 @@
           <p:cNvPr id="2" name="">
             <a:extLst xmlns:a="http://schemas.openxmlformats.org/drawingml/2006/main">
               <a:ext uri="{FF2B5EF4-FFF2-40B4-BE49-F238E27FC236}">
-                <a16:creationId xmlns:a16="http://schemas.microsoft.com/office/drawing/2014/main" id="{95DCE49E-1C2C-4D89-BC60-AFE0036080D4}"/>
+                <a16:creationId xmlns:a16="http://schemas.microsoft.com/office/drawing/2014/main" id="{2220D541-A2F3-4C96-B94B-89242A86A6DC}"/>
               </a:ext>
             </a:extLst>
           </p:cNvPr>
@@ -22842,7 +22842,7 @@
           <p:cNvPr id="3" name="">
             <a:extLst xmlns:a="http://schemas.openxmlformats.org/drawingml/2006/main">
               <a:ext uri="{FF2B5EF4-FFF2-40B4-BE49-F238E27FC236}">
-                <a16:creationId xmlns:a16="http://schemas.microsoft.com/office/drawing/2014/main" id="{47695231-162E-4E0F-AB09-00DAD3558C88}"/>
+                <a16:creationId xmlns:a16="http://schemas.microsoft.com/office/drawing/2014/main" id="{7ED8A35A-CD0A-4385-BFE8-F0EBF55EAEC2}"/>
               </a:ext>
             </a:extLst>
           </p:cNvPr>
@@ -23167,7 +23167,7 @@
           <p:cNvPr id="4" name="">
             <a:extLst xmlns:a="http://schemas.openxmlformats.org/drawingml/2006/main">
               <a:ext uri="{FF2B5EF4-FFF2-40B4-BE49-F238E27FC236}">
-                <a16:creationId xmlns:a16="http://schemas.microsoft.com/office/drawing/2014/main" id="{8F3C9A1E-D99D-4F80-9A26-308B3CEF114E}"/>
+                <a16:creationId xmlns:a16="http://schemas.microsoft.com/office/drawing/2014/main" id="{4A81A7A9-9E2C-4CD5-AA2A-2D263C642BBD}"/>
               </a:ext>
             </a:extLst>
           </p:cNvPr>
@@ -23321,7 +23321,7 @@
     </p:spTree>
     <p:extLst>
       <p:ext uri="{BB962C8B-B14F-4D97-AF65-F5344CB8AC3E}">
-        <p14:creationId xmlns:p14="http://schemas.microsoft.com/office/powerpoint/2010/main" val="826744413"/>
+        <p14:creationId xmlns:p14="http://schemas.microsoft.com/office/powerpoint/2010/main" val="1924747666"/>
       </p:ext>
     </p:extLst>
   </p:cSld>
@@ -23352,7 +23352,7 @@
           <p:cNvPr id="5" name="">
             <a:extLst xmlns:a="http://schemas.openxmlformats.org/drawingml/2006/main">
               <a:ext uri="{FF2B5EF4-FFF2-40B4-BE49-F238E27FC236}">
-                <a16:creationId xmlns:a16="http://schemas.microsoft.com/office/drawing/2014/main" id="{92F50899-C49A-4475-91D4-7DEED5626B6E}"/>
+                <a16:creationId xmlns:a16="http://schemas.microsoft.com/office/drawing/2014/main" id="{C4B6B539-A3E7-4B9B-B3C9-D0637FF05E1E}"/>
               </a:ext>
             </a:extLst>
           </p:cNvPr>
@@ -23508,7 +23508,7 @@
           <p:cNvPr id="2" name="">
             <a:extLst xmlns:a="http://schemas.openxmlformats.org/drawingml/2006/main">
               <a:ext uri="{FF2B5EF4-FFF2-40B4-BE49-F238E27FC236}">
-                <a16:creationId xmlns:a16="http://schemas.microsoft.com/office/drawing/2014/main" id="{F8807D98-88EB-49C5-9AE3-C3699FBB7DAD}"/>
+                <a16:creationId xmlns:a16="http://schemas.microsoft.com/office/drawing/2014/main" id="{90C3C3D5-AE1D-4044-9DA6-EDF783BB59E3}"/>
               </a:ext>
             </a:extLst>
           </p:cNvPr>
@@ -23538,7 +23538,7 @@
           <p:cNvPr id="3" name="">
             <a:extLst xmlns:a="http://schemas.openxmlformats.org/drawingml/2006/main">
               <a:ext uri="{FF2B5EF4-FFF2-40B4-BE49-F238E27FC236}">
-                <a16:creationId xmlns:a16="http://schemas.microsoft.com/office/drawing/2014/main" id="{8BE0DE77-868F-43E8-9321-F0F302D919A8}"/>
+                <a16:creationId xmlns:a16="http://schemas.microsoft.com/office/drawing/2014/main" id="{9AAC30D4-8AE5-409D-9528-A60136B7C6A5}"/>
               </a:ext>
             </a:extLst>
           </p:cNvPr>
@@ -23863,7 +23863,7 @@
           <p:cNvPr id="4" name="">
             <a:extLst xmlns:a="http://schemas.openxmlformats.org/drawingml/2006/main">
               <a:ext uri="{FF2B5EF4-FFF2-40B4-BE49-F238E27FC236}">
-                <a16:creationId xmlns:a16="http://schemas.microsoft.com/office/drawing/2014/main" id="{49AFC8ED-D18C-425A-A150-A9D4B84CEA9A}"/>
+                <a16:creationId xmlns:a16="http://schemas.microsoft.com/office/drawing/2014/main" id="{E075566E-4914-462B-B86F-A22114FA5DAB}"/>
               </a:ext>
             </a:extLst>
           </p:cNvPr>
@@ -24017,7 +24017,7 @@
     </p:spTree>
     <p:extLst>
       <p:ext uri="{BB962C8B-B14F-4D97-AF65-F5344CB8AC3E}">
-        <p14:creationId xmlns:p14="http://schemas.microsoft.com/office/powerpoint/2010/main" val="774953943"/>
+        <p14:creationId xmlns:p14="http://schemas.microsoft.com/office/powerpoint/2010/main" val="740009419"/>
       </p:ext>
     </p:extLst>
   </p:cSld>
@@ -24048,7 +24048,7 @@
           <p:cNvPr id="12" name="">
             <a:extLst xmlns:a="http://schemas.openxmlformats.org/drawingml/2006/main">
               <a:ext uri="{FF2B5EF4-FFF2-40B4-BE49-F238E27FC236}">
-                <a16:creationId xmlns:a16="http://schemas.microsoft.com/office/drawing/2014/main" id="{C543D440-3C21-474A-B743-FA3DE8ED52DC}"/>
+                <a16:creationId xmlns:a16="http://schemas.microsoft.com/office/drawing/2014/main" id="{C035363E-B4F1-4018-8A97-DE53D234A7B0}"/>
               </a:ext>
             </a:extLst>
           </p:cNvPr>
@@ -24204,7 +24204,7 @@
           <p:cNvPr id="2" name="">
             <a:extLst xmlns:a="http://schemas.openxmlformats.org/drawingml/2006/main">
               <a:ext uri="{FF2B5EF4-FFF2-40B4-BE49-F238E27FC236}">
-                <a16:creationId xmlns:a16="http://schemas.microsoft.com/office/drawing/2014/main" id="{FB3D03BF-8A42-4271-9CCA-C124C638C41A}"/>
+                <a16:creationId xmlns:a16="http://schemas.microsoft.com/office/drawing/2014/main" id="{50C30136-3FA9-4282-B46B-7F34011AE3AE}"/>
               </a:ext>
             </a:extLst>
           </p:cNvPr>
@@ -24234,7 +24234,7 @@
           <p:cNvPr id="3" name="">
             <a:extLst xmlns:a="http://schemas.openxmlformats.org/drawingml/2006/main">
               <a:ext uri="{FF2B5EF4-FFF2-40B4-BE49-F238E27FC236}">
-                <a16:creationId xmlns:a16="http://schemas.microsoft.com/office/drawing/2014/main" id="{576A9029-FCC0-44A1-B00B-075B108DD0FE}"/>
+                <a16:creationId xmlns:a16="http://schemas.microsoft.com/office/drawing/2014/main" id="{39790002-4767-4618-BC6E-988DED838056}"/>
               </a:ext>
             </a:extLst>
           </p:cNvPr>
@@ -24390,7 +24390,7 @@
           <p:cNvPr id="4" name="">
             <a:extLst xmlns:a="http://schemas.openxmlformats.org/drawingml/2006/main">
               <a:ext uri="{FF2B5EF4-FFF2-40B4-BE49-F238E27FC236}">
-                <a16:creationId xmlns:a16="http://schemas.microsoft.com/office/drawing/2014/main" id="{08776955-A732-4DD0-B371-7277E28F6526}"/>
+                <a16:creationId xmlns:a16="http://schemas.microsoft.com/office/drawing/2014/main" id="{5720777B-3E80-4E0C-8E59-66EB154C589D}"/>
               </a:ext>
             </a:extLst>
           </p:cNvPr>
@@ -24546,7 +24546,7 @@
           <p:cNvPr id="5" name="">
             <a:extLst xmlns:a="http://schemas.openxmlformats.org/drawingml/2006/main">
               <a:ext uri="{FF2B5EF4-FFF2-40B4-BE49-F238E27FC236}">
-                <a16:creationId xmlns:a16="http://schemas.microsoft.com/office/drawing/2014/main" id="{BF2F8FD3-017E-4992-B159-9D181BE6F2AD}"/>
+                <a16:creationId xmlns:a16="http://schemas.microsoft.com/office/drawing/2014/main" id="{6312AFAA-C351-477E-B670-AFFE2824DA40}"/>
               </a:ext>
             </a:extLst>
           </p:cNvPr>
@@ -24702,7 +24702,7 @@
           <p:cNvPr id="6" name="">
             <a:extLst xmlns:a="http://schemas.openxmlformats.org/drawingml/2006/main">
               <a:ext uri="{FF2B5EF4-FFF2-40B4-BE49-F238E27FC236}">
-                <a16:creationId xmlns:a16="http://schemas.microsoft.com/office/drawing/2014/main" id="{8EE61B65-DFC7-4236-82F5-B1B8536EA0F7}"/>
+                <a16:creationId xmlns:a16="http://schemas.microsoft.com/office/drawing/2014/main" id="{8FC07285-99CD-4612-AC6A-9DCFEEF24333}"/>
               </a:ext>
             </a:extLst>
           </p:cNvPr>
@@ -24858,7 +24858,7 @@
           <p:cNvPr id="7" name="">
             <a:extLst xmlns:a="http://schemas.openxmlformats.org/drawingml/2006/main">
               <a:ext uri="{FF2B5EF4-FFF2-40B4-BE49-F238E27FC236}">
-                <a16:creationId xmlns:a16="http://schemas.microsoft.com/office/drawing/2014/main" id="{4AB6240A-32F4-4FA6-ABA7-F48659AEE5DB}"/>
+                <a16:creationId xmlns:a16="http://schemas.microsoft.com/office/drawing/2014/main" id="{34EB8C87-5430-44BF-8877-370AB4054900}"/>
               </a:ext>
             </a:extLst>
           </p:cNvPr>
@@ -25014,7 +25014,7 @@
           <p:cNvPr id="8" name="">
             <a:extLst xmlns:a="http://schemas.openxmlformats.org/drawingml/2006/main">
               <a:ext uri="{FF2B5EF4-FFF2-40B4-BE49-F238E27FC236}">
-                <a16:creationId xmlns:a16="http://schemas.microsoft.com/office/drawing/2014/main" id="{4AA43511-22B3-4CBD-A02D-0BB2AE162859}"/>
+                <a16:creationId xmlns:a16="http://schemas.microsoft.com/office/drawing/2014/main" id="{B768FF2E-AD54-4EEF-9ED3-DC1972304B7D}"/>
               </a:ext>
             </a:extLst>
           </p:cNvPr>
@@ -25170,7 +25170,7 @@
           <p:cNvPr id="9" name="">
             <a:extLst xmlns:a="http://schemas.openxmlformats.org/drawingml/2006/main">
               <a:ext uri="{FF2B5EF4-FFF2-40B4-BE49-F238E27FC236}">
-                <a16:creationId xmlns:a16="http://schemas.microsoft.com/office/drawing/2014/main" id="{849BFCED-7D2D-4889-911C-16BDBF1F1E1E}"/>
+                <a16:creationId xmlns:a16="http://schemas.microsoft.com/office/drawing/2014/main" id="{5228FD75-DB2E-4FD6-8412-F8AE48F3676F}"/>
               </a:ext>
             </a:extLst>
           </p:cNvPr>
@@ -25326,7 +25326,7 @@
           <p:cNvPr id="10" name="">
             <a:extLst xmlns:a="http://schemas.openxmlformats.org/drawingml/2006/main">
               <a:ext uri="{FF2B5EF4-FFF2-40B4-BE49-F238E27FC236}">
-                <a16:creationId xmlns:a16="http://schemas.microsoft.com/office/drawing/2014/main" id="{E56A822B-BDDA-4998-822F-D7FBF5E1F0E3}"/>
+                <a16:creationId xmlns:a16="http://schemas.microsoft.com/office/drawing/2014/main" id="{996C42A8-3CAB-45FB-BC08-60E452BBC697}"/>
               </a:ext>
             </a:extLst>
           </p:cNvPr>
@@ -25482,7 +25482,7 @@
           <p:cNvPr id="11" name="">
             <a:extLst xmlns:a="http://schemas.openxmlformats.org/drawingml/2006/main">
               <a:ext uri="{FF2B5EF4-FFF2-40B4-BE49-F238E27FC236}">
-                <a16:creationId xmlns:a16="http://schemas.microsoft.com/office/drawing/2014/main" id="{958C99B8-8718-423B-BCAF-53560B199613}"/>
+                <a16:creationId xmlns:a16="http://schemas.microsoft.com/office/drawing/2014/main" id="{4CE66628-922C-4A73-BDD7-BBD33B90E6B4}"/>
               </a:ext>
             </a:extLst>
           </p:cNvPr>
@@ -25636,7 +25636,7 @@
     </p:spTree>
     <p:extLst>
       <p:ext uri="{BB962C8B-B14F-4D97-AF65-F5344CB8AC3E}">
-        <p14:creationId xmlns:p14="http://schemas.microsoft.com/office/powerpoint/2010/main" val="1781183465"/>
+        <p14:creationId xmlns:p14="http://schemas.microsoft.com/office/powerpoint/2010/main" val="515702399"/>
       </p:ext>
     </p:extLst>
   </p:cSld>
@@ -25667,7 +25667,7 @@
           <p:cNvPr id="5" name="">
             <a:extLst xmlns:a="http://schemas.openxmlformats.org/drawingml/2006/main">
               <a:ext uri="{FF2B5EF4-FFF2-40B4-BE49-F238E27FC236}">
-                <a16:creationId xmlns:a16="http://schemas.microsoft.com/office/drawing/2014/main" id="{D5B22C5D-36E6-49D1-95FC-5AF564613E78}"/>
+                <a16:creationId xmlns:a16="http://schemas.microsoft.com/office/drawing/2014/main" id="{6C315840-128E-4A96-A2FC-6D5198C2B653}"/>
               </a:ext>
             </a:extLst>
           </p:cNvPr>
@@ -25823,7 +25823,7 @@
           <p:cNvPr id="2" name="">
             <a:extLst xmlns:a="http://schemas.openxmlformats.org/drawingml/2006/main">
               <a:ext uri="{FF2B5EF4-FFF2-40B4-BE49-F238E27FC236}">
-                <a16:creationId xmlns:a16="http://schemas.microsoft.com/office/drawing/2014/main" id="{6AB9AC35-A3BB-4C6C-981D-266C6EFE381A}"/>
+                <a16:creationId xmlns:a16="http://schemas.microsoft.com/office/drawing/2014/main" id="{17D4603D-1098-4398-8FA8-2D1A3B3A7440}"/>
               </a:ext>
             </a:extLst>
           </p:cNvPr>
@@ -25853,7 +25853,7 @@
           <p:cNvPr id="3" name="">
             <a:extLst xmlns:a="http://schemas.openxmlformats.org/drawingml/2006/main">
               <a:ext uri="{FF2B5EF4-FFF2-40B4-BE49-F238E27FC236}">
-                <a16:creationId xmlns:a16="http://schemas.microsoft.com/office/drawing/2014/main" id="{D5F22556-C17A-4842-A98D-5BBC3A2577F7}"/>
+                <a16:creationId xmlns:a16="http://schemas.microsoft.com/office/drawing/2014/main" id="{5AB52E2B-CE8B-4E2E-9F25-28730639CF03}"/>
               </a:ext>
             </a:extLst>
           </p:cNvPr>
@@ -26178,7 +26178,7 @@
           <p:cNvPr id="4" name="">
             <a:extLst xmlns:a="http://schemas.openxmlformats.org/drawingml/2006/main">
               <a:ext uri="{FF2B5EF4-FFF2-40B4-BE49-F238E27FC236}">
-                <a16:creationId xmlns:a16="http://schemas.microsoft.com/office/drawing/2014/main" id="{756EF3CC-3F4F-423D-A9D2-E352C6CAA2B1}"/>
+                <a16:creationId xmlns:a16="http://schemas.microsoft.com/office/drawing/2014/main" id="{58FF1104-DC34-48A6-974C-AF99851FACC7}"/>
               </a:ext>
             </a:extLst>
           </p:cNvPr>
@@ -26332,7 +26332,7 @@
     </p:spTree>
     <p:extLst>
       <p:ext uri="{BB962C8B-B14F-4D97-AF65-F5344CB8AC3E}">
-        <p14:creationId xmlns:p14="http://schemas.microsoft.com/office/powerpoint/2010/main" val="2118502003"/>
+        <p14:creationId xmlns:p14="http://schemas.microsoft.com/office/powerpoint/2010/main" val="1187172584"/>
       </p:ext>
     </p:extLst>
   </p:cSld>
@@ -26363,7 +26363,7 @@
           <p:cNvPr id="12" name="">
             <a:extLst xmlns:a="http://schemas.openxmlformats.org/drawingml/2006/main">
               <a:ext uri="{FF2B5EF4-FFF2-40B4-BE49-F238E27FC236}">
-                <a16:creationId xmlns:a16="http://schemas.microsoft.com/office/drawing/2014/main" id="{8F47F4FC-FE47-4594-AC4A-1B3E8EFC0D05}"/>
+                <a16:creationId xmlns:a16="http://schemas.microsoft.com/office/drawing/2014/main" id="{A1743DE5-7D7E-4279-A834-4737F36A1C95}"/>
               </a:ext>
             </a:extLst>
           </p:cNvPr>
@@ -26509,7 +26509,7 @@
                 <a:ea typeface="Arial"/>
                 <a:cs typeface="Arial"/>
               </a:rPr>
-              <a:t>Context budget must match the actual tool set</a:t>
+              <a:t>Context budget depends on the enabled tools</a:t>
             </a:r>
           </a:p>
         </p:txBody>
@@ -26519,7 +26519,7 @@
           <p:cNvPr id="2" name="">
             <a:extLst xmlns:a="http://schemas.openxmlformats.org/drawingml/2006/main">
               <a:ext uri="{FF2B5EF4-FFF2-40B4-BE49-F238E27FC236}">
-                <a16:creationId xmlns:a16="http://schemas.microsoft.com/office/drawing/2014/main" id="{FE381DA3-ADF9-41E1-8C90-D4CD897940EE}"/>
+                <a16:creationId xmlns:a16="http://schemas.microsoft.com/office/drawing/2014/main" id="{398A7449-90CB-4306-8EE8-17AA293162DE}"/>
               </a:ext>
             </a:extLst>
           </p:cNvPr>
@@ -26549,7 +26549,7 @@
           <p:cNvPr id="3" name="">
             <a:extLst xmlns:a="http://schemas.openxmlformats.org/drawingml/2006/main">
               <a:ext uri="{FF2B5EF4-FFF2-40B4-BE49-F238E27FC236}">
-                <a16:creationId xmlns:a16="http://schemas.microsoft.com/office/drawing/2014/main" id="{FB0F8DF1-FB9C-4050-AF09-4400385B890B}"/>
+                <a16:creationId xmlns:a16="http://schemas.microsoft.com/office/drawing/2014/main" id="{477C794A-6051-49B6-98C2-2DCA557E30A8}"/>
               </a:ext>
             </a:extLst>
           </p:cNvPr>
@@ -26705,7 +26705,7 @@
           <p:cNvPr id="4" name="">
             <a:extLst xmlns:a="http://schemas.openxmlformats.org/drawingml/2006/main">
               <a:ext uri="{FF2B5EF4-FFF2-40B4-BE49-F238E27FC236}">
-                <a16:creationId xmlns:a16="http://schemas.microsoft.com/office/drawing/2014/main" id="{E3033101-BD3A-457E-8C2E-2EEBC2B11E3E}"/>
+                <a16:creationId xmlns:a16="http://schemas.microsoft.com/office/drawing/2014/main" id="{ACC4E044-1D30-46D3-85A6-93AC20FD6AA8}"/>
               </a:ext>
             </a:extLst>
           </p:cNvPr>
@@ -26851,7 +26851,7 @@
                 <a:ea typeface="Arial"/>
                 <a:cs typeface="Arial"/>
               </a:rPr>
-              <a:t>Our combined setup exposes 27 tools</a:t>
+              <a:t>Current main-only configuration exposes 20 tools</a:t>
             </a:r>
           </a:p>
         </p:txBody>
@@ -26861,7 +26861,7 @@
           <p:cNvPr id="5" name="">
             <a:extLst xmlns:a="http://schemas.openxmlformats.org/drawingml/2006/main">
               <a:ext uri="{FF2B5EF4-FFF2-40B4-BE49-F238E27FC236}">
-                <a16:creationId xmlns:a16="http://schemas.microsoft.com/office/drawing/2014/main" id="{9E7C3DB9-8795-4653-9143-027DD0EBC766}"/>
+                <a16:creationId xmlns:a16="http://schemas.microsoft.com/office/drawing/2014/main" id="{933CFF65-8B13-4369-A98B-8CB1F9462366}"/>
               </a:ext>
             </a:extLst>
           </p:cNvPr>
@@ -27017,7 +27017,7 @@
           <p:cNvPr id="6" name="">
             <a:extLst xmlns:a="http://schemas.openxmlformats.org/drawingml/2006/main">
               <a:ext uri="{FF2B5EF4-FFF2-40B4-BE49-F238E27FC236}">
-                <a16:creationId xmlns:a16="http://schemas.microsoft.com/office/drawing/2014/main" id="{EA7E54A9-EBA6-430B-A5F3-CE04D64E08C2}"/>
+                <a16:creationId xmlns:a16="http://schemas.microsoft.com/office/drawing/2014/main" id="{BE75EBDC-0D3E-478A-8B7C-F7F1A8D57F46}"/>
               </a:ext>
             </a:extLst>
           </p:cNvPr>
@@ -27163,7 +27163,7 @@
                 <a:ea typeface="Arial"/>
                 <a:cs typeface="Arial"/>
               </a:rPr>
-              <a:t>Tien measured 20 tools on Qwen with an 8192 context</a:t>
+              <a:t>The old combined finance snapshot exposed 27 tools</a:t>
             </a:r>
           </a:p>
         </p:txBody>
@@ -27173,7 +27173,7 @@
           <p:cNvPr id="7" name="">
             <a:extLst xmlns:a="http://schemas.openxmlformats.org/drawingml/2006/main">
               <a:ext uri="{FF2B5EF4-FFF2-40B4-BE49-F238E27FC236}">
-                <a16:creationId xmlns:a16="http://schemas.microsoft.com/office/drawing/2014/main" id="{EA792762-F91D-44B0-9B2C-1BE70EB7994C}"/>
+                <a16:creationId xmlns:a16="http://schemas.microsoft.com/office/drawing/2014/main" id="{28739E5B-9D7C-4F2B-AE98-FE3453699E57}"/>
               </a:ext>
             </a:extLst>
           </p:cNvPr>
@@ -27329,7 +27329,7 @@
           <p:cNvPr id="8" name="">
             <a:extLst xmlns:a="http://schemas.openxmlformats.org/drawingml/2006/main">
               <a:ext uri="{FF2B5EF4-FFF2-40B4-BE49-F238E27FC236}">
-                <a16:creationId xmlns:a16="http://schemas.microsoft.com/office/drawing/2014/main" id="{B9D49F10-F6D9-40F1-B0DF-D8E63AAD0526}"/>
+                <a16:creationId xmlns:a16="http://schemas.microsoft.com/office/drawing/2014/main" id="{65E2AC3B-0D08-4E73-A0BB-7D69E0A8CD86}"/>
               </a:ext>
             </a:extLst>
           </p:cNvPr>
@@ -27475,7 +27475,7 @@
                 <a:ea typeface="Arial"/>
                 <a:cs typeface="Arial"/>
               </a:rPr>
-              <a:t>That earlier setup used about 2981 prompt tokens</a:t>
+              <a:t>Tien measured an earlier tool set in an 8192 context</a:t>
             </a:r>
           </a:p>
         </p:txBody>
@@ -27485,7 +27485,7 @@
           <p:cNvPr id="9" name="">
             <a:extLst xmlns:a="http://schemas.openxmlformats.org/drawingml/2006/main">
               <a:ext uri="{FF2B5EF4-FFF2-40B4-BE49-F238E27FC236}">
-                <a16:creationId xmlns:a16="http://schemas.microsoft.com/office/drawing/2014/main" id="{DE4E6E82-9D5F-4297-97C3-6B13DAB8A0F3}"/>
+                <a16:creationId xmlns:a16="http://schemas.microsoft.com/office/drawing/2014/main" id="{58EA3DEB-755F-4FE7-A60D-F0BA998B3CBE}"/>
               </a:ext>
             </a:extLst>
           </p:cNvPr>
@@ -27641,7 +27641,7 @@
           <p:cNvPr id="10" name="">
             <a:extLst xmlns:a="http://schemas.openxmlformats.org/drawingml/2006/main">
               <a:ext uri="{FF2B5EF4-FFF2-40B4-BE49-F238E27FC236}">
-                <a16:creationId xmlns:a16="http://schemas.microsoft.com/office/drawing/2014/main" id="{80852F29-5A65-47A8-A4C5-E0EB0C5DF24B}"/>
+                <a16:creationId xmlns:a16="http://schemas.microsoft.com/office/drawing/2014/main" id="{A82D2397-35C6-4112-8199-78EDEDBF795B}"/>
               </a:ext>
             </a:extLst>
           </p:cNvPr>
@@ -27787,7 +27787,7 @@
                 <a:ea typeface="Arial"/>
                 <a:cs typeface="Arial"/>
               </a:rPr>
-              <a:t>The complete 27-tool set still needs a Qwen token check</a:t>
+              <a:t>Measure again after the final finance merge</a:t>
             </a:r>
           </a:p>
         </p:txBody>
@@ -27797,7 +27797,7 @@
           <p:cNvPr id="11" name="">
             <a:extLst xmlns:a="http://schemas.openxmlformats.org/drawingml/2006/main">
               <a:ext uri="{FF2B5EF4-FFF2-40B4-BE49-F238E27FC236}">
-                <a16:creationId xmlns:a16="http://schemas.microsoft.com/office/drawing/2014/main" id="{6F05490D-D7BA-4033-9F0A-FE9C5E8339DD}"/>
+                <a16:creationId xmlns:a16="http://schemas.microsoft.com/office/drawing/2014/main" id="{5E3FFFD5-5F5F-44BC-A628-0BEBD9273E2E}"/>
               </a:ext>
             </a:extLst>
           </p:cNvPr>
@@ -27951,7 +27951,7 @@
     </p:spTree>
     <p:extLst>
       <p:ext uri="{BB962C8B-B14F-4D97-AF65-F5344CB8AC3E}">
-        <p14:creationId xmlns:p14="http://schemas.microsoft.com/office/powerpoint/2010/main" val="710287228"/>
+        <p14:creationId xmlns:p14="http://schemas.microsoft.com/office/powerpoint/2010/main" val="119692990"/>
       </p:ext>
     </p:extLst>
   </p:cSld>
@@ -27982,7 +27982,7 @@
           <p:cNvPr id="12" name="">
             <a:extLst xmlns:a="http://schemas.openxmlformats.org/drawingml/2006/main">
               <a:ext uri="{FF2B5EF4-FFF2-40B4-BE49-F238E27FC236}">
-                <a16:creationId xmlns:a16="http://schemas.microsoft.com/office/drawing/2014/main" id="{2969B211-695E-4175-ADB5-2E80B02FA718}"/>
+                <a16:creationId xmlns:a16="http://schemas.microsoft.com/office/drawing/2014/main" id="{D20E33A7-D401-4B12-978B-BEF45736F9F5}"/>
               </a:ext>
             </a:extLst>
           </p:cNvPr>
@@ -28138,7 +28138,7 @@
           <p:cNvPr id="2" name="">
             <a:extLst xmlns:a="http://schemas.openxmlformats.org/drawingml/2006/main">
               <a:ext uri="{FF2B5EF4-FFF2-40B4-BE49-F238E27FC236}">
-                <a16:creationId xmlns:a16="http://schemas.microsoft.com/office/drawing/2014/main" id="{D991BA4E-E0F7-4409-AA00-7DA007184552}"/>
+                <a16:creationId xmlns:a16="http://schemas.microsoft.com/office/drawing/2014/main" id="{D1B1F800-620C-4401-88AD-4DC9967D6C34}"/>
               </a:ext>
             </a:extLst>
           </p:cNvPr>
@@ -28168,7 +28168,7 @@
           <p:cNvPr id="3" name="">
             <a:extLst xmlns:a="http://schemas.openxmlformats.org/drawingml/2006/main">
               <a:ext uri="{FF2B5EF4-FFF2-40B4-BE49-F238E27FC236}">
-                <a16:creationId xmlns:a16="http://schemas.microsoft.com/office/drawing/2014/main" id="{AA4CF521-143A-4D7F-AD87-8E4F2AAC59A8}"/>
+                <a16:creationId xmlns:a16="http://schemas.microsoft.com/office/drawing/2014/main" id="{F5A62BA2-14A1-4378-9C70-20BFF894BB92}"/>
               </a:ext>
             </a:extLst>
           </p:cNvPr>
@@ -28324,7 +28324,7 @@
           <p:cNvPr id="4" name="">
             <a:extLst xmlns:a="http://schemas.openxmlformats.org/drawingml/2006/main">
               <a:ext uri="{FF2B5EF4-FFF2-40B4-BE49-F238E27FC236}">
-                <a16:creationId xmlns:a16="http://schemas.microsoft.com/office/drawing/2014/main" id="{C9C41CDC-DB85-4E7A-8265-FD1302EC9EA5}"/>
+                <a16:creationId xmlns:a16="http://schemas.microsoft.com/office/drawing/2014/main" id="{58ABDBB1-F02C-4463-9602-C9D331446517}"/>
               </a:ext>
             </a:extLst>
           </p:cNvPr>
@@ -28480,7 +28480,7 @@
           <p:cNvPr id="5" name="">
             <a:extLst xmlns:a="http://schemas.openxmlformats.org/drawingml/2006/main">
               <a:ext uri="{FF2B5EF4-FFF2-40B4-BE49-F238E27FC236}">
-                <a16:creationId xmlns:a16="http://schemas.microsoft.com/office/drawing/2014/main" id="{C2A242DE-4B2A-45B6-8413-498AFDFFDD1A}"/>
+                <a16:creationId xmlns:a16="http://schemas.microsoft.com/office/drawing/2014/main" id="{9742224B-734E-433E-8FD2-C502630106FF}"/>
               </a:ext>
             </a:extLst>
           </p:cNvPr>
@@ -28636,7 +28636,7 @@
           <p:cNvPr id="6" name="">
             <a:extLst xmlns:a="http://schemas.openxmlformats.org/drawingml/2006/main">
               <a:ext uri="{FF2B5EF4-FFF2-40B4-BE49-F238E27FC236}">
-                <a16:creationId xmlns:a16="http://schemas.microsoft.com/office/drawing/2014/main" id="{8B105027-2089-44A8-A2F6-6A45EAAE5CF1}"/>
+                <a16:creationId xmlns:a16="http://schemas.microsoft.com/office/drawing/2014/main" id="{68A082EE-3989-46AC-827B-7CDFE99587AC}"/>
               </a:ext>
             </a:extLst>
           </p:cNvPr>
@@ -28792,7 +28792,7 @@
           <p:cNvPr id="7" name="">
             <a:extLst xmlns:a="http://schemas.openxmlformats.org/drawingml/2006/main">
               <a:ext uri="{FF2B5EF4-FFF2-40B4-BE49-F238E27FC236}">
-                <a16:creationId xmlns:a16="http://schemas.microsoft.com/office/drawing/2014/main" id="{2E92EA7D-48DF-45FD-B01B-26555859A4BD}"/>
+                <a16:creationId xmlns:a16="http://schemas.microsoft.com/office/drawing/2014/main" id="{FFA56343-3F36-49C0-8F2D-6EAE3AE7E80A}"/>
               </a:ext>
             </a:extLst>
           </p:cNvPr>
@@ -28948,7 +28948,7 @@
           <p:cNvPr id="8" name="">
             <a:extLst xmlns:a="http://schemas.openxmlformats.org/drawingml/2006/main">
               <a:ext uri="{FF2B5EF4-FFF2-40B4-BE49-F238E27FC236}">
-                <a16:creationId xmlns:a16="http://schemas.microsoft.com/office/drawing/2014/main" id="{07017BAE-6148-4D81-9FAC-EFA87C296647}"/>
+                <a16:creationId xmlns:a16="http://schemas.microsoft.com/office/drawing/2014/main" id="{1B606409-77FE-430E-B8BF-9145EF73058F}"/>
               </a:ext>
             </a:extLst>
           </p:cNvPr>
@@ -29104,7 +29104,7 @@
           <p:cNvPr id="9" name="">
             <a:extLst xmlns:a="http://schemas.openxmlformats.org/drawingml/2006/main">
               <a:ext uri="{FF2B5EF4-FFF2-40B4-BE49-F238E27FC236}">
-                <a16:creationId xmlns:a16="http://schemas.microsoft.com/office/drawing/2014/main" id="{8DB44775-695F-46BA-855B-2567FDC58D3A}"/>
+                <a16:creationId xmlns:a16="http://schemas.microsoft.com/office/drawing/2014/main" id="{CD0D51BC-DC87-42ED-BAF9-CBCD1E78CF62}"/>
               </a:ext>
             </a:extLst>
           </p:cNvPr>
@@ -29260,7 +29260,7 @@
           <p:cNvPr id="10" name="">
             <a:extLst xmlns:a="http://schemas.openxmlformats.org/drawingml/2006/main">
               <a:ext uri="{FF2B5EF4-FFF2-40B4-BE49-F238E27FC236}">
-                <a16:creationId xmlns:a16="http://schemas.microsoft.com/office/drawing/2014/main" id="{B75DDD33-B749-4B31-BD48-BFCCCD743695}"/>
+                <a16:creationId xmlns:a16="http://schemas.microsoft.com/office/drawing/2014/main" id="{37E422AB-33E5-4147-965C-E4E2F2F2C29F}"/>
               </a:ext>
             </a:extLst>
           </p:cNvPr>
@@ -29406,7 +29406,7 @@
                 <a:ea typeface="Arial"/>
                 <a:cs typeface="Arial"/>
               </a:rPr>
-              <a:t>Check answers independently from server calculations</a:t>
+              <a:t>Name maximum section rates separately from overall rates</a:t>
             </a:r>
           </a:p>
         </p:txBody>
@@ -29416,7 +29416,7 @@
           <p:cNvPr id="11" name="">
             <a:extLst xmlns:a="http://schemas.openxmlformats.org/drawingml/2006/main">
               <a:ext uri="{FF2B5EF4-FFF2-40B4-BE49-F238E27FC236}">
-                <a16:creationId xmlns:a16="http://schemas.microsoft.com/office/drawing/2014/main" id="{13416582-7B7F-4085-8204-DD1661DCAB25}"/>
+                <a16:creationId xmlns:a16="http://schemas.microsoft.com/office/drawing/2014/main" id="{1F880FFC-690D-4E3C-B253-237037E27875}"/>
               </a:ext>
             </a:extLst>
           </p:cNvPr>
@@ -29570,7 +29570,7 @@
     </p:spTree>
     <p:extLst>
       <p:ext uri="{BB962C8B-B14F-4D97-AF65-F5344CB8AC3E}">
-        <p14:creationId xmlns:p14="http://schemas.microsoft.com/office/powerpoint/2010/main" val="533069463"/>
+        <p14:creationId xmlns:p14="http://schemas.microsoft.com/office/powerpoint/2010/main" val="62882436"/>
       </p:ext>
     </p:extLst>
   </p:cSld>
@@ -29601,7 +29601,7 @@
           <p:cNvPr id="12" name="">
             <a:extLst xmlns:a="http://schemas.openxmlformats.org/drawingml/2006/main">
               <a:ext uri="{FF2B5EF4-FFF2-40B4-BE49-F238E27FC236}">
-                <a16:creationId xmlns:a16="http://schemas.microsoft.com/office/drawing/2014/main" id="{D6AD6615-6B8A-4959-B44E-6AFC7AAC450D}"/>
+                <a16:creationId xmlns:a16="http://schemas.microsoft.com/office/drawing/2014/main" id="{B2BF87B8-8571-48C0-9ACE-4DCED9FABBFE}"/>
               </a:ext>
             </a:extLst>
           </p:cNvPr>
@@ -29757,7 +29757,7 @@
           <p:cNvPr id="2" name="">
             <a:extLst xmlns:a="http://schemas.openxmlformats.org/drawingml/2006/main">
               <a:ext uri="{FF2B5EF4-FFF2-40B4-BE49-F238E27FC236}">
-                <a16:creationId xmlns:a16="http://schemas.microsoft.com/office/drawing/2014/main" id="{2E8629F6-DA42-4A92-85D9-8B7860AA1F41}"/>
+                <a16:creationId xmlns:a16="http://schemas.microsoft.com/office/drawing/2014/main" id="{706C3F98-32DF-4408-8531-DFD0E8E312CD}"/>
               </a:ext>
             </a:extLst>
           </p:cNvPr>
@@ -29787,7 +29787,7 @@
           <p:cNvPr id="3" name="">
             <a:extLst xmlns:a="http://schemas.openxmlformats.org/drawingml/2006/main">
               <a:ext uri="{FF2B5EF4-FFF2-40B4-BE49-F238E27FC236}">
-                <a16:creationId xmlns:a16="http://schemas.microsoft.com/office/drawing/2014/main" id="{E54E10DF-DECB-4E93-8BF1-DF08D9E6EC39}"/>
+                <a16:creationId xmlns:a16="http://schemas.microsoft.com/office/drawing/2014/main" id="{E3E78897-F6B0-49C2-A412-F0525E36878A}"/>
               </a:ext>
             </a:extLst>
           </p:cNvPr>
@@ -29943,7 +29943,7 @@
           <p:cNvPr id="4" name="">
             <a:extLst xmlns:a="http://schemas.openxmlformats.org/drawingml/2006/main">
               <a:ext uri="{FF2B5EF4-FFF2-40B4-BE49-F238E27FC236}">
-                <a16:creationId xmlns:a16="http://schemas.microsoft.com/office/drawing/2014/main" id="{66C870BD-C589-4B0C-A03A-75ABB019CCBD}"/>
+                <a16:creationId xmlns:a16="http://schemas.microsoft.com/office/drawing/2014/main" id="{49F4ED53-72EA-4B0A-8C43-4E9B2A801B6F}"/>
               </a:ext>
             </a:extLst>
           </p:cNvPr>
@@ -30089,7 +30089,7 @@
                 <a:ea typeface="Arial"/>
                 <a:cs typeface="Arial"/>
               </a:rPr>
-              <a:t>Finance is measured from its feature snapshot before merge</a:t>
+              <a:t>Keep provisional finance cases outside the shared CSV</a:t>
             </a:r>
           </a:p>
         </p:txBody>
@@ -30099,7 +30099,7 @@
           <p:cNvPr id="5" name="">
             <a:extLst xmlns:a="http://schemas.openxmlformats.org/drawingml/2006/main">
               <a:ext uri="{FF2B5EF4-FFF2-40B4-BE49-F238E27FC236}">
-                <a16:creationId xmlns:a16="http://schemas.microsoft.com/office/drawing/2014/main" id="{29FB3347-55AC-44B4-B0FD-DA99DFE827CF}"/>
+                <a16:creationId xmlns:a16="http://schemas.microsoft.com/office/drawing/2014/main" id="{2F2BB37F-D889-4F61-B5B2-FE5974032925}"/>
               </a:ext>
             </a:extLst>
           </p:cNvPr>
@@ -30255,7 +30255,7 @@
           <p:cNvPr id="6" name="">
             <a:extLst xmlns:a="http://schemas.openxmlformats.org/drawingml/2006/main">
               <a:ext uri="{FF2B5EF4-FFF2-40B4-BE49-F238E27FC236}">
-                <a16:creationId xmlns:a16="http://schemas.microsoft.com/office/drawing/2014/main" id="{DA03150A-C99D-48C4-BC59-A5D5452D7BAB}"/>
+                <a16:creationId xmlns:a16="http://schemas.microsoft.com/office/drawing/2014/main" id="{760686D3-00E0-4C41-906F-654AE9614999}"/>
               </a:ext>
             </a:extLst>
           </p:cNvPr>
@@ -30401,7 +30401,7 @@
                 <a:ea typeface="Arial"/>
                 <a:cs typeface="Arial"/>
               </a:rPr>
-              <a:t>One run does not prove general speed or accuracy</a:t>
+              <a:t>Rebase and merge finance onto the common main data</a:t>
             </a:r>
           </a:p>
         </p:txBody>
@@ -30411,7 +30411,7 @@
           <p:cNvPr id="7" name="">
             <a:extLst xmlns:a="http://schemas.openxmlformats.org/drawingml/2006/main">
               <a:ext uri="{FF2B5EF4-FFF2-40B4-BE49-F238E27FC236}">
-                <a16:creationId xmlns:a16="http://schemas.microsoft.com/office/drawing/2014/main" id="{C33AD931-146E-4A5F-AAE8-1715ABFE7134}"/>
+                <a16:creationId xmlns:a16="http://schemas.microsoft.com/office/drawing/2014/main" id="{2DC1119D-62FF-4599-BC3A-02A012E5FC99}"/>
               </a:ext>
             </a:extLst>
           </p:cNvPr>
@@ -30567,7 +30567,7 @@
           <p:cNvPr id="8" name="">
             <a:extLst xmlns:a="http://schemas.openxmlformats.org/drawingml/2006/main">
               <a:ext uri="{FF2B5EF4-FFF2-40B4-BE49-F238E27FC236}">
-                <a16:creationId xmlns:a16="http://schemas.microsoft.com/office/drawing/2014/main" id="{B3F9E1B8-0A6F-439C-A43A-162FF9D01985}"/>
+                <a16:creationId xmlns:a16="http://schemas.microsoft.com/office/drawing/2014/main" id="{401BBA23-894F-4187-B320-214EABC01229}"/>
               </a:ext>
             </a:extLst>
           </p:cNvPr>
@@ -30713,7 +30713,7 @@
                 <a:ea typeface="Arial"/>
                 <a:cs typeface="Arial"/>
               </a:rPr>
-              <a:t>Check complete reasons in advising answers</a:t>
+              <a:t>Recompute finance Excel expectations from shared inputs</a:t>
             </a:r>
           </a:p>
         </p:txBody>
@@ -30723,7 +30723,7 @@
           <p:cNvPr id="9" name="">
             <a:extLst xmlns:a="http://schemas.openxmlformats.org/drawingml/2006/main">
               <a:ext uri="{FF2B5EF4-FFF2-40B4-BE49-F238E27FC236}">
-                <a16:creationId xmlns:a16="http://schemas.microsoft.com/office/drawing/2014/main" id="{085EDD97-85F7-40A4-928E-8A2FAC0462EA}"/>
+                <a16:creationId xmlns:a16="http://schemas.microsoft.com/office/drawing/2014/main" id="{8CB814A8-9E36-4C11-A64F-CD9F9C0B2B17}"/>
               </a:ext>
             </a:extLst>
           </p:cNvPr>
@@ -30879,7 +30879,7 @@
           <p:cNvPr id="10" name="">
             <a:extLst xmlns:a="http://schemas.openxmlformats.org/drawingml/2006/main">
               <a:ext uri="{FF2B5EF4-FFF2-40B4-BE49-F238E27FC236}">
-                <a16:creationId xmlns:a16="http://schemas.microsoft.com/office/drawing/2014/main" id="{0E9C6510-271B-4456-BF97-A75DD647D93E}"/>
+                <a16:creationId xmlns:a16="http://schemas.microsoft.com/office/drawing/2014/main" id="{0F6EE04A-4BD2-43D0-BC8F-9FF82133B92E}"/>
               </a:ext>
             </a:extLst>
           </p:cNvPr>
@@ -31025,7 +31025,7 @@
                 <a:ea typeface="Arial"/>
                 <a:cs typeface="Arial"/>
               </a:rPr>
-              <a:t>Repeat the full set after the final feature merge</a:t>
+              <a:t>Then restore and rerun the finance cases</a:t>
             </a:r>
           </a:p>
         </p:txBody>
@@ -31035,7 +31035,7 @@
           <p:cNvPr id="11" name="">
             <a:extLst xmlns:a="http://schemas.openxmlformats.org/drawingml/2006/main">
               <a:ext uri="{FF2B5EF4-FFF2-40B4-BE49-F238E27FC236}">
-                <a16:creationId xmlns:a16="http://schemas.microsoft.com/office/drawing/2014/main" id="{BBD80BC4-9D02-4C49-A424-EC4C15594167}"/>
+                <a16:creationId xmlns:a16="http://schemas.microsoft.com/office/drawing/2014/main" id="{29B40A34-CB4D-479A-BB7B-6EDE8BA03569}"/>
               </a:ext>
             </a:extLst>
           </p:cNvPr>
@@ -31189,7 +31189,7 @@
     </p:spTree>
     <p:extLst>
       <p:ext uri="{BB962C8B-B14F-4D97-AF65-F5344CB8AC3E}">
-        <p14:creationId xmlns:p14="http://schemas.microsoft.com/office/powerpoint/2010/main" val="1600970965"/>
+        <p14:creationId xmlns:p14="http://schemas.microsoft.com/office/powerpoint/2010/main" val="2076468221"/>
       </p:ext>
     </p:extLst>
   </p:cSld>
@@ -31220,7 +31220,7 @@
           <p:cNvPr id="16" name="">
             <a:extLst xmlns:a="http://schemas.openxmlformats.org/drawingml/2006/main">
               <a:ext uri="{FF2B5EF4-FFF2-40B4-BE49-F238E27FC236}">
-                <a16:creationId xmlns:a16="http://schemas.microsoft.com/office/drawing/2014/main" id="{8F4D625F-8F1D-49C2-808F-3CEA8AA76984}"/>
+                <a16:creationId xmlns:a16="http://schemas.microsoft.com/office/drawing/2014/main" id="{0F030FF6-DB3D-482D-A0A7-A09F54EC199D}"/>
               </a:ext>
             </a:extLst>
           </p:cNvPr>
@@ -31376,7 +31376,7 @@
           <p:cNvPr id="2" name="">
             <a:extLst xmlns:a="http://schemas.openxmlformats.org/drawingml/2006/main">
               <a:ext uri="{FF2B5EF4-FFF2-40B4-BE49-F238E27FC236}">
-                <a16:creationId xmlns:a16="http://schemas.microsoft.com/office/drawing/2014/main" id="{D4349564-E423-4C5E-99AD-92557F720560}"/>
+                <a16:creationId xmlns:a16="http://schemas.microsoft.com/office/drawing/2014/main" id="{BDF1A525-735D-42B5-9119-5785D7F19E47}"/>
               </a:ext>
             </a:extLst>
           </p:cNvPr>
@@ -31406,7 +31406,7 @@
           <p:cNvPr id="3" name="">
             <a:extLst xmlns:a="http://schemas.openxmlformats.org/drawingml/2006/main">
               <a:ext uri="{FF2B5EF4-FFF2-40B4-BE49-F238E27FC236}">
-                <a16:creationId xmlns:a16="http://schemas.microsoft.com/office/drawing/2014/main" id="{DE275D96-02E8-4B71-AD01-D747B6AA1D9E}"/>
+                <a16:creationId xmlns:a16="http://schemas.microsoft.com/office/drawing/2014/main" id="{23C37F8C-0E53-44D6-85F2-524C4B08E698}"/>
               </a:ext>
             </a:extLst>
           </p:cNvPr>
@@ -31436,7 +31436,7 @@
           <p:cNvPr id="4" name="">
             <a:extLst xmlns:a="http://schemas.openxmlformats.org/drawingml/2006/main">
               <a:ext uri="{FF2B5EF4-FFF2-40B4-BE49-F238E27FC236}">
-                <a16:creationId xmlns:a16="http://schemas.microsoft.com/office/drawing/2014/main" id="{EC5A38BF-E0BD-480F-A855-CE7DE5ABAA82}"/>
+                <a16:creationId xmlns:a16="http://schemas.microsoft.com/office/drawing/2014/main" id="{75657E8B-8F85-4239-8D09-05FBC7789F7B}"/>
               </a:ext>
             </a:extLst>
           </p:cNvPr>
@@ -31592,7 +31592,7 @@
           <p:cNvPr id="5" name="">
             <a:extLst xmlns:a="http://schemas.openxmlformats.org/drawingml/2006/main">
               <a:ext uri="{FF2B5EF4-FFF2-40B4-BE49-F238E27FC236}">
-                <a16:creationId xmlns:a16="http://schemas.microsoft.com/office/drawing/2014/main" id="{B5B10459-5665-4FB1-A389-6B6CFB636697}"/>
+                <a16:creationId xmlns:a16="http://schemas.microsoft.com/office/drawing/2014/main" id="{34641AA6-EB2E-44F8-930E-EBDE950468BD}"/>
               </a:ext>
             </a:extLst>
           </p:cNvPr>
@@ -31622,7 +31622,7 @@
           <p:cNvPr id="6" name="">
             <a:extLst xmlns:a="http://schemas.openxmlformats.org/drawingml/2006/main">
               <a:ext uri="{FF2B5EF4-FFF2-40B4-BE49-F238E27FC236}">
-                <a16:creationId xmlns:a16="http://schemas.microsoft.com/office/drawing/2014/main" id="{56B33189-A054-4EFD-9D28-DC873D50CED3}"/>
+                <a16:creationId xmlns:a16="http://schemas.microsoft.com/office/drawing/2014/main" id="{FC1D8CD2-50F7-4C27-9C5F-EDBC57BAAC34}"/>
               </a:ext>
             </a:extLst>
           </p:cNvPr>
@@ -31778,7 +31778,7 @@
           <p:cNvPr id="7" name="">
             <a:extLst xmlns:a="http://schemas.openxmlformats.org/drawingml/2006/main">
               <a:ext uri="{FF2B5EF4-FFF2-40B4-BE49-F238E27FC236}">
-                <a16:creationId xmlns:a16="http://schemas.microsoft.com/office/drawing/2014/main" id="{FDACAFE0-C53A-4401-8985-99677372EC9F}"/>
+                <a16:creationId xmlns:a16="http://schemas.microsoft.com/office/drawing/2014/main" id="{C255EE83-634D-4734-ABD5-F742044501ED}"/>
               </a:ext>
             </a:extLst>
           </p:cNvPr>
@@ -31808,7 +31808,7 @@
           <p:cNvPr id="8" name="">
             <a:extLst xmlns:a="http://schemas.openxmlformats.org/drawingml/2006/main">
               <a:ext uri="{FF2B5EF4-FFF2-40B4-BE49-F238E27FC236}">
-                <a16:creationId xmlns:a16="http://schemas.microsoft.com/office/drawing/2014/main" id="{052BB19F-6EDA-4A50-A1E7-176606C4634B}"/>
+                <a16:creationId xmlns:a16="http://schemas.microsoft.com/office/drawing/2014/main" id="{814FCBA6-3E84-4F6D-94B3-418F5D627D8B}"/>
               </a:ext>
             </a:extLst>
           </p:cNvPr>
@@ -31964,7 +31964,7 @@
           <p:cNvPr id="9" name="">
             <a:extLst xmlns:a="http://schemas.openxmlformats.org/drawingml/2006/main">
               <a:ext uri="{FF2B5EF4-FFF2-40B4-BE49-F238E27FC236}">
-                <a16:creationId xmlns:a16="http://schemas.microsoft.com/office/drawing/2014/main" id="{1DA1CE11-E447-4B33-BEA3-1663043B3A99}"/>
+                <a16:creationId xmlns:a16="http://schemas.microsoft.com/office/drawing/2014/main" id="{2FF71906-28DF-4C7A-81CD-1783CBE9D35A}"/>
               </a:ext>
             </a:extLst>
           </p:cNvPr>
@@ -31994,7 +31994,7 @@
           <p:cNvPr id="10" name="">
             <a:extLst xmlns:a="http://schemas.openxmlformats.org/drawingml/2006/main">
               <a:ext uri="{FF2B5EF4-FFF2-40B4-BE49-F238E27FC236}">
-                <a16:creationId xmlns:a16="http://schemas.microsoft.com/office/drawing/2014/main" id="{8816EAB5-4EB8-46BB-8659-44BE2DBF3FC6}"/>
+                <a16:creationId xmlns:a16="http://schemas.microsoft.com/office/drawing/2014/main" id="{CD07211F-30F0-49D6-9DB7-435193F273BA}"/>
               </a:ext>
             </a:extLst>
           </p:cNvPr>
@@ -32150,7 +32150,7 @@
           <p:cNvPr id="11" name="">
             <a:extLst xmlns:a="http://schemas.openxmlformats.org/drawingml/2006/main">
               <a:ext uri="{FF2B5EF4-FFF2-40B4-BE49-F238E27FC236}">
-                <a16:creationId xmlns:a16="http://schemas.microsoft.com/office/drawing/2014/main" id="{5281D8BD-8EC0-4E07-8B08-EFE39C0980BB}"/>
+                <a16:creationId xmlns:a16="http://schemas.microsoft.com/office/drawing/2014/main" id="{5998B357-D1D2-488E-ABE0-84CDDF16E819}"/>
               </a:ext>
             </a:extLst>
           </p:cNvPr>
@@ -32306,7 +32306,7 @@
           <p:cNvPr id="12" name="">
             <a:extLst xmlns:a="http://schemas.openxmlformats.org/drawingml/2006/main">
               <a:ext uri="{FF2B5EF4-FFF2-40B4-BE49-F238E27FC236}">
-                <a16:creationId xmlns:a16="http://schemas.microsoft.com/office/drawing/2014/main" id="{40BA0B3B-7D49-4D8C-9507-30F8591B0924}"/>
+                <a16:creationId xmlns:a16="http://schemas.microsoft.com/office/drawing/2014/main" id="{6B2DC354-42BA-40D7-9878-07EFA1131F75}"/>
               </a:ext>
             </a:extLst>
           </p:cNvPr>
@@ -32462,7 +32462,7 @@
           <p:cNvPr id="13" name="">
             <a:extLst xmlns:a="http://schemas.openxmlformats.org/drawingml/2006/main">
               <a:ext uri="{FF2B5EF4-FFF2-40B4-BE49-F238E27FC236}">
-                <a16:creationId xmlns:a16="http://schemas.microsoft.com/office/drawing/2014/main" id="{D0442AE2-2FB4-47BA-9341-32C8FB2A29CA}"/>
+                <a16:creationId xmlns:a16="http://schemas.microsoft.com/office/drawing/2014/main" id="{FF44890D-CD36-4BA0-864F-42496A6A5E2D}"/>
               </a:ext>
             </a:extLst>
           </p:cNvPr>
@@ -32618,7 +32618,7 @@
           <p:cNvPr id="14" name="">
             <a:extLst xmlns:a="http://schemas.openxmlformats.org/drawingml/2006/main">
               <a:ext uri="{FF2B5EF4-FFF2-40B4-BE49-F238E27FC236}">
-                <a16:creationId xmlns:a16="http://schemas.microsoft.com/office/drawing/2014/main" id="{7F3494E7-D43B-4190-892B-9E5AE9DF7348}"/>
+                <a16:creationId xmlns:a16="http://schemas.microsoft.com/office/drawing/2014/main" id="{EF1419EE-5A87-4632-BE4E-64A651279A5A}"/>
               </a:ext>
             </a:extLst>
           </p:cNvPr>
@@ -32774,7 +32774,7 @@
           <p:cNvPr id="15" name="">
             <a:extLst xmlns:a="http://schemas.openxmlformats.org/drawingml/2006/main">
               <a:ext uri="{FF2B5EF4-FFF2-40B4-BE49-F238E27FC236}">
-                <a16:creationId xmlns:a16="http://schemas.microsoft.com/office/drawing/2014/main" id="{FE0C033A-776F-4720-9670-E398057BCD54}"/>
+                <a16:creationId xmlns:a16="http://schemas.microsoft.com/office/drawing/2014/main" id="{E7B6B56E-3458-47C1-8F65-5DC3067577B7}"/>
               </a:ext>
             </a:extLst>
           </p:cNvPr>
@@ -32928,7 +32928,7 @@
     </p:spTree>
     <p:extLst>
       <p:ext uri="{BB962C8B-B14F-4D97-AF65-F5344CB8AC3E}">
-        <p14:creationId xmlns:p14="http://schemas.microsoft.com/office/powerpoint/2010/main" val="1721732037"/>
+        <p14:creationId xmlns:p14="http://schemas.microsoft.com/office/powerpoint/2010/main" val="1489666602"/>
       </p:ext>
     </p:extLst>
   </p:cSld>
@@ -32959,7 +32959,7 @@
           <p:cNvPr id="12" name="">
             <a:extLst xmlns:a="http://schemas.openxmlformats.org/drawingml/2006/main">
               <a:ext uri="{FF2B5EF4-FFF2-40B4-BE49-F238E27FC236}">
-                <a16:creationId xmlns:a16="http://schemas.microsoft.com/office/drawing/2014/main" id="{7CB84DDF-9D6B-4C08-B7C5-5A93833A8CF7}"/>
+                <a16:creationId xmlns:a16="http://schemas.microsoft.com/office/drawing/2014/main" id="{A072F192-15C7-41BD-8DC2-E3666CC1B7E8}"/>
               </a:ext>
             </a:extLst>
           </p:cNvPr>
@@ -33115,7 +33115,7 @@
           <p:cNvPr id="2" name="">
             <a:extLst xmlns:a="http://schemas.openxmlformats.org/drawingml/2006/main">
               <a:ext uri="{FF2B5EF4-FFF2-40B4-BE49-F238E27FC236}">
-                <a16:creationId xmlns:a16="http://schemas.microsoft.com/office/drawing/2014/main" id="{8DE7AB28-4B06-41FF-B19B-D90912DA4117}"/>
+                <a16:creationId xmlns:a16="http://schemas.microsoft.com/office/drawing/2014/main" id="{18BF5401-DCB2-4EBB-B8D0-8252B3107CA9}"/>
               </a:ext>
             </a:extLst>
           </p:cNvPr>
@@ -33145,7 +33145,7 @@
           <p:cNvPr id="3" name="">
             <a:extLst xmlns:a="http://schemas.openxmlformats.org/drawingml/2006/main">
               <a:ext uri="{FF2B5EF4-FFF2-40B4-BE49-F238E27FC236}">
-                <a16:creationId xmlns:a16="http://schemas.microsoft.com/office/drawing/2014/main" id="{0EFF4D2D-B3B0-4EF5-BF25-BB3ACFBEC0D2}"/>
+                <a16:creationId xmlns:a16="http://schemas.microsoft.com/office/drawing/2014/main" id="{B20F816B-828D-489A-B6D1-C41B1C703FEF}"/>
               </a:ext>
             </a:extLst>
           </p:cNvPr>
@@ -33301,7 +33301,7 @@
           <p:cNvPr id="4" name="">
             <a:extLst xmlns:a="http://schemas.openxmlformats.org/drawingml/2006/main">
               <a:ext uri="{FF2B5EF4-FFF2-40B4-BE49-F238E27FC236}">
-                <a16:creationId xmlns:a16="http://schemas.microsoft.com/office/drawing/2014/main" id="{4AD6F9D1-9E8A-4B7D-B7EB-5C48F148A995}"/>
+                <a16:creationId xmlns:a16="http://schemas.microsoft.com/office/drawing/2014/main" id="{D035BC50-E729-4C5B-8966-D74D91F4426C}"/>
               </a:ext>
             </a:extLst>
           </p:cNvPr>
@@ -33457,7 +33457,7 @@
           <p:cNvPr id="5" name="">
             <a:extLst xmlns:a="http://schemas.openxmlformats.org/drawingml/2006/main">
               <a:ext uri="{FF2B5EF4-FFF2-40B4-BE49-F238E27FC236}">
-                <a16:creationId xmlns:a16="http://schemas.microsoft.com/office/drawing/2014/main" id="{C42E30FF-7062-4D6D-95FF-92B83E30921A}"/>
+                <a16:creationId xmlns:a16="http://schemas.microsoft.com/office/drawing/2014/main" id="{DF2971D2-0844-46AF-8D52-05FF57A215A7}"/>
               </a:ext>
             </a:extLst>
           </p:cNvPr>
@@ -33613,7 +33613,7 @@
           <p:cNvPr id="6" name="">
             <a:extLst xmlns:a="http://schemas.openxmlformats.org/drawingml/2006/main">
               <a:ext uri="{FF2B5EF4-FFF2-40B4-BE49-F238E27FC236}">
-                <a16:creationId xmlns:a16="http://schemas.microsoft.com/office/drawing/2014/main" id="{9694E75F-29F8-4A23-A7D1-C77D3AB87739}"/>
+                <a16:creationId xmlns:a16="http://schemas.microsoft.com/office/drawing/2014/main" id="{2792B5BA-CD57-42A1-9109-3B8AA1FBCE33}"/>
               </a:ext>
             </a:extLst>
           </p:cNvPr>
@@ -33759,7 +33759,7 @@
                 <a:ea typeface="Arial"/>
                 <a:cs typeface="Arial"/>
               </a:rPr>
-              <a:t>Compare the two attendance boundary cases</a:t>
+              <a:t>Compare K07 and K08 at the absence boundary</a:t>
             </a:r>
           </a:p>
         </p:txBody>
@@ -33769,7 +33769,7 @@
           <p:cNvPr id="7" name="">
             <a:extLst xmlns:a="http://schemas.openxmlformats.org/drawingml/2006/main">
               <a:ext uri="{FF2B5EF4-FFF2-40B4-BE49-F238E27FC236}">
-                <a16:creationId xmlns:a16="http://schemas.microsoft.com/office/drawing/2014/main" id="{B5334447-20C0-49E5-BC31-996299E7E3AC}"/>
+                <a16:creationId xmlns:a16="http://schemas.microsoft.com/office/drawing/2014/main" id="{1196B68A-2D1A-4273-8570-755107FDB05D}"/>
               </a:ext>
             </a:extLst>
           </p:cNvPr>
@@ -33925,7 +33925,7 @@
           <p:cNvPr id="8" name="">
             <a:extLst xmlns:a="http://schemas.openxmlformats.org/drawingml/2006/main">
               <a:ext uri="{FF2B5EF4-FFF2-40B4-BE49-F238E27FC236}">
-                <a16:creationId xmlns:a16="http://schemas.microsoft.com/office/drawing/2014/main" id="{F4D66AF2-8ECF-422D-B586-A1478B5AD751}"/>
+                <a16:creationId xmlns:a16="http://schemas.microsoft.com/office/drawing/2014/main" id="{13A24714-9A80-4247-BEE6-519DA7284F65}"/>
               </a:ext>
             </a:extLst>
           </p:cNvPr>
@@ -34071,7 +34071,7 @@
                 <a:ea typeface="Arial"/>
                 <a:cs typeface="Arial"/>
               </a:rPr>
-              <a:t>Check SCH02 eligibility and ranking</a:t>
+              <a:t>Ask for IT01 risk reasons using K12</a:t>
             </a:r>
           </a:p>
         </p:txBody>
@@ -34081,7 +34081,7 @@
           <p:cNvPr id="9" name="">
             <a:extLst xmlns:a="http://schemas.openxmlformats.org/drawingml/2006/main">
               <a:ext uri="{FF2B5EF4-FFF2-40B4-BE49-F238E27FC236}">
-                <a16:creationId xmlns:a16="http://schemas.microsoft.com/office/drawing/2014/main" id="{82FE3867-6881-4930-84F1-E4792F950858}"/>
+                <a16:creationId xmlns:a16="http://schemas.microsoft.com/office/drawing/2014/main" id="{3ABD6135-2B0F-47CF-9DBF-4C7458DEA756}"/>
               </a:ext>
             </a:extLst>
           </p:cNvPr>
@@ -34237,7 +34237,7 @@
           <p:cNvPr id="10" name="">
             <a:extLst xmlns:a="http://schemas.openxmlformats.org/drawingml/2006/main">
               <a:ext uri="{FF2B5EF4-FFF2-40B4-BE49-F238E27FC236}">
-                <a16:creationId xmlns:a16="http://schemas.microsoft.com/office/drawing/2014/main" id="{72268EA1-8F0B-4108-93C7-977C73B0ECD8}"/>
+                <a16:creationId xmlns:a16="http://schemas.microsoft.com/office/drawing/2014/main" id="{2F71B530-2CF4-48FF-BE8A-54CEEDA2D289}"/>
               </a:ext>
             </a:extLst>
           </p:cNvPr>
@@ -34383,7 +34383,7 @@
                 <a:ea typeface="Arial"/>
                 <a:cs typeface="Arial"/>
               </a:rPr>
-              <a:t>Open a log and show the tool call and result</a:t>
+              <a:t>Open a current log and show the tool result</a:t>
             </a:r>
           </a:p>
         </p:txBody>
@@ -34393,7 +34393,7 @@
           <p:cNvPr id="11" name="">
             <a:extLst xmlns:a="http://schemas.openxmlformats.org/drawingml/2006/main">
               <a:ext uri="{FF2B5EF4-FFF2-40B4-BE49-F238E27FC236}">
-                <a16:creationId xmlns:a16="http://schemas.microsoft.com/office/drawing/2014/main" id="{FD32D773-B5FB-4A8F-9D89-A4D63A49CAA7}"/>
+                <a16:creationId xmlns:a16="http://schemas.microsoft.com/office/drawing/2014/main" id="{297D4F05-7546-441E-B55A-4F1CC839CAE0}"/>
               </a:ext>
             </a:extLst>
           </p:cNvPr>
@@ -34547,7 +34547,7 @@
     </p:spTree>
     <p:extLst>
       <p:ext uri="{BB962C8B-B14F-4D97-AF65-F5344CB8AC3E}">
-        <p14:creationId xmlns:p14="http://schemas.microsoft.com/office/powerpoint/2010/main" val="1504687153"/>
+        <p14:creationId xmlns:p14="http://schemas.microsoft.com/office/powerpoint/2010/main" val="498661067"/>
       </p:ext>
     </p:extLst>
   </p:cSld>
@@ -34578,7 +34578,7 @@
           <p:cNvPr id="12" name="">
             <a:extLst xmlns:a="http://schemas.openxmlformats.org/drawingml/2006/main">
               <a:ext uri="{FF2B5EF4-FFF2-40B4-BE49-F238E27FC236}">
-                <a16:creationId xmlns:a16="http://schemas.microsoft.com/office/drawing/2014/main" id="{8357E307-9E29-4E3B-863B-2530FEE79639}"/>
+                <a16:creationId xmlns:a16="http://schemas.microsoft.com/office/drawing/2014/main" id="{7E644F60-845B-47D0-A2EC-1B7E15A7162F}"/>
               </a:ext>
             </a:extLst>
           </p:cNvPr>
@@ -34734,7 +34734,7 @@
           <p:cNvPr id="2" name="">
             <a:extLst xmlns:a="http://schemas.openxmlformats.org/drawingml/2006/main">
               <a:ext uri="{FF2B5EF4-FFF2-40B4-BE49-F238E27FC236}">
-                <a16:creationId xmlns:a16="http://schemas.microsoft.com/office/drawing/2014/main" id="{E2139B43-F59B-4773-9D36-45A43A21F39F}"/>
+                <a16:creationId xmlns:a16="http://schemas.microsoft.com/office/drawing/2014/main" id="{88ED7215-FF38-418B-A2EE-88BE23B92C6C}"/>
               </a:ext>
             </a:extLst>
           </p:cNvPr>
@@ -34764,7 +34764,7 @@
           <p:cNvPr id="3" name="">
             <a:extLst xmlns:a="http://schemas.openxmlformats.org/drawingml/2006/main">
               <a:ext uri="{FF2B5EF4-FFF2-40B4-BE49-F238E27FC236}">
-                <a16:creationId xmlns:a16="http://schemas.microsoft.com/office/drawing/2014/main" id="{9FF2E869-C48B-4441-A254-B55CC7314E4A}"/>
+                <a16:creationId xmlns:a16="http://schemas.microsoft.com/office/drawing/2014/main" id="{084517D3-32CE-4DB1-804A-E5127CB4161F}"/>
               </a:ext>
             </a:extLst>
           </p:cNvPr>
@@ -34920,7 +34920,7 @@
           <p:cNvPr id="4" name="">
             <a:extLst xmlns:a="http://schemas.openxmlformats.org/drawingml/2006/main">
               <a:ext uri="{FF2B5EF4-FFF2-40B4-BE49-F238E27FC236}">
-                <a16:creationId xmlns:a16="http://schemas.microsoft.com/office/drawing/2014/main" id="{7B6B55F1-2E59-46F4-9EB1-5A3B0FE27872}"/>
+                <a16:creationId xmlns:a16="http://schemas.microsoft.com/office/drawing/2014/main" id="{15294EA8-63C6-4686-8671-15BD1BDA4620}"/>
               </a:ext>
             </a:extLst>
           </p:cNvPr>
@@ -35076,7 +35076,7 @@
           <p:cNvPr id="5" name="">
             <a:extLst xmlns:a="http://schemas.openxmlformats.org/drawingml/2006/main">
               <a:ext uri="{FF2B5EF4-FFF2-40B4-BE49-F238E27FC236}">
-                <a16:creationId xmlns:a16="http://schemas.microsoft.com/office/drawing/2014/main" id="{9F435E7A-970A-4BDE-A005-73621C176CD2}"/>
+                <a16:creationId xmlns:a16="http://schemas.microsoft.com/office/drawing/2014/main" id="{544B1A22-A774-43F5-8461-F564C8BEEDD2}"/>
               </a:ext>
             </a:extLst>
           </p:cNvPr>
@@ -35232,7 +35232,7 @@
           <p:cNvPr id="6" name="">
             <a:extLst xmlns:a="http://schemas.openxmlformats.org/drawingml/2006/main">
               <a:ext uri="{FF2B5EF4-FFF2-40B4-BE49-F238E27FC236}">
-                <a16:creationId xmlns:a16="http://schemas.microsoft.com/office/drawing/2014/main" id="{CEF1AD35-88C7-4358-A237-8079B47D69B6}"/>
+                <a16:creationId xmlns:a16="http://schemas.microsoft.com/office/drawing/2014/main" id="{D4C7DFF8-1911-4888-8A71-33D6A84ED992}"/>
               </a:ext>
             </a:extLst>
           </p:cNvPr>
@@ -35388,7 +35388,7 @@
           <p:cNvPr id="7" name="">
             <a:extLst xmlns:a="http://schemas.openxmlformats.org/drawingml/2006/main">
               <a:ext uri="{FF2B5EF4-FFF2-40B4-BE49-F238E27FC236}">
-                <a16:creationId xmlns:a16="http://schemas.microsoft.com/office/drawing/2014/main" id="{DF19EC08-2E61-4DA2-ABE7-3BF2207CF192}"/>
+                <a16:creationId xmlns:a16="http://schemas.microsoft.com/office/drawing/2014/main" id="{E25F4874-65A1-4B42-BBBA-E02496546A0B}"/>
               </a:ext>
             </a:extLst>
           </p:cNvPr>
@@ -35544,7 +35544,7 @@
           <p:cNvPr id="8" name="">
             <a:extLst xmlns:a="http://schemas.openxmlformats.org/drawingml/2006/main">
               <a:ext uri="{FF2B5EF4-FFF2-40B4-BE49-F238E27FC236}">
-                <a16:creationId xmlns:a16="http://schemas.microsoft.com/office/drawing/2014/main" id="{10D50F1F-6B70-4E64-8491-1633B9BEB6B3}"/>
+                <a16:creationId xmlns:a16="http://schemas.microsoft.com/office/drawing/2014/main" id="{0CC6927C-51A6-4A78-AA7E-D473A7488314}"/>
               </a:ext>
             </a:extLst>
           </p:cNvPr>
@@ -35700,7 +35700,7 @@
           <p:cNvPr id="9" name="">
             <a:extLst xmlns:a="http://schemas.openxmlformats.org/drawingml/2006/main">
               <a:ext uri="{FF2B5EF4-FFF2-40B4-BE49-F238E27FC236}">
-                <a16:creationId xmlns:a16="http://schemas.microsoft.com/office/drawing/2014/main" id="{30B14D79-39B3-4A87-806E-47F98B16EDB8}"/>
+                <a16:creationId xmlns:a16="http://schemas.microsoft.com/office/drawing/2014/main" id="{9DACB27F-AEEF-46E4-B398-DBEB89D9E6EA}"/>
               </a:ext>
             </a:extLst>
           </p:cNvPr>
@@ -35856,7 +35856,7 @@
           <p:cNvPr id="10" name="">
             <a:extLst xmlns:a="http://schemas.openxmlformats.org/drawingml/2006/main">
               <a:ext uri="{FF2B5EF4-FFF2-40B4-BE49-F238E27FC236}">
-                <a16:creationId xmlns:a16="http://schemas.microsoft.com/office/drawing/2014/main" id="{8F1BF4F1-7263-4F0F-9F5A-529E5A3A41D9}"/>
+                <a16:creationId xmlns:a16="http://schemas.microsoft.com/office/drawing/2014/main" id="{7D1F96D1-8EDD-4557-8FDA-D75E25467C3E}"/>
               </a:ext>
             </a:extLst>
           </p:cNvPr>
@@ -36012,7 +36012,7 @@
           <p:cNvPr id="11" name="">
             <a:extLst xmlns:a="http://schemas.openxmlformats.org/drawingml/2006/main">
               <a:ext uri="{FF2B5EF4-FFF2-40B4-BE49-F238E27FC236}">
-                <a16:creationId xmlns:a16="http://schemas.microsoft.com/office/drawing/2014/main" id="{0BBE8030-4ACA-4553-9484-51CBD1E4C5D4}"/>
+                <a16:creationId xmlns:a16="http://schemas.microsoft.com/office/drawing/2014/main" id="{78D138A7-3C40-4E5C-B45A-85DD5829A35C}"/>
               </a:ext>
             </a:extLst>
           </p:cNvPr>
@@ -36166,7 +36166,7 @@
     </p:spTree>
     <p:extLst>
       <p:ext uri="{BB962C8B-B14F-4D97-AF65-F5344CB8AC3E}">
-        <p14:creationId xmlns:p14="http://schemas.microsoft.com/office/powerpoint/2010/main" val="1778472152"/>
+        <p14:creationId xmlns:p14="http://schemas.microsoft.com/office/powerpoint/2010/main" val="30600655"/>
       </p:ext>
     </p:extLst>
   </p:cSld>
@@ -36197,7 +36197,7 @@
           <p:cNvPr id="5" name="">
             <a:extLst xmlns:a="http://schemas.openxmlformats.org/drawingml/2006/main">
               <a:ext uri="{FF2B5EF4-FFF2-40B4-BE49-F238E27FC236}">
-                <a16:creationId xmlns:a16="http://schemas.microsoft.com/office/drawing/2014/main" id="{11179C6F-0E1D-45BD-8F34-F95D82922430}"/>
+                <a16:creationId xmlns:a16="http://schemas.microsoft.com/office/drawing/2014/main" id="{AC5DF52E-23F5-49B9-823D-A282B5B6B068}"/>
               </a:ext>
             </a:extLst>
           </p:cNvPr>
@@ -36343,7 +36343,7 @@
                 <a:ea typeface="Arial"/>
                 <a:cs typeface="Arial"/>
               </a:rPr>
-              <a:t>Three servers have separate jobs</a:t>
+              <a:t>Two active servers and a pending finance feature</a:t>
             </a:r>
           </a:p>
         </p:txBody>
@@ -36353,7 +36353,7 @@
           <p:cNvPr id="2" name="">
             <a:extLst xmlns:a="http://schemas.openxmlformats.org/drawingml/2006/main">
               <a:ext uri="{FF2B5EF4-FFF2-40B4-BE49-F238E27FC236}">
-                <a16:creationId xmlns:a16="http://schemas.microsoft.com/office/drawing/2014/main" id="{D7B9593B-6AA0-41A9-ABE7-9529186AF881}"/>
+                <a16:creationId xmlns:a16="http://schemas.microsoft.com/office/drawing/2014/main" id="{17A3E3DF-AE32-4A7B-9FBE-3708AD7F884A}"/>
               </a:ext>
             </a:extLst>
           </p:cNvPr>
@@ -36383,7 +36383,7 @@
           <p:cNvPr id="3" name="">
             <a:extLst xmlns:a="http://schemas.openxmlformats.org/drawingml/2006/main">
               <a:ext uri="{FF2B5EF4-FFF2-40B4-BE49-F238E27FC236}">
-                <a16:creationId xmlns:a16="http://schemas.microsoft.com/office/drawing/2014/main" id="{51A3A39F-AEB0-4CD5-B303-75B235886B8C}"/>
+                <a16:creationId xmlns:a16="http://schemas.microsoft.com/office/drawing/2014/main" id="{34938A55-356F-4FA0-9F3B-289051CF04DF}"/>
               </a:ext>
             </a:extLst>
           </p:cNvPr>
@@ -36399,9 +36399,8 @@
             <a:tbl>
               <a:tblPr/>
               <a:tblGrid>
-                <a:gridCol w="3556000"/>
-                <a:gridCol w="3556000"/>
-                <a:gridCol w="3556000"/>
+                <a:gridCol w="5334000"/>
+                <a:gridCol w="5334000"/>
               </a:tblGrid>
               <a:tr h="609600">
                 <a:tc>
@@ -36418,7 +36417,7 @@
                           <a:ea typeface="Arial"/>
                           <a:cs typeface="Arial"/>
                         </a:rPr>
-                        <a:t>Server</a:t>
+                        <a:t>Server and status</a:t>
                       </a:r>
                     </a:p>
                   </a:txBody>
@@ -36442,31 +36441,7 @@
                           <a:ea typeface="Arial"/>
                           <a:cs typeface="Arial"/>
                         </a:rPr>
-                        <a:t>Main job</a:t>
-                      </a:r>
-                    </a:p>
-                  </a:txBody>
-                  <a:tcPr marL="91440" marR="91440" marT="45720" marB="45720">
-                    <a:solidFill>
-                      <a:srgbClr val="12324A"/>
-                    </a:solidFill>
-                  </a:tcPr>
-                </a:tc>
-                <a:tc>
-                  <a:txBody>
-                    <a:bodyPr/>
-                    <a:lstStyle/>
-                    <a:p>
-                      <a:r>
-                        <a:rPr sz="1800" b="1">
-                          <a:solidFill>
-                            <a:srgbClr val="FFFFFF"/>
-                          </a:solidFill>
-                          <a:latin typeface="Arial"/>
-                          <a:ea typeface="Arial"/>
-                          <a:cs typeface="Arial"/>
-                        </a:rPr>
-                        <a:t>Tool count in our run</a:t>
+                        <a:t>Tools</a:t>
                       </a:r>
                     </a:p>
                   </a:txBody>
@@ -36492,31 +36467,7 @@
                           <a:ea typeface="Arial"/>
                           <a:cs typeface="Arial"/>
                         </a:rPr>
-                        <a:t>academic</a:t>
-                      </a:r>
-                    </a:p>
-                  </a:txBody>
-                  <a:tcPr marL="91440" marR="91440" marT="45720" marB="45720">
-                    <a:solidFill>
-                      <a:srgbClr val="FFFFFF"/>
-                    </a:solidFill>
-                  </a:tcPr>
-                </a:tc>
-                <a:tc>
-                  <a:txBody>
-                    <a:bodyPr/>
-                    <a:lstStyle/>
-                    <a:p>
-                      <a:r>
-                        <a:rPr sz="1800" b="0">
-                          <a:solidFill>
-                            <a:srgbClr val="203747"/>
-                          </a:solidFill>
-                          <a:latin typeface="Arial"/>
-                          <a:ea typeface="Arial"/>
-                          <a:cs typeface="Arial"/>
-                        </a:rPr>
-                        <a:t>Students, grades, teachers and attendance</a:t>
+                        <a:t>Academic on main</a:t>
                       </a:r>
                     </a:p>
                   </a:txBody>
@@ -36566,31 +36517,7 @@
                           <a:ea typeface="Arial"/>
                           <a:cs typeface="Arial"/>
                         </a:rPr>
-                        <a:t>utility</a:t>
-                      </a:r>
-                    </a:p>
-                  </a:txBody>
-                  <a:tcPr marL="91440" marR="91440" marT="45720" marB="45720">
-                    <a:solidFill>
-                      <a:srgbClr val="EDF2F0"/>
-                    </a:solidFill>
-                  </a:tcPr>
-                </a:tc>
-                <a:tc>
-                  <a:txBody>
-                    <a:bodyPr/>
-                    <a:lstStyle/>
-                    <a:p>
-                      <a:r>
-                        <a:rPr sz="1800" b="0">
-                          <a:solidFill>
-                            <a:srgbClr val="203747"/>
-                          </a:solidFill>
-                          <a:latin typeface="Arial"/>
-                          <a:ea typeface="Arial"/>
-                          <a:cs typeface="Arial"/>
-                        </a:rPr>
-                        <a:t>Time, score conversion and reports</a:t>
+                        <a:t>Utility on main</a:t>
                       </a:r>
                     </a:p>
                   </a:txBody>
@@ -36640,31 +36567,7 @@
                           <a:ea typeface="Arial"/>
                           <a:cs typeface="Arial"/>
                         </a:rPr>
-                        <a:t>finance</a:t>
-                      </a:r>
-                    </a:p>
-                  </a:txBody>
-                  <a:tcPr marL="91440" marR="91440" marT="45720" marB="45720">
-                    <a:solidFill>
-                      <a:srgbClr val="FFFFFF"/>
-                    </a:solidFill>
-                  </a:tcPr>
-                </a:tc>
-                <a:tc>
-                  <a:txBody>
-                    <a:bodyPr/>
-                    <a:lstStyle/>
-                    <a:p>
-                      <a:r>
-                        <a:rPr sz="1800" b="0">
-                          <a:solidFill>
-                            <a:srgbClr val="203747"/>
-                          </a:solidFill>
-                          <a:latin typeface="Arial"/>
-                          <a:ea typeface="Arial"/>
-                          <a:cs typeface="Arial"/>
-                        </a:rPr>
-                        <a:t>Tuition, scholarships and payroll</a:t>
+                        <a:t>Finance PR2, provisional</a:t>
                       </a:r>
                     </a:p>
                   </a:txBody>
@@ -36708,7 +36611,7 @@
           <p:cNvPr id="4" name="">
             <a:extLst xmlns:a="http://schemas.openxmlformats.org/drawingml/2006/main">
               <a:ext uri="{FF2B5EF4-FFF2-40B4-BE49-F238E27FC236}">
-                <a16:creationId xmlns:a16="http://schemas.microsoft.com/office/drawing/2014/main" id="{EF8404C1-92A2-4C18-96EA-87B393DFF9B6}"/>
+                <a16:creationId xmlns:a16="http://schemas.microsoft.com/office/drawing/2014/main" id="{9E1A1149-A0A2-41BE-BB19-81935CC2F902}"/>
               </a:ext>
             </a:extLst>
           </p:cNvPr>
@@ -36862,7 +36765,7 @@
     </p:spTree>
     <p:extLst>
       <p:ext uri="{BB962C8B-B14F-4D97-AF65-F5344CB8AC3E}">
-        <p14:creationId xmlns:p14="http://schemas.microsoft.com/office/powerpoint/2010/main" val="1952659549"/>
+        <p14:creationId xmlns:p14="http://schemas.microsoft.com/office/powerpoint/2010/main" val="1237075149"/>
       </p:ext>
     </p:extLst>
   </p:cSld>
@@ -36890,10 +36793,10 @@
       </p:grpSpPr>
       <p:sp>
         <p:nvSpPr>
-          <p:cNvPr id="5" name="">
+          <p:cNvPr id="12" name="">
             <a:extLst xmlns:a="http://schemas.openxmlformats.org/drawingml/2006/main">
               <a:ext uri="{FF2B5EF4-FFF2-40B4-BE49-F238E27FC236}">
-                <a16:creationId xmlns:a16="http://schemas.microsoft.com/office/drawing/2014/main" id="{2A60092F-CB8E-487D-991A-0D63F822067B}"/>
+                <a16:creationId xmlns:a16="http://schemas.microsoft.com/office/drawing/2014/main" id="{A3904838-E79B-40CF-9904-502E575A531E}"/>
               </a:ext>
             </a:extLst>
           </p:cNvPr>
@@ -37049,7 +36952,7 @@
           <p:cNvPr id="2" name="">
             <a:extLst xmlns:a="http://schemas.openxmlformats.org/drawingml/2006/main">
               <a:ext uri="{FF2B5EF4-FFF2-40B4-BE49-F238E27FC236}">
-                <a16:creationId xmlns:a16="http://schemas.microsoft.com/office/drawing/2014/main" id="{A3FCBCF8-F839-4906-BD40-A1C6BF318FA5}"/>
+                <a16:creationId xmlns:a16="http://schemas.microsoft.com/office/drawing/2014/main" id="{C5AB2B2C-0E66-437B-8162-875E182C0462}"/>
               </a:ext>
             </a:extLst>
           </p:cNvPr>
@@ -37074,290 +36977,1260 @@
           </a:ln>
         </p:spPr>
       </p:sp>
-      <p:graphicFrame>
-        <p:nvGraphicFramePr>
+      <p:sp>
+        <p:nvSpPr>
           <p:cNvPr id="3" name="">
             <a:extLst xmlns:a="http://schemas.openxmlformats.org/drawingml/2006/main">
               <a:ext uri="{FF2B5EF4-FFF2-40B4-BE49-F238E27FC236}">
-                <a16:creationId xmlns:a16="http://schemas.microsoft.com/office/drawing/2014/main" id="{EF322D45-E562-4711-9C06-EF574161B4B1}"/>
+                <a16:creationId xmlns:a16="http://schemas.microsoft.com/office/drawing/2014/main" id="{B1BCF775-0252-4F24-B483-9E5923048EA9}"/>
               </a:ext>
             </a:extLst>
           </p:cNvPr>
-          <p:cNvGraphicFramePr/>
+          <p:cNvSpPr>
+            <a:spLocks xmlns:a="http://schemas.openxmlformats.org/drawingml/2006/main" noGrp="1"/>
+          </p:cNvSpPr>
           <p:nvPr/>
-        </p:nvGraphicFramePr>
-        <p:xfrm>
-          <a:off xmlns:a="http://schemas.openxmlformats.org/drawingml/2006/main" x="762000" y="2000250"/>
-          <a:ext xmlns:a="http://schemas.openxmlformats.org/drawingml/2006/main" cx="10668000" cy="3048000"/>
-        </p:xfrm>
-        <a:graphic xmlns:a="http://schemas.openxmlformats.org/drawingml/2006/main">
-          <a:graphicData uri="http://schemas.openxmlformats.org/drawingml/2006/table">
-            <a:tbl>
-              <a:tblPr/>
-              <a:tblGrid>
-                <a:gridCol w="5334000"/>
-                <a:gridCol w="5334000"/>
-              </a:tblGrid>
-              <a:tr h="609600">
-                <a:tc>
-                  <a:txBody>
-                    <a:bodyPr/>
-                    <a:lstStyle/>
-                    <a:p>
-                      <a:r>
-                        <a:rPr sz="1800" b="1">
-                          <a:solidFill>
-                            <a:srgbClr val="FFFFFF"/>
-                          </a:solidFill>
-                          <a:latin typeface="Arial"/>
-                          <a:ea typeface="Arial"/>
-                          <a:cs typeface="Arial"/>
-                        </a:rPr>
-                        <a:t>Data group</a:t>
-                      </a:r>
-                    </a:p>
-                  </a:txBody>
-                  <a:tcPr marL="91440" marR="91440" marT="45720" marB="45720">
-                    <a:solidFill>
-                      <a:srgbClr val="12324A"/>
-                    </a:solidFill>
-                  </a:tcPr>
-                </a:tc>
-                <a:tc>
-                  <a:txBody>
-                    <a:bodyPr/>
-                    <a:lstStyle/>
-                    <a:p>
-                      <a:r>
-                        <a:rPr sz="1800" b="1">
-                          <a:solidFill>
-                            <a:srgbClr val="FFFFFF"/>
-                          </a:solidFill>
-                          <a:latin typeface="Arial"/>
-                          <a:ea typeface="Arial"/>
-                          <a:cs typeface="Arial"/>
-                        </a:rPr>
-                        <a:t>Records in the academic sample</a:t>
-                      </a:r>
-                    </a:p>
-                  </a:txBody>
-                  <a:tcPr marL="91440" marR="91440" marT="45720" marB="45720">
-                    <a:solidFill>
-                      <a:srgbClr val="12324A"/>
-                    </a:solidFill>
-                  </a:tcPr>
-                </a:tc>
-              </a:tr>
-              <a:tr h="609600">
-                <a:tc>
-                  <a:txBody>
-                    <a:bodyPr/>
-                    <a:lstStyle/>
-                    <a:p>
-                      <a:r>
-                        <a:rPr sz="1800" b="0">
-                          <a:solidFill>
-                            <a:srgbClr val="203747"/>
-                          </a:solidFill>
-                          <a:latin typeface="Arial"/>
-                          <a:ea typeface="Arial"/>
-                          <a:cs typeface="Arial"/>
-                        </a:rPr>
-                        <a:t>Students</a:t>
-                      </a:r>
-                    </a:p>
-                  </a:txBody>
-                  <a:tcPr marL="91440" marR="91440" marT="45720" marB="45720">
-                    <a:solidFill>
-                      <a:srgbClr val="FFFFFF"/>
-                    </a:solidFill>
-                  </a:tcPr>
-                </a:tc>
-                <a:tc>
-                  <a:txBody>
-                    <a:bodyPr/>
-                    <a:lstStyle/>
-                    <a:p>
-                      <a:r>
-                        <a:rPr sz="1800" b="0">
-                          <a:solidFill>
-                            <a:srgbClr val="203747"/>
-                          </a:solidFill>
-                          <a:latin typeface="Arial"/>
-                          <a:ea typeface="Arial"/>
-                          <a:cs typeface="Arial"/>
-                        </a:rPr>
-                        <a:t>40 valid students</a:t>
-                      </a:r>
-                    </a:p>
-                  </a:txBody>
-                  <a:tcPr marL="91440" marR="91440" marT="45720" marB="45720">
-                    <a:solidFill>
-                      <a:srgbClr val="FFFFFF"/>
-                    </a:solidFill>
-                  </a:tcPr>
-                </a:tc>
-              </a:tr>
-              <a:tr h="609600">
-                <a:tc>
-                  <a:txBody>
-                    <a:bodyPr/>
-                    <a:lstStyle/>
-                    <a:p>
-                      <a:r>
-                        <a:rPr sz="1800" b="0">
-                          <a:solidFill>
-                            <a:srgbClr val="203747"/>
-                          </a:solidFill>
-                          <a:latin typeface="Arial"/>
-                          <a:ea typeface="Arial"/>
-                          <a:cs typeface="Arial"/>
-                        </a:rPr>
-                        <a:t>Teachers and sections</a:t>
-                      </a:r>
-                    </a:p>
-                  </a:txBody>
-                  <a:tcPr marL="91440" marR="91440" marT="45720" marB="45720">
-                    <a:solidFill>
-                      <a:srgbClr val="EDF2F0"/>
-                    </a:solidFill>
-                  </a:tcPr>
-                </a:tc>
-                <a:tc>
-                  <a:txBody>
-                    <a:bodyPr/>
-                    <a:lstStyle/>
-                    <a:p>
-                      <a:r>
-                        <a:rPr sz="1800" b="0">
-                          <a:solidFill>
-                            <a:srgbClr val="203747"/>
-                          </a:solidFill>
-                          <a:latin typeface="Arial"/>
-                          <a:ea typeface="Arial"/>
-                          <a:cs typeface="Arial"/>
-                        </a:rPr>
-                        <a:t>20 teachers and 41 sections</a:t>
-                      </a:r>
-                    </a:p>
-                  </a:txBody>
-                  <a:tcPr marL="91440" marR="91440" marT="45720" marB="45720">
-                    <a:solidFill>
-                      <a:srgbClr val="EDF2F0"/>
-                    </a:solidFill>
-                  </a:tcPr>
-                </a:tc>
-              </a:tr>
-              <a:tr h="609600">
-                <a:tc>
-                  <a:txBody>
-                    <a:bodyPr/>
-                    <a:lstStyle/>
-                    <a:p>
-                      <a:r>
-                        <a:rPr sz="1800" b="0">
-                          <a:solidFill>
-                            <a:srgbClr val="203747"/>
-                          </a:solidFill>
-                          <a:latin typeface="Arial"/>
-                          <a:ea typeface="Arial"/>
-                          <a:cs typeface="Arial"/>
-                        </a:rPr>
-                        <a:t>Grades</a:t>
-                      </a:r>
-                    </a:p>
-                  </a:txBody>
-                  <a:tcPr marL="91440" marR="91440" marT="45720" marB="45720">
-                    <a:solidFill>
-                      <a:srgbClr val="FFFFFF"/>
-                    </a:solidFill>
-                  </a:tcPr>
-                </a:tc>
-                <a:tc>
-                  <a:txBody>
-                    <a:bodyPr/>
-                    <a:lstStyle/>
-                    <a:p>
-                      <a:r>
-                        <a:rPr sz="1800" b="0">
-                          <a:solidFill>
-                            <a:srgbClr val="203747"/>
-                          </a:solidFill>
-                          <a:latin typeface="Arial"/>
-                          <a:ea typeface="Arial"/>
-                          <a:cs typeface="Arial"/>
-                        </a:rPr>
-                        <a:t>261 valid grade rows</a:t>
-                      </a:r>
-                    </a:p>
-                  </a:txBody>
-                  <a:tcPr marL="91440" marR="91440" marT="45720" marB="45720">
-                    <a:solidFill>
-                      <a:srgbClr val="FFFFFF"/>
-                    </a:solidFill>
-                  </a:tcPr>
-                </a:tc>
-              </a:tr>
-              <a:tr h="609600">
-                <a:tc>
-                  <a:txBody>
-                    <a:bodyPr/>
-                    <a:lstStyle/>
-                    <a:p>
-                      <a:r>
-                        <a:rPr sz="1800" b="0">
-                          <a:solidFill>
-                            <a:srgbClr val="203747"/>
-                          </a:solidFill>
-                          <a:latin typeface="Arial"/>
-                          <a:ea typeface="Arial"/>
-                          <a:cs typeface="Arial"/>
-                        </a:rPr>
-                        <a:t>Attendance and conduct</a:t>
-                      </a:r>
-                    </a:p>
-                  </a:txBody>
-                  <a:tcPr marL="91440" marR="91440" marT="45720" marB="45720">
-                    <a:solidFill>
-                      <a:srgbClr val="EDF2F0"/>
-                    </a:solidFill>
-                  </a:tcPr>
-                </a:tc>
-                <a:tc>
-                  <a:txBody>
-                    <a:bodyPr/>
-                    <a:lstStyle/>
-                    <a:p>
-                      <a:r>
-                        <a:rPr sz="1800" b="0">
-                          <a:solidFill>
-                            <a:srgbClr val="203747"/>
-                          </a:solidFill>
-                          <a:latin typeface="Arial"/>
-                          <a:ea typeface="Arial"/>
-                          <a:cs typeface="Arial"/>
-                        </a:rPr>
-                        <a:t>3915 attendance rows and 120 conduct rows</a:t>
-                      </a:r>
-                    </a:p>
-                  </a:txBody>
-                  <a:tcPr marL="91440" marR="91440" marT="45720" marB="45720">
-                    <a:solidFill>
-                      <a:srgbClr val="EDF2F0"/>
-                    </a:solidFill>
-                  </a:tcPr>
-                </a:tc>
-              </a:tr>
-            </a:tbl>
-          </a:graphicData>
-        </a:graphic>
-      </p:graphicFrame>
+        </p:nvSpPr>
+        <p:spPr>
+          <a:xfrm xmlns:a="http://schemas.openxmlformats.org/drawingml/2006/main">
+            <a:off x="762000" y="2047875"/>
+            <a:ext cx="609600" cy="428625"/>
+          </a:xfrm>
+          <a:prstGeom xmlns:a="http://schemas.openxmlformats.org/drawingml/2006/main" prst="rect">
+            <a:avLst/>
+          </a:prstGeom>
+          <a:noFill xmlns:a="http://schemas.openxmlformats.org/drawingml/2006/main"/>
+          <a:ln xmlns:a="http://schemas.openxmlformats.org/drawingml/2006/main" w="0">
+            <a:noFill/>
+          </a:ln>
+        </p:spPr>
+        <p:txBody>
+          <a:bodyPr xmlns:a="http://schemas.openxmlformats.org/drawingml/2006/main"/>
+          <a:lstStyle xmlns:a="http://schemas.openxmlformats.org/drawingml/2006/main">
+            <a:defPPr>
+              <a:defRPr sz="1800" b="1">
+                <a:solidFill>
+                  <a:srgbClr val="087F8C"/>
+                </a:solidFill>
+                <a:latin typeface="Arial"/>
+                <a:ea typeface="Arial"/>
+                <a:cs typeface="Arial"/>
+              </a:defRPr>
+            </a:defPPr>
+            <a:lvl1pPr>
+              <a:defRPr sz="1800" b="1">
+                <a:solidFill>
+                  <a:srgbClr val="087F8C"/>
+                </a:solidFill>
+                <a:latin typeface="Arial"/>
+                <a:ea typeface="Arial"/>
+                <a:cs typeface="Arial"/>
+              </a:defRPr>
+            </a:lvl1pPr>
+            <a:lvl2pPr>
+              <a:defRPr sz="1800" b="1">
+                <a:solidFill>
+                  <a:srgbClr val="087F8C"/>
+                </a:solidFill>
+                <a:latin typeface="Arial"/>
+                <a:ea typeface="Arial"/>
+                <a:cs typeface="Arial"/>
+              </a:defRPr>
+            </a:lvl2pPr>
+            <a:lvl3pPr>
+              <a:defRPr sz="1800" b="1">
+                <a:solidFill>
+                  <a:srgbClr val="087F8C"/>
+                </a:solidFill>
+                <a:latin typeface="Arial"/>
+                <a:ea typeface="Arial"/>
+                <a:cs typeface="Arial"/>
+              </a:defRPr>
+            </a:lvl3pPr>
+            <a:lvl4pPr>
+              <a:defRPr sz="1800" b="1">
+                <a:solidFill>
+                  <a:srgbClr val="087F8C"/>
+                </a:solidFill>
+                <a:latin typeface="Arial"/>
+                <a:ea typeface="Arial"/>
+                <a:cs typeface="Arial"/>
+              </a:defRPr>
+            </a:lvl4pPr>
+            <a:lvl5pPr>
+              <a:defRPr sz="1800" b="1">
+                <a:solidFill>
+                  <a:srgbClr val="087F8C"/>
+                </a:solidFill>
+                <a:latin typeface="Arial"/>
+                <a:ea typeface="Arial"/>
+                <a:cs typeface="Arial"/>
+              </a:defRPr>
+            </a:lvl5pPr>
+            <a:lvl6pPr>
+              <a:defRPr sz="1800" b="1">
+                <a:solidFill>
+                  <a:srgbClr val="087F8C"/>
+                </a:solidFill>
+                <a:latin typeface="Arial"/>
+                <a:ea typeface="Arial"/>
+                <a:cs typeface="Arial"/>
+              </a:defRPr>
+            </a:lvl6pPr>
+            <a:lvl7pPr>
+              <a:defRPr sz="1800" b="1">
+                <a:solidFill>
+                  <a:srgbClr val="087F8C"/>
+                </a:solidFill>
+                <a:latin typeface="Arial"/>
+                <a:ea typeface="Arial"/>
+                <a:cs typeface="Arial"/>
+              </a:defRPr>
+            </a:lvl7pPr>
+            <a:lvl8pPr>
+              <a:defRPr sz="1800" b="1">
+                <a:solidFill>
+                  <a:srgbClr val="087F8C"/>
+                </a:solidFill>
+                <a:latin typeface="Arial"/>
+                <a:ea typeface="Arial"/>
+                <a:cs typeface="Arial"/>
+              </a:defRPr>
+            </a:lvl8pPr>
+            <a:lvl9pPr>
+              <a:defRPr sz="1800" b="1">
+                <a:solidFill>
+                  <a:srgbClr val="087F8C"/>
+                </a:solidFill>
+                <a:latin typeface="Arial"/>
+                <a:ea typeface="Arial"/>
+                <a:cs typeface="Arial"/>
+              </a:defRPr>
+            </a:lvl9pPr>
+          </a:lstStyle>
+          <a:p xmlns:a="http://schemas.openxmlformats.org/drawingml/2006/main">
+            <a:pPr>
+              <a:defRPr sz="1800" b="1">
+                <a:solidFill>
+                  <a:srgbClr val="087F8C"/>
+                </a:solidFill>
+                <a:latin typeface="Arial"/>
+                <a:ea typeface="Arial"/>
+                <a:cs typeface="Arial"/>
+              </a:defRPr>
+            </a:pPr>
+            <a:r>
+              <a:rPr sz="1800" b="1">
+                <a:solidFill>
+                  <a:srgbClr val="087F8C"/>
+                </a:solidFill>
+                <a:latin typeface="Arial"/>
+                <a:ea typeface="Arial"/>
+                <a:cs typeface="Arial"/>
+              </a:rPr>
+              <a:t>01</a:t>
+            </a:r>
+          </a:p>
+        </p:txBody>
+      </p:sp>
       <p:sp>
         <p:nvSpPr>
           <p:cNvPr id="4" name="">
             <a:extLst xmlns:a="http://schemas.openxmlformats.org/drawingml/2006/main">
               <a:ext uri="{FF2B5EF4-FFF2-40B4-BE49-F238E27FC236}">
-                <a16:creationId xmlns:a16="http://schemas.microsoft.com/office/drawing/2014/main" id="{73CD06AB-073A-4F7B-9AB0-E1B9481DD972}"/>
+                <a16:creationId xmlns:a16="http://schemas.microsoft.com/office/drawing/2014/main" id="{545B2249-9D82-478C-8736-EE7CDB1EECA6}"/>
+              </a:ext>
+            </a:extLst>
+          </p:cNvPr>
+          <p:cNvSpPr>
+            <a:spLocks xmlns:a="http://schemas.openxmlformats.org/drawingml/2006/main" noGrp="1"/>
+          </p:cNvSpPr>
+          <p:nvPr/>
+        </p:nvSpPr>
+        <p:spPr>
+          <a:xfrm xmlns:a="http://schemas.openxmlformats.org/drawingml/2006/main">
+            <a:off x="1619250" y="2000250"/>
+            <a:ext cx="9715500" cy="742950"/>
+          </a:xfrm>
+          <a:prstGeom xmlns:a="http://schemas.openxmlformats.org/drawingml/2006/main" prst="rect">
+            <a:avLst/>
+          </a:prstGeom>
+          <a:noFill xmlns:a="http://schemas.openxmlformats.org/drawingml/2006/main"/>
+          <a:ln xmlns:a="http://schemas.openxmlformats.org/drawingml/2006/main" w="0">
+            <a:noFill/>
+          </a:ln>
+        </p:spPr>
+        <p:txBody>
+          <a:bodyPr xmlns:a="http://schemas.openxmlformats.org/drawingml/2006/main"/>
+          <a:lstStyle xmlns:a="http://schemas.openxmlformats.org/drawingml/2006/main">
+            <a:defPPr>
+              <a:defRPr sz="2250" b="0">
+                <a:solidFill>
+                  <a:srgbClr val="203747"/>
+                </a:solidFill>
+                <a:latin typeface="Arial"/>
+                <a:ea typeface="Arial"/>
+                <a:cs typeface="Arial"/>
+              </a:defRPr>
+            </a:defPPr>
+            <a:lvl1pPr>
+              <a:defRPr sz="2250" b="0">
+                <a:solidFill>
+                  <a:srgbClr val="203747"/>
+                </a:solidFill>
+                <a:latin typeface="Arial"/>
+                <a:ea typeface="Arial"/>
+                <a:cs typeface="Arial"/>
+              </a:defRPr>
+            </a:lvl1pPr>
+            <a:lvl2pPr>
+              <a:defRPr sz="2250" b="0">
+                <a:solidFill>
+                  <a:srgbClr val="203747"/>
+                </a:solidFill>
+                <a:latin typeface="Arial"/>
+                <a:ea typeface="Arial"/>
+                <a:cs typeface="Arial"/>
+              </a:defRPr>
+            </a:lvl2pPr>
+            <a:lvl3pPr>
+              <a:defRPr sz="2250" b="0">
+                <a:solidFill>
+                  <a:srgbClr val="203747"/>
+                </a:solidFill>
+                <a:latin typeface="Arial"/>
+                <a:ea typeface="Arial"/>
+                <a:cs typeface="Arial"/>
+              </a:defRPr>
+            </a:lvl3pPr>
+            <a:lvl4pPr>
+              <a:defRPr sz="2250" b="0">
+                <a:solidFill>
+                  <a:srgbClr val="203747"/>
+                </a:solidFill>
+                <a:latin typeface="Arial"/>
+                <a:ea typeface="Arial"/>
+                <a:cs typeface="Arial"/>
+              </a:defRPr>
+            </a:lvl4pPr>
+            <a:lvl5pPr>
+              <a:defRPr sz="2250" b="0">
+                <a:solidFill>
+                  <a:srgbClr val="203747"/>
+                </a:solidFill>
+                <a:latin typeface="Arial"/>
+                <a:ea typeface="Arial"/>
+                <a:cs typeface="Arial"/>
+              </a:defRPr>
+            </a:lvl5pPr>
+            <a:lvl6pPr>
+              <a:defRPr sz="2250" b="0">
+                <a:solidFill>
+                  <a:srgbClr val="203747"/>
+                </a:solidFill>
+                <a:latin typeface="Arial"/>
+                <a:ea typeface="Arial"/>
+                <a:cs typeface="Arial"/>
+              </a:defRPr>
+            </a:lvl6pPr>
+            <a:lvl7pPr>
+              <a:defRPr sz="2250" b="0">
+                <a:solidFill>
+                  <a:srgbClr val="203747"/>
+                </a:solidFill>
+                <a:latin typeface="Arial"/>
+                <a:ea typeface="Arial"/>
+                <a:cs typeface="Arial"/>
+              </a:defRPr>
+            </a:lvl7pPr>
+            <a:lvl8pPr>
+              <a:defRPr sz="2250" b="0">
+                <a:solidFill>
+                  <a:srgbClr val="203747"/>
+                </a:solidFill>
+                <a:latin typeface="Arial"/>
+                <a:ea typeface="Arial"/>
+                <a:cs typeface="Arial"/>
+              </a:defRPr>
+            </a:lvl8pPr>
+            <a:lvl9pPr>
+              <a:defRPr sz="2250" b="0">
+                <a:solidFill>
+                  <a:srgbClr val="203747"/>
+                </a:solidFill>
+                <a:latin typeface="Arial"/>
+                <a:ea typeface="Arial"/>
+                <a:cs typeface="Arial"/>
+              </a:defRPr>
+            </a:lvl9pPr>
+          </a:lstStyle>
+          <a:p xmlns:a="http://schemas.openxmlformats.org/drawingml/2006/main">
+            <a:pPr>
+              <a:defRPr sz="2250" b="0">
+                <a:solidFill>
+                  <a:srgbClr val="203747"/>
+                </a:solidFill>
+                <a:latin typeface="Arial"/>
+                <a:ea typeface="Arial"/>
+                <a:cs typeface="Arial"/>
+              </a:defRPr>
+            </a:pPr>
+            <a:r>
+              <a:rPr sz="2250" b="0">
+                <a:solidFill>
+                  <a:srgbClr val="203747"/>
+                </a:solidFill>
+                <a:latin typeface="Arial"/>
+                <a:ea typeface="Arial"/>
+                <a:cs typeface="Arial"/>
+              </a:rPr>
+              <a:t>Main: 40 valid students, 20 teachers and 41 sections</a:t>
+            </a:r>
+          </a:p>
+        </p:txBody>
+      </p:sp>
+      <p:sp>
+        <p:nvSpPr>
+          <p:cNvPr id="5" name="">
+            <a:extLst xmlns:a="http://schemas.openxmlformats.org/drawingml/2006/main">
+              <a:ext uri="{FF2B5EF4-FFF2-40B4-BE49-F238E27FC236}">
+                <a16:creationId xmlns:a16="http://schemas.microsoft.com/office/drawing/2014/main" id="{787DFEB9-7140-422F-86E2-D35923EA1872}"/>
+              </a:ext>
+            </a:extLst>
+          </p:cNvPr>
+          <p:cNvSpPr>
+            <a:spLocks xmlns:a="http://schemas.openxmlformats.org/drawingml/2006/main" noGrp="1"/>
+          </p:cNvSpPr>
+          <p:nvPr/>
+        </p:nvSpPr>
+        <p:spPr>
+          <a:xfrm xmlns:a="http://schemas.openxmlformats.org/drawingml/2006/main">
+            <a:off x="762000" y="3000375"/>
+            <a:ext cx="609600" cy="428625"/>
+          </a:xfrm>
+          <a:prstGeom xmlns:a="http://schemas.openxmlformats.org/drawingml/2006/main" prst="rect">
+            <a:avLst/>
+          </a:prstGeom>
+          <a:noFill xmlns:a="http://schemas.openxmlformats.org/drawingml/2006/main"/>
+          <a:ln xmlns:a="http://schemas.openxmlformats.org/drawingml/2006/main" w="0">
+            <a:noFill/>
+          </a:ln>
+        </p:spPr>
+        <p:txBody>
+          <a:bodyPr xmlns:a="http://schemas.openxmlformats.org/drawingml/2006/main"/>
+          <a:lstStyle xmlns:a="http://schemas.openxmlformats.org/drawingml/2006/main">
+            <a:defPPr>
+              <a:defRPr sz="1800" b="1">
+                <a:solidFill>
+                  <a:srgbClr val="087F8C"/>
+                </a:solidFill>
+                <a:latin typeface="Arial"/>
+                <a:ea typeface="Arial"/>
+                <a:cs typeface="Arial"/>
+              </a:defRPr>
+            </a:defPPr>
+            <a:lvl1pPr>
+              <a:defRPr sz="1800" b="1">
+                <a:solidFill>
+                  <a:srgbClr val="087F8C"/>
+                </a:solidFill>
+                <a:latin typeface="Arial"/>
+                <a:ea typeface="Arial"/>
+                <a:cs typeface="Arial"/>
+              </a:defRPr>
+            </a:lvl1pPr>
+            <a:lvl2pPr>
+              <a:defRPr sz="1800" b="1">
+                <a:solidFill>
+                  <a:srgbClr val="087F8C"/>
+                </a:solidFill>
+                <a:latin typeface="Arial"/>
+                <a:ea typeface="Arial"/>
+                <a:cs typeface="Arial"/>
+              </a:defRPr>
+            </a:lvl2pPr>
+            <a:lvl3pPr>
+              <a:defRPr sz="1800" b="1">
+                <a:solidFill>
+                  <a:srgbClr val="087F8C"/>
+                </a:solidFill>
+                <a:latin typeface="Arial"/>
+                <a:ea typeface="Arial"/>
+                <a:cs typeface="Arial"/>
+              </a:defRPr>
+            </a:lvl3pPr>
+            <a:lvl4pPr>
+              <a:defRPr sz="1800" b="1">
+                <a:solidFill>
+                  <a:srgbClr val="087F8C"/>
+                </a:solidFill>
+                <a:latin typeface="Arial"/>
+                <a:ea typeface="Arial"/>
+                <a:cs typeface="Arial"/>
+              </a:defRPr>
+            </a:lvl4pPr>
+            <a:lvl5pPr>
+              <a:defRPr sz="1800" b="1">
+                <a:solidFill>
+                  <a:srgbClr val="087F8C"/>
+                </a:solidFill>
+                <a:latin typeface="Arial"/>
+                <a:ea typeface="Arial"/>
+                <a:cs typeface="Arial"/>
+              </a:defRPr>
+            </a:lvl5pPr>
+            <a:lvl6pPr>
+              <a:defRPr sz="1800" b="1">
+                <a:solidFill>
+                  <a:srgbClr val="087F8C"/>
+                </a:solidFill>
+                <a:latin typeface="Arial"/>
+                <a:ea typeface="Arial"/>
+                <a:cs typeface="Arial"/>
+              </a:defRPr>
+            </a:lvl6pPr>
+            <a:lvl7pPr>
+              <a:defRPr sz="1800" b="1">
+                <a:solidFill>
+                  <a:srgbClr val="087F8C"/>
+                </a:solidFill>
+                <a:latin typeface="Arial"/>
+                <a:ea typeface="Arial"/>
+                <a:cs typeface="Arial"/>
+              </a:defRPr>
+            </a:lvl7pPr>
+            <a:lvl8pPr>
+              <a:defRPr sz="1800" b="1">
+                <a:solidFill>
+                  <a:srgbClr val="087F8C"/>
+                </a:solidFill>
+                <a:latin typeface="Arial"/>
+                <a:ea typeface="Arial"/>
+                <a:cs typeface="Arial"/>
+              </a:defRPr>
+            </a:lvl8pPr>
+            <a:lvl9pPr>
+              <a:defRPr sz="1800" b="1">
+                <a:solidFill>
+                  <a:srgbClr val="087F8C"/>
+                </a:solidFill>
+                <a:latin typeface="Arial"/>
+                <a:ea typeface="Arial"/>
+                <a:cs typeface="Arial"/>
+              </a:defRPr>
+            </a:lvl9pPr>
+          </a:lstStyle>
+          <a:p xmlns:a="http://schemas.openxmlformats.org/drawingml/2006/main">
+            <a:pPr>
+              <a:defRPr sz="1800" b="1">
+                <a:solidFill>
+                  <a:srgbClr val="087F8C"/>
+                </a:solidFill>
+                <a:latin typeface="Arial"/>
+                <a:ea typeface="Arial"/>
+                <a:cs typeface="Arial"/>
+              </a:defRPr>
+            </a:pPr>
+            <a:r>
+              <a:rPr sz="1800" b="1">
+                <a:solidFill>
+                  <a:srgbClr val="087F8C"/>
+                </a:solidFill>
+                <a:latin typeface="Arial"/>
+                <a:ea typeface="Arial"/>
+                <a:cs typeface="Arial"/>
+              </a:rPr>
+              <a:t>02</a:t>
+            </a:r>
+          </a:p>
+        </p:txBody>
+      </p:sp>
+      <p:sp>
+        <p:nvSpPr>
+          <p:cNvPr id="6" name="">
+            <a:extLst xmlns:a="http://schemas.openxmlformats.org/drawingml/2006/main">
+              <a:ext uri="{FF2B5EF4-FFF2-40B4-BE49-F238E27FC236}">
+                <a16:creationId xmlns:a16="http://schemas.microsoft.com/office/drawing/2014/main" id="{2FD5F801-E2E5-4CAD-8D71-CCBBE9145674}"/>
+              </a:ext>
+            </a:extLst>
+          </p:cNvPr>
+          <p:cNvSpPr>
+            <a:spLocks xmlns:a="http://schemas.openxmlformats.org/drawingml/2006/main" noGrp="1"/>
+          </p:cNvSpPr>
+          <p:nvPr/>
+        </p:nvSpPr>
+        <p:spPr>
+          <a:xfrm xmlns:a="http://schemas.openxmlformats.org/drawingml/2006/main">
+            <a:off x="1619250" y="2952750"/>
+            <a:ext cx="9715500" cy="742950"/>
+          </a:xfrm>
+          <a:prstGeom xmlns:a="http://schemas.openxmlformats.org/drawingml/2006/main" prst="rect">
+            <a:avLst/>
+          </a:prstGeom>
+          <a:noFill xmlns:a="http://schemas.openxmlformats.org/drawingml/2006/main"/>
+          <a:ln xmlns:a="http://schemas.openxmlformats.org/drawingml/2006/main" w="0">
+            <a:noFill/>
+          </a:ln>
+        </p:spPr>
+        <p:txBody>
+          <a:bodyPr xmlns:a="http://schemas.openxmlformats.org/drawingml/2006/main"/>
+          <a:lstStyle xmlns:a="http://schemas.openxmlformats.org/drawingml/2006/main">
+            <a:defPPr>
+              <a:defRPr sz="2250" b="0">
+                <a:solidFill>
+                  <a:srgbClr val="203747"/>
+                </a:solidFill>
+                <a:latin typeface="Arial"/>
+                <a:ea typeface="Arial"/>
+                <a:cs typeface="Arial"/>
+              </a:defRPr>
+            </a:defPPr>
+            <a:lvl1pPr>
+              <a:defRPr sz="2250" b="0">
+                <a:solidFill>
+                  <a:srgbClr val="203747"/>
+                </a:solidFill>
+                <a:latin typeface="Arial"/>
+                <a:ea typeface="Arial"/>
+                <a:cs typeface="Arial"/>
+              </a:defRPr>
+            </a:lvl1pPr>
+            <a:lvl2pPr>
+              <a:defRPr sz="2250" b="0">
+                <a:solidFill>
+                  <a:srgbClr val="203747"/>
+                </a:solidFill>
+                <a:latin typeface="Arial"/>
+                <a:ea typeface="Arial"/>
+                <a:cs typeface="Arial"/>
+              </a:defRPr>
+            </a:lvl2pPr>
+            <a:lvl3pPr>
+              <a:defRPr sz="2250" b="0">
+                <a:solidFill>
+                  <a:srgbClr val="203747"/>
+                </a:solidFill>
+                <a:latin typeface="Arial"/>
+                <a:ea typeface="Arial"/>
+                <a:cs typeface="Arial"/>
+              </a:defRPr>
+            </a:lvl3pPr>
+            <a:lvl4pPr>
+              <a:defRPr sz="2250" b="0">
+                <a:solidFill>
+                  <a:srgbClr val="203747"/>
+                </a:solidFill>
+                <a:latin typeface="Arial"/>
+                <a:ea typeface="Arial"/>
+                <a:cs typeface="Arial"/>
+              </a:defRPr>
+            </a:lvl4pPr>
+            <a:lvl5pPr>
+              <a:defRPr sz="2250" b="0">
+                <a:solidFill>
+                  <a:srgbClr val="203747"/>
+                </a:solidFill>
+                <a:latin typeface="Arial"/>
+                <a:ea typeface="Arial"/>
+                <a:cs typeface="Arial"/>
+              </a:defRPr>
+            </a:lvl5pPr>
+            <a:lvl6pPr>
+              <a:defRPr sz="2250" b="0">
+                <a:solidFill>
+                  <a:srgbClr val="203747"/>
+                </a:solidFill>
+                <a:latin typeface="Arial"/>
+                <a:ea typeface="Arial"/>
+                <a:cs typeface="Arial"/>
+              </a:defRPr>
+            </a:lvl6pPr>
+            <a:lvl7pPr>
+              <a:defRPr sz="2250" b="0">
+                <a:solidFill>
+                  <a:srgbClr val="203747"/>
+                </a:solidFill>
+                <a:latin typeface="Arial"/>
+                <a:ea typeface="Arial"/>
+                <a:cs typeface="Arial"/>
+              </a:defRPr>
+            </a:lvl7pPr>
+            <a:lvl8pPr>
+              <a:defRPr sz="2250" b="0">
+                <a:solidFill>
+                  <a:srgbClr val="203747"/>
+                </a:solidFill>
+                <a:latin typeface="Arial"/>
+                <a:ea typeface="Arial"/>
+                <a:cs typeface="Arial"/>
+              </a:defRPr>
+            </a:lvl8pPr>
+            <a:lvl9pPr>
+              <a:defRPr sz="2250" b="0">
+                <a:solidFill>
+                  <a:srgbClr val="203747"/>
+                </a:solidFill>
+                <a:latin typeface="Arial"/>
+                <a:ea typeface="Arial"/>
+                <a:cs typeface="Arial"/>
+              </a:defRPr>
+            </a:lvl9pPr>
+          </a:lstStyle>
+          <a:p xmlns:a="http://schemas.openxmlformats.org/drawingml/2006/main">
+            <a:pPr>
+              <a:defRPr sz="2250" b="0">
+                <a:solidFill>
+                  <a:srgbClr val="203747"/>
+                </a:solidFill>
+                <a:latin typeface="Arial"/>
+                <a:ea typeface="Arial"/>
+                <a:cs typeface="Arial"/>
+              </a:defRPr>
+            </a:pPr>
+            <a:r>
+              <a:rPr sz="2250" b="0">
+                <a:solidFill>
+                  <a:srgbClr val="203747"/>
+                </a:solidFill>
+                <a:latin typeface="Arial"/>
+                <a:ea typeface="Arial"/>
+                <a:cs typeface="Arial"/>
+              </a:rPr>
+              <a:t>Main: 261 valid grade rows plus attendance and conduct</a:t>
+            </a:r>
+          </a:p>
+        </p:txBody>
+      </p:sp>
+      <p:sp>
+        <p:nvSpPr>
+          <p:cNvPr id="7" name="">
+            <a:extLst xmlns:a="http://schemas.openxmlformats.org/drawingml/2006/main">
+              <a:ext uri="{FF2B5EF4-FFF2-40B4-BE49-F238E27FC236}">
+                <a16:creationId xmlns:a16="http://schemas.microsoft.com/office/drawing/2014/main" id="{43A92F9D-436C-46E3-B9B3-1DEDC34A3CB0}"/>
+              </a:ext>
+            </a:extLst>
+          </p:cNvPr>
+          <p:cNvSpPr>
+            <a:spLocks xmlns:a="http://schemas.openxmlformats.org/drawingml/2006/main" noGrp="1"/>
+          </p:cNvSpPr>
+          <p:nvPr/>
+        </p:nvSpPr>
+        <p:spPr>
+          <a:xfrm xmlns:a="http://schemas.openxmlformats.org/drawingml/2006/main">
+            <a:off x="762000" y="3952875"/>
+            <a:ext cx="609600" cy="428625"/>
+          </a:xfrm>
+          <a:prstGeom xmlns:a="http://schemas.openxmlformats.org/drawingml/2006/main" prst="rect">
+            <a:avLst/>
+          </a:prstGeom>
+          <a:noFill xmlns:a="http://schemas.openxmlformats.org/drawingml/2006/main"/>
+          <a:ln xmlns:a="http://schemas.openxmlformats.org/drawingml/2006/main" w="0">
+            <a:noFill/>
+          </a:ln>
+        </p:spPr>
+        <p:txBody>
+          <a:bodyPr xmlns:a="http://schemas.openxmlformats.org/drawingml/2006/main"/>
+          <a:lstStyle xmlns:a="http://schemas.openxmlformats.org/drawingml/2006/main">
+            <a:defPPr>
+              <a:defRPr sz="1800" b="1">
+                <a:solidFill>
+                  <a:srgbClr val="087F8C"/>
+                </a:solidFill>
+                <a:latin typeface="Arial"/>
+                <a:ea typeface="Arial"/>
+                <a:cs typeface="Arial"/>
+              </a:defRPr>
+            </a:defPPr>
+            <a:lvl1pPr>
+              <a:defRPr sz="1800" b="1">
+                <a:solidFill>
+                  <a:srgbClr val="087F8C"/>
+                </a:solidFill>
+                <a:latin typeface="Arial"/>
+                <a:ea typeface="Arial"/>
+                <a:cs typeface="Arial"/>
+              </a:defRPr>
+            </a:lvl1pPr>
+            <a:lvl2pPr>
+              <a:defRPr sz="1800" b="1">
+                <a:solidFill>
+                  <a:srgbClr val="087F8C"/>
+                </a:solidFill>
+                <a:latin typeface="Arial"/>
+                <a:ea typeface="Arial"/>
+                <a:cs typeface="Arial"/>
+              </a:defRPr>
+            </a:lvl2pPr>
+            <a:lvl3pPr>
+              <a:defRPr sz="1800" b="1">
+                <a:solidFill>
+                  <a:srgbClr val="087F8C"/>
+                </a:solidFill>
+                <a:latin typeface="Arial"/>
+                <a:ea typeface="Arial"/>
+                <a:cs typeface="Arial"/>
+              </a:defRPr>
+            </a:lvl3pPr>
+            <a:lvl4pPr>
+              <a:defRPr sz="1800" b="1">
+                <a:solidFill>
+                  <a:srgbClr val="087F8C"/>
+                </a:solidFill>
+                <a:latin typeface="Arial"/>
+                <a:ea typeface="Arial"/>
+                <a:cs typeface="Arial"/>
+              </a:defRPr>
+            </a:lvl4pPr>
+            <a:lvl5pPr>
+              <a:defRPr sz="1800" b="1">
+                <a:solidFill>
+                  <a:srgbClr val="087F8C"/>
+                </a:solidFill>
+                <a:latin typeface="Arial"/>
+                <a:ea typeface="Arial"/>
+                <a:cs typeface="Arial"/>
+              </a:defRPr>
+            </a:lvl5pPr>
+            <a:lvl6pPr>
+              <a:defRPr sz="1800" b="1">
+                <a:solidFill>
+                  <a:srgbClr val="087F8C"/>
+                </a:solidFill>
+                <a:latin typeface="Arial"/>
+                <a:ea typeface="Arial"/>
+                <a:cs typeface="Arial"/>
+              </a:defRPr>
+            </a:lvl6pPr>
+            <a:lvl7pPr>
+              <a:defRPr sz="1800" b="1">
+                <a:solidFill>
+                  <a:srgbClr val="087F8C"/>
+                </a:solidFill>
+                <a:latin typeface="Arial"/>
+                <a:ea typeface="Arial"/>
+                <a:cs typeface="Arial"/>
+              </a:defRPr>
+            </a:lvl7pPr>
+            <a:lvl8pPr>
+              <a:defRPr sz="1800" b="1">
+                <a:solidFill>
+                  <a:srgbClr val="087F8C"/>
+                </a:solidFill>
+                <a:latin typeface="Arial"/>
+                <a:ea typeface="Arial"/>
+                <a:cs typeface="Arial"/>
+              </a:defRPr>
+            </a:lvl8pPr>
+            <a:lvl9pPr>
+              <a:defRPr sz="1800" b="1">
+                <a:solidFill>
+                  <a:srgbClr val="087F8C"/>
+                </a:solidFill>
+                <a:latin typeface="Arial"/>
+                <a:ea typeface="Arial"/>
+                <a:cs typeface="Arial"/>
+              </a:defRPr>
+            </a:lvl9pPr>
+          </a:lstStyle>
+          <a:p xmlns:a="http://schemas.openxmlformats.org/drawingml/2006/main">
+            <a:pPr>
+              <a:defRPr sz="1800" b="1">
+                <a:solidFill>
+                  <a:srgbClr val="087F8C"/>
+                </a:solidFill>
+                <a:latin typeface="Arial"/>
+                <a:ea typeface="Arial"/>
+                <a:cs typeface="Arial"/>
+              </a:defRPr>
+            </a:pPr>
+            <a:r>
+              <a:rPr sz="1800" b="1">
+                <a:solidFill>
+                  <a:srgbClr val="087F8C"/>
+                </a:solidFill>
+                <a:latin typeface="Arial"/>
+                <a:ea typeface="Arial"/>
+                <a:cs typeface="Arial"/>
+              </a:rPr>
+              <a:t>03</a:t>
+            </a:r>
+          </a:p>
+        </p:txBody>
+      </p:sp>
+      <p:sp>
+        <p:nvSpPr>
+          <p:cNvPr id="8" name="">
+            <a:extLst xmlns:a="http://schemas.openxmlformats.org/drawingml/2006/main">
+              <a:ext uri="{FF2B5EF4-FFF2-40B4-BE49-F238E27FC236}">
+                <a16:creationId xmlns:a16="http://schemas.microsoft.com/office/drawing/2014/main" id="{A6FC88EF-9B31-41D2-BAFC-C4C0B383639C}"/>
+              </a:ext>
+            </a:extLst>
+          </p:cNvPr>
+          <p:cNvSpPr>
+            <a:spLocks xmlns:a="http://schemas.openxmlformats.org/drawingml/2006/main" noGrp="1"/>
+          </p:cNvSpPr>
+          <p:nvPr/>
+        </p:nvSpPr>
+        <p:spPr>
+          <a:xfrm xmlns:a="http://schemas.openxmlformats.org/drawingml/2006/main">
+            <a:off x="1619250" y="3905250"/>
+            <a:ext cx="9715500" cy="742950"/>
+          </a:xfrm>
+          <a:prstGeom xmlns:a="http://schemas.openxmlformats.org/drawingml/2006/main" prst="rect">
+            <a:avLst/>
+          </a:prstGeom>
+          <a:noFill xmlns:a="http://schemas.openxmlformats.org/drawingml/2006/main"/>
+          <a:ln xmlns:a="http://schemas.openxmlformats.org/drawingml/2006/main" w="0">
+            <a:noFill/>
+          </a:ln>
+        </p:spPr>
+        <p:txBody>
+          <a:bodyPr xmlns:a="http://schemas.openxmlformats.org/drawingml/2006/main"/>
+          <a:lstStyle xmlns:a="http://schemas.openxmlformats.org/drawingml/2006/main">
+            <a:defPPr>
+              <a:defRPr sz="2250" b="0">
+                <a:solidFill>
+                  <a:srgbClr val="203747"/>
+                </a:solidFill>
+                <a:latin typeface="Arial"/>
+                <a:ea typeface="Arial"/>
+                <a:cs typeface="Arial"/>
+              </a:defRPr>
+            </a:defPPr>
+            <a:lvl1pPr>
+              <a:defRPr sz="2250" b="0">
+                <a:solidFill>
+                  <a:srgbClr val="203747"/>
+                </a:solidFill>
+                <a:latin typeface="Arial"/>
+                <a:ea typeface="Arial"/>
+                <a:cs typeface="Arial"/>
+              </a:defRPr>
+            </a:lvl1pPr>
+            <a:lvl2pPr>
+              <a:defRPr sz="2250" b="0">
+                <a:solidFill>
+                  <a:srgbClr val="203747"/>
+                </a:solidFill>
+                <a:latin typeface="Arial"/>
+                <a:ea typeface="Arial"/>
+                <a:cs typeface="Arial"/>
+              </a:defRPr>
+            </a:lvl2pPr>
+            <a:lvl3pPr>
+              <a:defRPr sz="2250" b="0">
+                <a:solidFill>
+                  <a:srgbClr val="203747"/>
+                </a:solidFill>
+                <a:latin typeface="Arial"/>
+                <a:ea typeface="Arial"/>
+                <a:cs typeface="Arial"/>
+              </a:defRPr>
+            </a:lvl3pPr>
+            <a:lvl4pPr>
+              <a:defRPr sz="2250" b="0">
+                <a:solidFill>
+                  <a:srgbClr val="203747"/>
+                </a:solidFill>
+                <a:latin typeface="Arial"/>
+                <a:ea typeface="Arial"/>
+                <a:cs typeface="Arial"/>
+              </a:defRPr>
+            </a:lvl4pPr>
+            <a:lvl5pPr>
+              <a:defRPr sz="2250" b="0">
+                <a:solidFill>
+                  <a:srgbClr val="203747"/>
+                </a:solidFill>
+                <a:latin typeface="Arial"/>
+                <a:ea typeface="Arial"/>
+                <a:cs typeface="Arial"/>
+              </a:defRPr>
+            </a:lvl5pPr>
+            <a:lvl6pPr>
+              <a:defRPr sz="2250" b="0">
+                <a:solidFill>
+                  <a:srgbClr val="203747"/>
+                </a:solidFill>
+                <a:latin typeface="Arial"/>
+                <a:ea typeface="Arial"/>
+                <a:cs typeface="Arial"/>
+              </a:defRPr>
+            </a:lvl6pPr>
+            <a:lvl7pPr>
+              <a:defRPr sz="2250" b="0">
+                <a:solidFill>
+                  <a:srgbClr val="203747"/>
+                </a:solidFill>
+                <a:latin typeface="Arial"/>
+                <a:ea typeface="Arial"/>
+                <a:cs typeface="Arial"/>
+              </a:defRPr>
+            </a:lvl7pPr>
+            <a:lvl8pPr>
+              <a:defRPr sz="2250" b="0">
+                <a:solidFill>
+                  <a:srgbClr val="203747"/>
+                </a:solidFill>
+                <a:latin typeface="Arial"/>
+                <a:ea typeface="Arial"/>
+                <a:cs typeface="Arial"/>
+              </a:defRPr>
+            </a:lvl8pPr>
+            <a:lvl9pPr>
+              <a:defRPr sz="2250" b="0">
+                <a:solidFill>
+                  <a:srgbClr val="203747"/>
+                </a:solidFill>
+                <a:latin typeface="Arial"/>
+                <a:ea typeface="Arial"/>
+                <a:cs typeface="Arial"/>
+              </a:defRPr>
+            </a:lvl9pPr>
+          </a:lstStyle>
+          <a:p xmlns:a="http://schemas.openxmlformats.org/drawingml/2006/main">
+            <a:pPr>
+              <a:defRPr sz="2250" b="0">
+                <a:solidFill>
+                  <a:srgbClr val="203747"/>
+                </a:solidFill>
+                <a:latin typeface="Arial"/>
+                <a:ea typeface="Arial"/>
+                <a:cs typeface="Arial"/>
+              </a:defRPr>
+            </a:pPr>
+            <a:r>
+              <a:rPr sz="2250" b="0">
+                <a:solidFill>
+                  <a:srgbClr val="203747"/>
+                </a:solidFill>
+                <a:latin typeface="Arial"/>
+                <a:ea typeface="Arial"/>
+                <a:cs typeface="Arial"/>
+              </a:rPr>
+              <a:t>Finance data is provisional and differs from main</a:t>
+            </a:r>
+          </a:p>
+        </p:txBody>
+      </p:sp>
+      <p:sp>
+        <p:nvSpPr>
+          <p:cNvPr id="9" name="">
+            <a:extLst xmlns:a="http://schemas.openxmlformats.org/drawingml/2006/main">
+              <a:ext uri="{FF2B5EF4-FFF2-40B4-BE49-F238E27FC236}">
+                <a16:creationId xmlns:a16="http://schemas.microsoft.com/office/drawing/2014/main" id="{CCD58A52-08FB-4A70-BEC5-C2311D328AD0}"/>
+              </a:ext>
+            </a:extLst>
+          </p:cNvPr>
+          <p:cNvSpPr>
+            <a:spLocks xmlns:a="http://schemas.openxmlformats.org/drawingml/2006/main" noGrp="1"/>
+          </p:cNvSpPr>
+          <p:nvPr/>
+        </p:nvSpPr>
+        <p:spPr>
+          <a:xfrm xmlns:a="http://schemas.openxmlformats.org/drawingml/2006/main">
+            <a:off x="762000" y="4905375"/>
+            <a:ext cx="609600" cy="428625"/>
+          </a:xfrm>
+          <a:prstGeom xmlns:a="http://schemas.openxmlformats.org/drawingml/2006/main" prst="rect">
+            <a:avLst/>
+          </a:prstGeom>
+          <a:noFill xmlns:a="http://schemas.openxmlformats.org/drawingml/2006/main"/>
+          <a:ln xmlns:a="http://schemas.openxmlformats.org/drawingml/2006/main" w="0">
+            <a:noFill/>
+          </a:ln>
+        </p:spPr>
+        <p:txBody>
+          <a:bodyPr xmlns:a="http://schemas.openxmlformats.org/drawingml/2006/main"/>
+          <a:lstStyle xmlns:a="http://schemas.openxmlformats.org/drawingml/2006/main">
+            <a:defPPr>
+              <a:defRPr sz="1800" b="1">
+                <a:solidFill>
+                  <a:srgbClr val="087F8C"/>
+                </a:solidFill>
+                <a:latin typeface="Arial"/>
+                <a:ea typeface="Arial"/>
+                <a:cs typeface="Arial"/>
+              </a:defRPr>
+            </a:defPPr>
+            <a:lvl1pPr>
+              <a:defRPr sz="1800" b="1">
+                <a:solidFill>
+                  <a:srgbClr val="087F8C"/>
+                </a:solidFill>
+                <a:latin typeface="Arial"/>
+                <a:ea typeface="Arial"/>
+                <a:cs typeface="Arial"/>
+              </a:defRPr>
+            </a:lvl1pPr>
+            <a:lvl2pPr>
+              <a:defRPr sz="1800" b="1">
+                <a:solidFill>
+                  <a:srgbClr val="087F8C"/>
+                </a:solidFill>
+                <a:latin typeface="Arial"/>
+                <a:ea typeface="Arial"/>
+                <a:cs typeface="Arial"/>
+              </a:defRPr>
+            </a:lvl2pPr>
+            <a:lvl3pPr>
+              <a:defRPr sz="1800" b="1">
+                <a:solidFill>
+                  <a:srgbClr val="087F8C"/>
+                </a:solidFill>
+                <a:latin typeface="Arial"/>
+                <a:ea typeface="Arial"/>
+                <a:cs typeface="Arial"/>
+              </a:defRPr>
+            </a:lvl3pPr>
+            <a:lvl4pPr>
+              <a:defRPr sz="1800" b="1">
+                <a:solidFill>
+                  <a:srgbClr val="087F8C"/>
+                </a:solidFill>
+                <a:latin typeface="Arial"/>
+                <a:ea typeface="Arial"/>
+                <a:cs typeface="Arial"/>
+              </a:defRPr>
+            </a:lvl4pPr>
+            <a:lvl5pPr>
+              <a:defRPr sz="1800" b="1">
+                <a:solidFill>
+                  <a:srgbClr val="087F8C"/>
+                </a:solidFill>
+                <a:latin typeface="Arial"/>
+                <a:ea typeface="Arial"/>
+                <a:cs typeface="Arial"/>
+              </a:defRPr>
+            </a:lvl5pPr>
+            <a:lvl6pPr>
+              <a:defRPr sz="1800" b="1">
+                <a:solidFill>
+                  <a:srgbClr val="087F8C"/>
+                </a:solidFill>
+                <a:latin typeface="Arial"/>
+                <a:ea typeface="Arial"/>
+                <a:cs typeface="Arial"/>
+              </a:defRPr>
+            </a:lvl6pPr>
+            <a:lvl7pPr>
+              <a:defRPr sz="1800" b="1">
+                <a:solidFill>
+                  <a:srgbClr val="087F8C"/>
+                </a:solidFill>
+                <a:latin typeface="Arial"/>
+                <a:ea typeface="Arial"/>
+                <a:cs typeface="Arial"/>
+              </a:defRPr>
+            </a:lvl7pPr>
+            <a:lvl8pPr>
+              <a:defRPr sz="1800" b="1">
+                <a:solidFill>
+                  <a:srgbClr val="087F8C"/>
+                </a:solidFill>
+                <a:latin typeface="Arial"/>
+                <a:ea typeface="Arial"/>
+                <a:cs typeface="Arial"/>
+              </a:defRPr>
+            </a:lvl8pPr>
+            <a:lvl9pPr>
+              <a:defRPr sz="1800" b="1">
+                <a:solidFill>
+                  <a:srgbClr val="087F8C"/>
+                </a:solidFill>
+                <a:latin typeface="Arial"/>
+                <a:ea typeface="Arial"/>
+                <a:cs typeface="Arial"/>
+              </a:defRPr>
+            </a:lvl9pPr>
+          </a:lstStyle>
+          <a:p xmlns:a="http://schemas.openxmlformats.org/drawingml/2006/main">
+            <a:pPr>
+              <a:defRPr sz="1800" b="1">
+                <a:solidFill>
+                  <a:srgbClr val="087F8C"/>
+                </a:solidFill>
+                <a:latin typeface="Arial"/>
+                <a:ea typeface="Arial"/>
+                <a:cs typeface="Arial"/>
+              </a:defRPr>
+            </a:pPr>
+            <a:r>
+              <a:rPr sz="1800" b="1">
+                <a:solidFill>
+                  <a:srgbClr val="087F8C"/>
+                </a:solidFill>
+                <a:latin typeface="Arial"/>
+                <a:ea typeface="Arial"/>
+                <a:cs typeface="Arial"/>
+              </a:rPr>
+              <a:t>04</a:t>
+            </a:r>
+          </a:p>
+        </p:txBody>
+      </p:sp>
+      <p:sp>
+        <p:nvSpPr>
+          <p:cNvPr id="10" name="">
+            <a:extLst xmlns:a="http://schemas.openxmlformats.org/drawingml/2006/main">
+              <a:ext uri="{FF2B5EF4-FFF2-40B4-BE49-F238E27FC236}">
+                <a16:creationId xmlns:a16="http://schemas.microsoft.com/office/drawing/2014/main" id="{C7DEDFA9-F90E-4ECD-BCC4-76A4FF4B0BDC}"/>
+              </a:ext>
+            </a:extLst>
+          </p:cNvPr>
+          <p:cNvSpPr>
+            <a:spLocks xmlns:a="http://schemas.openxmlformats.org/drawingml/2006/main" noGrp="1"/>
+          </p:cNvSpPr>
+          <p:nvPr/>
+        </p:nvSpPr>
+        <p:spPr>
+          <a:xfrm xmlns:a="http://schemas.openxmlformats.org/drawingml/2006/main">
+            <a:off x="1619250" y="4857750"/>
+            <a:ext cx="9715500" cy="742950"/>
+          </a:xfrm>
+          <a:prstGeom xmlns:a="http://schemas.openxmlformats.org/drawingml/2006/main" prst="rect">
+            <a:avLst/>
+          </a:prstGeom>
+          <a:noFill xmlns:a="http://schemas.openxmlformats.org/drawingml/2006/main"/>
+          <a:ln xmlns:a="http://schemas.openxmlformats.org/drawingml/2006/main" w="0">
+            <a:noFill/>
+          </a:ln>
+        </p:spPr>
+        <p:txBody>
+          <a:bodyPr xmlns:a="http://schemas.openxmlformats.org/drawingml/2006/main"/>
+          <a:lstStyle xmlns:a="http://schemas.openxmlformats.org/drawingml/2006/main">
+            <a:defPPr>
+              <a:defRPr sz="2250" b="0">
+                <a:solidFill>
+                  <a:srgbClr val="203747"/>
+                </a:solidFill>
+                <a:latin typeface="Arial"/>
+                <a:ea typeface="Arial"/>
+                <a:cs typeface="Arial"/>
+              </a:defRPr>
+            </a:defPPr>
+            <a:lvl1pPr>
+              <a:defRPr sz="2250" b="0">
+                <a:solidFill>
+                  <a:srgbClr val="203747"/>
+                </a:solidFill>
+                <a:latin typeface="Arial"/>
+                <a:ea typeface="Arial"/>
+                <a:cs typeface="Arial"/>
+              </a:defRPr>
+            </a:lvl1pPr>
+            <a:lvl2pPr>
+              <a:defRPr sz="2250" b="0">
+                <a:solidFill>
+                  <a:srgbClr val="203747"/>
+                </a:solidFill>
+                <a:latin typeface="Arial"/>
+                <a:ea typeface="Arial"/>
+                <a:cs typeface="Arial"/>
+              </a:defRPr>
+            </a:lvl2pPr>
+            <a:lvl3pPr>
+              <a:defRPr sz="2250" b="0">
+                <a:solidFill>
+                  <a:srgbClr val="203747"/>
+                </a:solidFill>
+                <a:latin typeface="Arial"/>
+                <a:ea typeface="Arial"/>
+                <a:cs typeface="Arial"/>
+              </a:defRPr>
+            </a:lvl3pPr>
+            <a:lvl4pPr>
+              <a:defRPr sz="2250" b="0">
+                <a:solidFill>
+                  <a:srgbClr val="203747"/>
+                </a:solidFill>
+                <a:latin typeface="Arial"/>
+                <a:ea typeface="Arial"/>
+                <a:cs typeface="Arial"/>
+              </a:defRPr>
+            </a:lvl4pPr>
+            <a:lvl5pPr>
+              <a:defRPr sz="2250" b="0">
+                <a:solidFill>
+                  <a:srgbClr val="203747"/>
+                </a:solidFill>
+                <a:latin typeface="Arial"/>
+                <a:ea typeface="Arial"/>
+                <a:cs typeface="Arial"/>
+              </a:defRPr>
+            </a:lvl5pPr>
+            <a:lvl6pPr>
+              <a:defRPr sz="2250" b="0">
+                <a:solidFill>
+                  <a:srgbClr val="203747"/>
+                </a:solidFill>
+                <a:latin typeface="Arial"/>
+                <a:ea typeface="Arial"/>
+                <a:cs typeface="Arial"/>
+              </a:defRPr>
+            </a:lvl6pPr>
+            <a:lvl7pPr>
+              <a:defRPr sz="2250" b="0">
+                <a:solidFill>
+                  <a:srgbClr val="203747"/>
+                </a:solidFill>
+                <a:latin typeface="Arial"/>
+                <a:ea typeface="Arial"/>
+                <a:cs typeface="Arial"/>
+              </a:defRPr>
+            </a:lvl7pPr>
+            <a:lvl8pPr>
+              <a:defRPr sz="2250" b="0">
+                <a:solidFill>
+                  <a:srgbClr val="203747"/>
+                </a:solidFill>
+                <a:latin typeface="Arial"/>
+                <a:ea typeface="Arial"/>
+                <a:cs typeface="Arial"/>
+              </a:defRPr>
+            </a:lvl8pPr>
+            <a:lvl9pPr>
+              <a:defRPr sz="2250" b="0">
+                <a:solidFill>
+                  <a:srgbClr val="203747"/>
+                </a:solidFill>
+                <a:latin typeface="Arial"/>
+                <a:ea typeface="Arial"/>
+                <a:cs typeface="Arial"/>
+              </a:defRPr>
+            </a:lvl9pPr>
+          </a:lstStyle>
+          <a:p xmlns:a="http://schemas.openxmlformats.org/drawingml/2006/main">
+            <a:pPr>
+              <a:defRPr sz="2250" b="0">
+                <a:solidFill>
+                  <a:srgbClr val="203747"/>
+                </a:solidFill>
+                <a:latin typeface="Arial"/>
+                <a:ea typeface="Arial"/>
+                <a:cs typeface="Arial"/>
+              </a:defRPr>
+            </a:pPr>
+            <a:r>
+              <a:rPr sz="2250" b="0">
+                <a:solidFill>
+                  <a:srgbClr val="203747"/>
+                </a:solidFill>
+                <a:latin typeface="Arial"/>
+                <a:ea typeface="Arial"/>
+                <a:cs typeface="Arial"/>
+              </a:rPr>
+              <a:t>Recompute finance expectations after PR2 merges</a:t>
+            </a:r>
+          </a:p>
+        </p:txBody>
+      </p:sp>
+      <p:sp>
+        <p:nvSpPr>
+          <p:cNvPr id="11" name="">
+            <a:extLst xmlns:a="http://schemas.openxmlformats.org/drawingml/2006/main">
+              <a:ext uri="{FF2B5EF4-FFF2-40B4-BE49-F238E27FC236}">
+                <a16:creationId xmlns:a16="http://schemas.microsoft.com/office/drawing/2014/main" id="{9F101787-9DB0-4AA3-AF27-5A46DA7AC8AB}"/>
               </a:ext>
             </a:extLst>
           </p:cNvPr>
@@ -37511,7 +38384,7 @@
     </p:spTree>
     <p:extLst>
       <p:ext uri="{BB962C8B-B14F-4D97-AF65-F5344CB8AC3E}">
-        <p14:creationId xmlns:p14="http://schemas.microsoft.com/office/powerpoint/2010/main" val="1780650736"/>
+        <p14:creationId xmlns:p14="http://schemas.microsoft.com/office/powerpoint/2010/main" val="1566064023"/>
       </p:ext>
     </p:extLst>
   </p:cSld>
@@ -37542,7 +38415,7 @@
           <p:cNvPr id="12" name="">
             <a:extLst xmlns:a="http://schemas.openxmlformats.org/drawingml/2006/main">
               <a:ext uri="{FF2B5EF4-FFF2-40B4-BE49-F238E27FC236}">
-                <a16:creationId xmlns:a16="http://schemas.microsoft.com/office/drawing/2014/main" id="{1BA0CA75-ABF4-492F-8938-F3FD2DF012C3}"/>
+                <a16:creationId xmlns:a16="http://schemas.microsoft.com/office/drawing/2014/main" id="{6477B99A-D1E6-483B-9952-C673128D51A0}"/>
               </a:ext>
             </a:extLst>
           </p:cNvPr>
@@ -37698,7 +38571,7 @@
           <p:cNvPr id="2" name="">
             <a:extLst xmlns:a="http://schemas.openxmlformats.org/drawingml/2006/main">
               <a:ext uri="{FF2B5EF4-FFF2-40B4-BE49-F238E27FC236}">
-                <a16:creationId xmlns:a16="http://schemas.microsoft.com/office/drawing/2014/main" id="{B599901E-E555-4D98-A185-B9AAFA642EE2}"/>
+                <a16:creationId xmlns:a16="http://schemas.microsoft.com/office/drawing/2014/main" id="{10081C22-3596-49BD-B026-1D8875E26434}"/>
               </a:ext>
             </a:extLst>
           </p:cNvPr>
@@ -37728,7 +38601,7 @@
           <p:cNvPr id="3" name="">
             <a:extLst xmlns:a="http://schemas.openxmlformats.org/drawingml/2006/main">
               <a:ext uri="{FF2B5EF4-FFF2-40B4-BE49-F238E27FC236}">
-                <a16:creationId xmlns:a16="http://schemas.microsoft.com/office/drawing/2014/main" id="{B15047BC-45B1-4079-AF7E-FC5363775330}"/>
+                <a16:creationId xmlns:a16="http://schemas.microsoft.com/office/drawing/2014/main" id="{A7568BD5-EB6D-4068-A758-4FAF10CF567F}"/>
               </a:ext>
             </a:extLst>
           </p:cNvPr>
@@ -37884,7 +38757,7 @@
           <p:cNvPr id="4" name="">
             <a:extLst xmlns:a="http://schemas.openxmlformats.org/drawingml/2006/main">
               <a:ext uri="{FF2B5EF4-FFF2-40B4-BE49-F238E27FC236}">
-                <a16:creationId xmlns:a16="http://schemas.microsoft.com/office/drawing/2014/main" id="{6110AF51-BAC4-4C33-B3A2-11F83B6F8984}"/>
+                <a16:creationId xmlns:a16="http://schemas.microsoft.com/office/drawing/2014/main" id="{482FFB5E-7226-4FC6-B352-B5DC9AA798E4}"/>
               </a:ext>
             </a:extLst>
           </p:cNvPr>
@@ -38040,7 +38913,7 @@
           <p:cNvPr id="5" name="">
             <a:extLst xmlns:a="http://schemas.openxmlformats.org/drawingml/2006/main">
               <a:ext uri="{FF2B5EF4-FFF2-40B4-BE49-F238E27FC236}">
-                <a16:creationId xmlns:a16="http://schemas.microsoft.com/office/drawing/2014/main" id="{4D0CA4B8-7F45-4AD9-8004-2C53E286AA6E}"/>
+                <a16:creationId xmlns:a16="http://schemas.microsoft.com/office/drawing/2014/main" id="{487A1A2A-4340-49D5-80B5-1A6E60EA02AF}"/>
               </a:ext>
             </a:extLst>
           </p:cNvPr>
@@ -38196,7 +39069,7 @@
           <p:cNvPr id="6" name="">
             <a:extLst xmlns:a="http://schemas.openxmlformats.org/drawingml/2006/main">
               <a:ext uri="{FF2B5EF4-FFF2-40B4-BE49-F238E27FC236}">
-                <a16:creationId xmlns:a16="http://schemas.microsoft.com/office/drawing/2014/main" id="{21A73D6F-2814-4708-A9EE-FED6FA9A784E}"/>
+                <a16:creationId xmlns:a16="http://schemas.microsoft.com/office/drawing/2014/main" id="{4082539F-8941-491F-B000-605BB92808B2}"/>
               </a:ext>
             </a:extLst>
           </p:cNvPr>
@@ -38352,7 +39225,7 @@
           <p:cNvPr id="7" name="">
             <a:extLst xmlns:a="http://schemas.openxmlformats.org/drawingml/2006/main">
               <a:ext uri="{FF2B5EF4-FFF2-40B4-BE49-F238E27FC236}">
-                <a16:creationId xmlns:a16="http://schemas.microsoft.com/office/drawing/2014/main" id="{048B31E5-D406-4D84-99C8-27897CED607C}"/>
+                <a16:creationId xmlns:a16="http://schemas.microsoft.com/office/drawing/2014/main" id="{09718AA8-C548-4B1C-B786-8FAEF36F9023}"/>
               </a:ext>
             </a:extLst>
           </p:cNvPr>
@@ -38508,7 +39381,7 @@
           <p:cNvPr id="8" name="">
             <a:extLst xmlns:a="http://schemas.openxmlformats.org/drawingml/2006/main">
               <a:ext uri="{FF2B5EF4-FFF2-40B4-BE49-F238E27FC236}">
-                <a16:creationId xmlns:a16="http://schemas.microsoft.com/office/drawing/2014/main" id="{ED97F024-092D-4BA0-A39E-81E6E6B28BE1}"/>
+                <a16:creationId xmlns:a16="http://schemas.microsoft.com/office/drawing/2014/main" id="{A050D702-33FC-431C-BC4A-7B3982538125}"/>
               </a:ext>
             </a:extLst>
           </p:cNvPr>
@@ -38664,7 +39537,7 @@
           <p:cNvPr id="9" name="">
             <a:extLst xmlns:a="http://schemas.openxmlformats.org/drawingml/2006/main">
               <a:ext uri="{FF2B5EF4-FFF2-40B4-BE49-F238E27FC236}">
-                <a16:creationId xmlns:a16="http://schemas.microsoft.com/office/drawing/2014/main" id="{156E7861-4401-40EE-8B22-33B5F00B11C3}"/>
+                <a16:creationId xmlns:a16="http://schemas.microsoft.com/office/drawing/2014/main" id="{67E4EE75-3848-4E72-9932-AAF23F7D353D}"/>
               </a:ext>
             </a:extLst>
           </p:cNvPr>
@@ -38820,7 +39693,7 @@
           <p:cNvPr id="10" name="">
             <a:extLst xmlns:a="http://schemas.openxmlformats.org/drawingml/2006/main">
               <a:ext uri="{FF2B5EF4-FFF2-40B4-BE49-F238E27FC236}">
-                <a16:creationId xmlns:a16="http://schemas.microsoft.com/office/drawing/2014/main" id="{B57FB324-FF2D-4E6F-B77D-5D7F7695277A}"/>
+                <a16:creationId xmlns:a16="http://schemas.microsoft.com/office/drawing/2014/main" id="{B712FF02-A849-46F2-B5D5-73CDD1A55306}"/>
               </a:ext>
             </a:extLst>
           </p:cNvPr>
@@ -38976,7 +39849,7 @@
           <p:cNvPr id="11" name="">
             <a:extLst xmlns:a="http://schemas.openxmlformats.org/drawingml/2006/main">
               <a:ext uri="{FF2B5EF4-FFF2-40B4-BE49-F238E27FC236}">
-                <a16:creationId xmlns:a16="http://schemas.microsoft.com/office/drawing/2014/main" id="{1BEBE4A3-1D68-4F31-B180-DBB5218BA6BF}"/>
+                <a16:creationId xmlns:a16="http://schemas.microsoft.com/office/drawing/2014/main" id="{F09452A2-245E-4C3D-82BC-D8D69B6724BE}"/>
               </a:ext>
             </a:extLst>
           </p:cNvPr>
@@ -39130,7 +40003,7 @@
     </p:spTree>
     <p:extLst>
       <p:ext uri="{BB962C8B-B14F-4D97-AF65-F5344CB8AC3E}">
-        <p14:creationId xmlns:p14="http://schemas.microsoft.com/office/powerpoint/2010/main" val="982481481"/>
+        <p14:creationId xmlns:p14="http://schemas.microsoft.com/office/powerpoint/2010/main" val="822140235"/>
       </p:ext>
     </p:extLst>
   </p:cSld>
@@ -39161,7 +40034,7 @@
           <p:cNvPr id="12" name="">
             <a:extLst xmlns:a="http://schemas.openxmlformats.org/drawingml/2006/main">
               <a:ext uri="{FF2B5EF4-FFF2-40B4-BE49-F238E27FC236}">
-                <a16:creationId xmlns:a16="http://schemas.microsoft.com/office/drawing/2014/main" id="{58B87485-27A1-4D91-AB1D-8FB81C0A5965}"/>
+                <a16:creationId xmlns:a16="http://schemas.microsoft.com/office/drawing/2014/main" id="{EBF3A3A7-BAEB-44B7-B7C1-5CF079549066}"/>
               </a:ext>
             </a:extLst>
           </p:cNvPr>
@@ -39317,7 +40190,7 @@
           <p:cNvPr id="2" name="">
             <a:extLst xmlns:a="http://schemas.openxmlformats.org/drawingml/2006/main">
               <a:ext uri="{FF2B5EF4-FFF2-40B4-BE49-F238E27FC236}">
-                <a16:creationId xmlns:a16="http://schemas.microsoft.com/office/drawing/2014/main" id="{67F64B36-D441-4800-A69A-45075FE56294}"/>
+                <a16:creationId xmlns:a16="http://schemas.microsoft.com/office/drawing/2014/main" id="{C08DD253-1CFB-44B4-9327-EF59BDEF8D43}"/>
               </a:ext>
             </a:extLst>
           </p:cNvPr>
@@ -39347,7 +40220,7 @@
           <p:cNvPr id="3" name="">
             <a:extLst xmlns:a="http://schemas.openxmlformats.org/drawingml/2006/main">
               <a:ext uri="{FF2B5EF4-FFF2-40B4-BE49-F238E27FC236}">
-                <a16:creationId xmlns:a16="http://schemas.microsoft.com/office/drawing/2014/main" id="{05C21950-B685-4153-8BFB-13EFF82FCC65}"/>
+                <a16:creationId xmlns:a16="http://schemas.microsoft.com/office/drawing/2014/main" id="{03F868BB-D416-41FE-94A9-762C792F6DDE}"/>
               </a:ext>
             </a:extLst>
           </p:cNvPr>
@@ -39503,7 +40376,7 @@
           <p:cNvPr id="4" name="">
             <a:extLst xmlns:a="http://schemas.openxmlformats.org/drawingml/2006/main">
               <a:ext uri="{FF2B5EF4-FFF2-40B4-BE49-F238E27FC236}">
-                <a16:creationId xmlns:a16="http://schemas.microsoft.com/office/drawing/2014/main" id="{0200C694-85B3-4C32-9796-9794D2D68F21}"/>
+                <a16:creationId xmlns:a16="http://schemas.microsoft.com/office/drawing/2014/main" id="{1274D5D3-F5C1-4215-8B26-C545E7E2DFB0}"/>
               </a:ext>
             </a:extLst>
           </p:cNvPr>
@@ -39659,7 +40532,7 @@
           <p:cNvPr id="5" name="">
             <a:extLst xmlns:a="http://schemas.openxmlformats.org/drawingml/2006/main">
               <a:ext uri="{FF2B5EF4-FFF2-40B4-BE49-F238E27FC236}">
-                <a16:creationId xmlns:a16="http://schemas.microsoft.com/office/drawing/2014/main" id="{035DE9A2-41B0-49A5-B89E-49D1DAF02B2C}"/>
+                <a16:creationId xmlns:a16="http://schemas.microsoft.com/office/drawing/2014/main" id="{8250BC4D-AC99-4842-BB55-D0ACD6A92332}"/>
               </a:ext>
             </a:extLst>
           </p:cNvPr>
@@ -39815,7 +40688,7 @@
           <p:cNvPr id="6" name="">
             <a:extLst xmlns:a="http://schemas.openxmlformats.org/drawingml/2006/main">
               <a:ext uri="{FF2B5EF4-FFF2-40B4-BE49-F238E27FC236}">
-                <a16:creationId xmlns:a16="http://schemas.microsoft.com/office/drawing/2014/main" id="{B9647475-B747-4F70-9BD0-2C8B4AF66DA0}"/>
+                <a16:creationId xmlns:a16="http://schemas.microsoft.com/office/drawing/2014/main" id="{709DFE7F-84E8-4FB0-A062-91DA894D7B9C}"/>
               </a:ext>
             </a:extLst>
           </p:cNvPr>
@@ -39971,7 +40844,7 @@
           <p:cNvPr id="7" name="">
             <a:extLst xmlns:a="http://schemas.openxmlformats.org/drawingml/2006/main">
               <a:ext uri="{FF2B5EF4-FFF2-40B4-BE49-F238E27FC236}">
-                <a16:creationId xmlns:a16="http://schemas.microsoft.com/office/drawing/2014/main" id="{685FCC67-DEE2-450B-BAFA-2B0694FC151F}"/>
+                <a16:creationId xmlns:a16="http://schemas.microsoft.com/office/drawing/2014/main" id="{E317D7C3-FB3E-4AD7-BA29-21288BB27B5F}"/>
               </a:ext>
             </a:extLst>
           </p:cNvPr>
@@ -40127,7 +41000,7 @@
           <p:cNvPr id="8" name="">
             <a:extLst xmlns:a="http://schemas.openxmlformats.org/drawingml/2006/main">
               <a:ext uri="{FF2B5EF4-FFF2-40B4-BE49-F238E27FC236}">
-                <a16:creationId xmlns:a16="http://schemas.microsoft.com/office/drawing/2014/main" id="{EFAA7DD2-B141-4006-A09E-A97731A51021}"/>
+                <a16:creationId xmlns:a16="http://schemas.microsoft.com/office/drawing/2014/main" id="{B5686E16-B737-47DA-B3E3-0B7EC39CBA3A}"/>
               </a:ext>
             </a:extLst>
           </p:cNvPr>
@@ -40283,7 +41156,7 @@
           <p:cNvPr id="9" name="">
             <a:extLst xmlns:a="http://schemas.openxmlformats.org/drawingml/2006/main">
               <a:ext uri="{FF2B5EF4-FFF2-40B4-BE49-F238E27FC236}">
-                <a16:creationId xmlns:a16="http://schemas.microsoft.com/office/drawing/2014/main" id="{5158E03B-7A0D-4253-B5E2-C210C1FAA046}"/>
+                <a16:creationId xmlns:a16="http://schemas.microsoft.com/office/drawing/2014/main" id="{01299C1A-0A78-48C1-98A3-0CD20765DE08}"/>
               </a:ext>
             </a:extLst>
           </p:cNvPr>
@@ -40439,7 +41312,7 @@
           <p:cNvPr id="10" name="">
             <a:extLst xmlns:a="http://schemas.openxmlformats.org/drawingml/2006/main">
               <a:ext uri="{FF2B5EF4-FFF2-40B4-BE49-F238E27FC236}">
-                <a16:creationId xmlns:a16="http://schemas.microsoft.com/office/drawing/2014/main" id="{6AD1D8E3-274F-466C-BD7E-F7A1AE76E8FB}"/>
+                <a16:creationId xmlns:a16="http://schemas.microsoft.com/office/drawing/2014/main" id="{7930AB4D-0860-4A9F-9D80-8268F352A87F}"/>
               </a:ext>
             </a:extLst>
           </p:cNvPr>
@@ -40595,7 +41468,7 @@
           <p:cNvPr id="11" name="">
             <a:extLst xmlns:a="http://schemas.openxmlformats.org/drawingml/2006/main">
               <a:ext uri="{FF2B5EF4-FFF2-40B4-BE49-F238E27FC236}">
-                <a16:creationId xmlns:a16="http://schemas.microsoft.com/office/drawing/2014/main" id="{2FC78F31-1897-4E8E-937B-6915570ED686}"/>
+                <a16:creationId xmlns:a16="http://schemas.microsoft.com/office/drawing/2014/main" id="{BD7537A9-C2A6-4BDD-98B3-08BE1EC85C9E}"/>
               </a:ext>
             </a:extLst>
           </p:cNvPr>
@@ -40749,7 +41622,7 @@
     </p:spTree>
     <p:extLst>
       <p:ext uri="{BB962C8B-B14F-4D97-AF65-F5344CB8AC3E}">
-        <p14:creationId xmlns:p14="http://schemas.microsoft.com/office/powerpoint/2010/main" val="1667825766"/>
+        <p14:creationId xmlns:p14="http://schemas.microsoft.com/office/powerpoint/2010/main" val="1618119703"/>
       </p:ext>
     </p:extLst>
   </p:cSld>
@@ -40780,7 +41653,7 @@
           <p:cNvPr id="5" name="">
             <a:extLst xmlns:a="http://schemas.openxmlformats.org/drawingml/2006/main">
               <a:ext uri="{FF2B5EF4-FFF2-40B4-BE49-F238E27FC236}">
-                <a16:creationId xmlns:a16="http://schemas.microsoft.com/office/drawing/2014/main" id="{AA2E8942-760B-48B1-971E-9DA519561258}"/>
+                <a16:creationId xmlns:a16="http://schemas.microsoft.com/office/drawing/2014/main" id="{A19FB651-BEFB-4F83-B642-E9B091A984E9}"/>
               </a:ext>
             </a:extLst>
           </p:cNvPr>
@@ -40936,7 +41809,7 @@
           <p:cNvPr id="2" name="">
             <a:extLst xmlns:a="http://schemas.openxmlformats.org/drawingml/2006/main">
               <a:ext uri="{FF2B5EF4-FFF2-40B4-BE49-F238E27FC236}">
-                <a16:creationId xmlns:a16="http://schemas.microsoft.com/office/drawing/2014/main" id="{E364D5DB-75F7-43B5-AC47-148286FE6B23}"/>
+                <a16:creationId xmlns:a16="http://schemas.microsoft.com/office/drawing/2014/main" id="{06C676C9-4A40-495A-BA6E-96F50B31ACB6}"/>
               </a:ext>
             </a:extLst>
           </p:cNvPr>
@@ -40966,7 +41839,7 @@
           <p:cNvPr id="3" name="">
             <a:extLst xmlns:a="http://schemas.openxmlformats.org/drawingml/2006/main">
               <a:ext uri="{FF2B5EF4-FFF2-40B4-BE49-F238E27FC236}">
-                <a16:creationId xmlns:a16="http://schemas.microsoft.com/office/drawing/2014/main" id="{4AA8BBE7-B094-406C-A615-54BE3E29B0F0}"/>
+                <a16:creationId xmlns:a16="http://schemas.microsoft.com/office/drawing/2014/main" id="{0FDE9391-1F41-4AAB-9A56-B16E13E8FD10}"/>
               </a:ext>
             </a:extLst>
           </p:cNvPr>
@@ -41244,7 +42117,7 @@
           <p:cNvPr id="4" name="">
             <a:extLst xmlns:a="http://schemas.openxmlformats.org/drawingml/2006/main">
               <a:ext uri="{FF2B5EF4-FFF2-40B4-BE49-F238E27FC236}">
-                <a16:creationId xmlns:a16="http://schemas.microsoft.com/office/drawing/2014/main" id="{06C7A551-0E01-4169-B9A9-6FDF376959C7}"/>
+                <a16:creationId xmlns:a16="http://schemas.microsoft.com/office/drawing/2014/main" id="{811B5921-F841-4243-8E39-123388A09504}"/>
               </a:ext>
             </a:extLst>
           </p:cNvPr>
@@ -41398,7 +42271,7 @@
     </p:spTree>
     <p:extLst>
       <p:ext uri="{BB962C8B-B14F-4D97-AF65-F5344CB8AC3E}">
-        <p14:creationId xmlns:p14="http://schemas.microsoft.com/office/powerpoint/2010/main" val="739662059"/>
+        <p14:creationId xmlns:p14="http://schemas.microsoft.com/office/powerpoint/2010/main" val="2005188684"/>
       </p:ext>
     </p:extLst>
   </p:cSld>
@@ -41429,7 +42302,7 @@
           <p:cNvPr id="5" name="">
             <a:extLst xmlns:a="http://schemas.openxmlformats.org/drawingml/2006/main">
               <a:ext uri="{FF2B5EF4-FFF2-40B4-BE49-F238E27FC236}">
-                <a16:creationId xmlns:a16="http://schemas.microsoft.com/office/drawing/2014/main" id="{18C4ADB0-08F7-4809-A7BF-617F0DDEE696}"/>
+                <a16:creationId xmlns:a16="http://schemas.microsoft.com/office/drawing/2014/main" id="{8A8A2114-349C-4B7C-989F-AF6E17801CFC}"/>
               </a:ext>
             </a:extLst>
           </p:cNvPr>
@@ -41585,7 +42458,7 @@
           <p:cNvPr id="2" name="">
             <a:extLst xmlns:a="http://schemas.openxmlformats.org/drawingml/2006/main">
               <a:ext uri="{FF2B5EF4-FFF2-40B4-BE49-F238E27FC236}">
-                <a16:creationId xmlns:a16="http://schemas.microsoft.com/office/drawing/2014/main" id="{81FC52D5-3143-49CC-972B-A03CDAA08BD9}"/>
+                <a16:creationId xmlns:a16="http://schemas.microsoft.com/office/drawing/2014/main" id="{79742BCE-CB94-4DCA-9DFE-8AB20F6E76B4}"/>
               </a:ext>
             </a:extLst>
           </p:cNvPr>
@@ -41615,7 +42488,7 @@
           <p:cNvPr id="3" name="">
             <a:extLst xmlns:a="http://schemas.openxmlformats.org/drawingml/2006/main">
               <a:ext uri="{FF2B5EF4-FFF2-40B4-BE49-F238E27FC236}">
-                <a16:creationId xmlns:a16="http://schemas.microsoft.com/office/drawing/2014/main" id="{513375D4-AA91-4AAB-8810-BD92D3C26B37}"/>
+                <a16:creationId xmlns:a16="http://schemas.microsoft.com/office/drawing/2014/main" id="{3D13B1BD-D13C-4514-B1B9-94C38504801B}"/>
               </a:ext>
             </a:extLst>
           </p:cNvPr>
@@ -41939,7 +42812,7 @@
           <p:cNvPr id="4" name="">
             <a:extLst xmlns:a="http://schemas.openxmlformats.org/drawingml/2006/main">
               <a:ext uri="{FF2B5EF4-FFF2-40B4-BE49-F238E27FC236}">
-                <a16:creationId xmlns:a16="http://schemas.microsoft.com/office/drawing/2014/main" id="{9E80BD1A-8FF2-48B0-BB8E-BD2E99CED726}"/>
+                <a16:creationId xmlns:a16="http://schemas.microsoft.com/office/drawing/2014/main" id="{D025CAF8-9FC3-4BE6-87A7-50EF2123A82F}"/>
               </a:ext>
             </a:extLst>
           </p:cNvPr>
@@ -42093,7 +42966,7 @@
     </p:spTree>
     <p:extLst>
       <p:ext uri="{BB962C8B-B14F-4D97-AF65-F5344CB8AC3E}">
-        <p14:creationId xmlns:p14="http://schemas.microsoft.com/office/powerpoint/2010/main" val="321729720"/>
+        <p14:creationId xmlns:p14="http://schemas.microsoft.com/office/powerpoint/2010/main" val="263008304"/>
       </p:ext>
     </p:extLst>
   </p:cSld>
